--- a/docs/DAT_PatriMoi_v1.2.pptx
+++ b/docs/DAT_PatriMoi_v1.2.pptx
@@ -4,6 +4,9 @@
   <p:sldMasterIdLst>
     <p:sldMasterId id="2147483648" r:id="rId1"/>
   </p:sldMasterIdLst>
+  <p:notesMasterIdLst>
+    <p:notesMasterId r:id="rId14"/>
+  </p:notesMasterIdLst>
   <p:sldIdLst>
     <p:sldId id="256" r:id="rId2"/>
     <p:sldId id="257" r:id="rId3"/>
@@ -18,10 +21,7 @@
     <p:sldId id="266" r:id="rId12"/>
     <p:sldId id="267" r:id="rId13"/>
   </p:sldIdLst>
-  <p:notesMasterIdLst>
-    <p:notesMasterId r:id="rId14"/>
-  </p:notesMasterIdLst>
-  <p:sldSz cx="9144000" cy="5143500"/>
+  <p:sldSz cx="9144000" cy="5143500" type="screen16x9"/>
   <p:notesSz cx="5143500" cy="9144000"/>
   <p:defaultTextStyle>
     <a:lvl1pPr marL="0" algn="l" defTabSz="914400" rtl="0" eaLnBrk="1" latinLnBrk="0" hangingPunct="1">
@@ -115,6 +115,11 @@
       </a:defRPr>
     </a:lvl9pPr>
   </p:defaultTextStyle>
+  <p:extLst>
+    <p:ext uri="{EFAFB233-063F-42B5-8137-9DF3F51BA10A}">
+      <p15:sldGuideLst xmlns:p15="http://schemas.microsoft.com/office/powerpoint/2012/main"/>
+    </p:ext>
+  </p:extLst>
 </p:presentation>
 </file>
 
@@ -140,234 +145,10 @@
           <a:chExt cx="0" cy="0"/>
         </a:xfrm>
       </p:grpSpPr>
-      <p:sp>
-        <p:nvSpPr>
-          <p:cNvPr id="2" name="Header Placeholder 1"/>
-          <p:cNvSpPr>
-            <a:spLocks noGrp="1"/>
-          </p:cNvSpPr>
-          <p:nvPr>
-            <p:ph type="hdr" sz="quarter"/>
-          </p:nvPr>
-        </p:nvSpPr>
-        <p:spPr>
-          <a:xfrm>
-            <a:off x="0" y="0"/>
-            <a:ext cx="2971800" cy="458788"/>
-          </a:xfrm>
-          <a:prstGeom prst="rect">
-            <a:avLst/>
-          </a:prstGeom>
-        </p:spPr>
-        <p:txBody>
-          <a:bodyPr vert="horz" lIns="91440" tIns="45720" rIns="91440" bIns="45720" rtlCol="0"/>
-          <a:lstStyle>
-            <a:lvl1pPr algn="l">
-              <a:defRPr sz="1200"/>
-            </a:lvl1pPr>
-          </a:lstStyle>
-          <a:p>
-            <a:endParaRPr lang="en-US"/>
-          </a:p>
-        </p:txBody>
-      </p:sp>
-      <p:sp>
-        <p:nvSpPr>
-          <p:cNvPr id="3" name="Date Placeholder 2"/>
-          <p:cNvSpPr>
-            <a:spLocks noGrp="1"/>
-          </p:cNvSpPr>
-          <p:nvPr>
-            <p:ph type="dt" idx="1"/>
-          </p:nvPr>
-        </p:nvSpPr>
-        <p:spPr>
-          <a:xfrm>
-            <a:off x="3884613" y="0"/>
-            <a:ext cx="2971800" cy="458788"/>
-          </a:xfrm>
-          <a:prstGeom prst="rect">
-            <a:avLst/>
-          </a:prstGeom>
-        </p:spPr>
-        <p:txBody>
-          <a:bodyPr vert="horz" lIns="91440" tIns="45720" rIns="91440" bIns="45720" rtlCol="0"/>
-          <a:lstStyle>
-            <a:lvl1pPr algn="r">
-              <a:defRPr sz="1200"/>
-            </a:lvl1pPr>
-          </a:lstStyle>
-          <a:p>
-            <a:fld id="{5282F153-3F37-0F45-9E97-73ACFA13230C}" type="datetimeFigureOut">
-              <a:rPr lang="en-US"/>
-              <a:t>7/23/19</a:t>
-            </a:fld>
-            <a:endParaRPr lang="en-US"/>
-          </a:p>
-        </p:txBody>
-      </p:sp>
-      <p:sp>
-        <p:nvSpPr>
-          <p:cNvPr id="4" name="Slide Image Placeholder 3"/>
-          <p:cNvSpPr>
-            <a:spLocks noGrp="1" noRot="1" noChangeAspect="1"/>
-          </p:cNvSpPr>
-          <p:nvPr>
-            <p:ph type="sldImg" idx="2"/>
-          </p:nvPr>
-        </p:nvSpPr>
-        <p:spPr>
-          <a:xfrm>
-            <a:off x="685800" y="1143000"/>
-            <a:ext cx="5486400" cy="3086100"/>
-          </a:xfrm>
-          <a:prstGeom prst="rect">
-            <a:avLst/>
-          </a:prstGeom>
-          <a:noFill/>
-          <a:ln w="12700">
-            <a:solidFill>
-              <a:prstClr val="black"/>
-            </a:solidFill>
-          </a:ln>
-        </p:spPr>
-        <p:txBody>
-          <a:bodyPr vert="horz" lIns="91440" tIns="45720" rIns="91440" bIns="45720" rtlCol="0" anchor="ctr"/>
-          <a:lstStyle/>
-          <a:p>
-            <a:endParaRPr lang="en-US"/>
-          </a:p>
-        </p:txBody>
-      </p:sp>
-      <p:sp>
-        <p:nvSpPr>
-          <p:cNvPr id="5" name="Notes Placeholder 4"/>
-          <p:cNvSpPr>
-            <a:spLocks noGrp="1"/>
-          </p:cNvSpPr>
-          <p:nvPr>
-            <p:ph type="body" sz="quarter" idx="3"/>
-          </p:nvPr>
-        </p:nvSpPr>
-        <p:spPr>
-          <a:xfrm>
-            <a:off x="685800" y="4400550"/>
-            <a:ext cx="5486400" cy="3600450"/>
-          </a:xfrm>
-          <a:prstGeom prst="rect">
-            <a:avLst/>
-          </a:prstGeom>
-        </p:spPr>
-        <p:txBody>
-          <a:bodyPr vert="horz" lIns="91440" tIns="45720" rIns="91440" bIns="45720" rtlCol="0"/>
-          <a:lstStyle/>
-          <a:p>
-            <a:pPr lvl="0"/>
-            <a:r>
-              <a:rPr lang="en-US"/>
-              <a:t>Click to edit Master text styles</a:t>
-            </a:r>
-          </a:p>
-          <a:p>
-            <a:pPr lvl="1"/>
-            <a:r>
-              <a:rPr lang="en-US"/>
-              <a:t>Second level</a:t>
-            </a:r>
-          </a:p>
-          <a:p>
-            <a:pPr lvl="2"/>
-            <a:r>
-              <a:rPr lang="en-US"/>
-              <a:t>Third level</a:t>
-            </a:r>
-          </a:p>
-          <a:p>
-            <a:pPr lvl="3"/>
-            <a:r>
-              <a:rPr lang="en-US"/>
-              <a:t>Fourth level</a:t>
-            </a:r>
-          </a:p>
-          <a:p>
-            <a:pPr lvl="4"/>
-            <a:r>
-              <a:rPr lang="en-US"/>
-              <a:t>Fifth level</a:t>
-            </a:r>
-          </a:p>
-        </p:txBody>
-      </p:sp>
-      <p:sp>
-        <p:nvSpPr>
-          <p:cNvPr id="6" name="Footer Placeholder 5"/>
-          <p:cNvSpPr>
-            <a:spLocks noGrp="1"/>
-          </p:cNvSpPr>
-          <p:nvPr>
-            <p:ph type="ftr" sz="quarter" idx="4"/>
-          </p:nvPr>
-        </p:nvSpPr>
-        <p:spPr>
-          <a:xfrm>
-            <a:off x="0" y="8685213"/>
-            <a:ext cx="2971800" cy="458787"/>
-          </a:xfrm>
-          <a:prstGeom prst="rect">
-            <a:avLst/>
-          </a:prstGeom>
-        </p:spPr>
-        <p:txBody>
-          <a:bodyPr vert="horz" lIns="91440" tIns="45720" rIns="91440" bIns="45720" rtlCol="0" anchor="b"/>
-          <a:lstStyle>
-            <a:lvl1pPr algn="l">
-              <a:defRPr sz="1200"/>
-            </a:lvl1pPr>
-          </a:lstStyle>
-          <a:p>
-            <a:endParaRPr lang="en-US"/>
-          </a:p>
-        </p:txBody>
-      </p:sp>
-      <p:sp>
-        <p:nvSpPr>
-          <p:cNvPr id="7" name="Slide Number Placeholder 6"/>
-          <p:cNvSpPr>
-            <a:spLocks noGrp="1"/>
-          </p:cNvSpPr>
-          <p:nvPr>
-            <p:ph type="sldNum" sz="quarter" idx="5"/>
-          </p:nvPr>
-        </p:nvSpPr>
-        <p:spPr>
-          <a:xfrm>
-            <a:off x="3884613" y="8685213"/>
-            <a:ext cx="2971800" cy="458787"/>
-          </a:xfrm>
-          <a:prstGeom prst="rect">
-            <a:avLst/>
-          </a:prstGeom>
-        </p:spPr>
-        <p:txBody>
-          <a:bodyPr vert="horz" lIns="91440" tIns="45720" rIns="91440" bIns="45720" rtlCol="0" anchor="b"/>
-          <a:lstStyle>
-            <a:lvl1pPr algn="r">
-              <a:defRPr sz="1200"/>
-            </a:lvl1pPr>
-          </a:lstStyle>
-          <a:p>
-            <a:fld id="{CE5E9CC1-C706-0F49-92D6-E571CC5EEA8F}" type="slidenum">
-              <a:rPr lang="en-US"/>
-              <a:t>‹#›</a:t>
-            </a:fld>
-            <a:endParaRPr lang="en-US"/>
-          </a:p>
-        </p:txBody>
-      </p:sp>
     </p:spTree>
     <p:extLst>
       <p:ext uri="{BB962C8B-B14F-4D97-AF65-F5344CB8AC3E}">
-        <p14:creationId xmlns:p14="http://schemas.microsoft.com/office/powerpoint/2010/main" val="1024086991"/>
+        <p14:creationId xmlns:p14="http://schemas.microsoft.com/office/powerpoint/2010/main" val="3896364591"/>
       </p:ext>
     </p:extLst>
   </p:cSld>
@@ -511,10 +292,6 @@
           <a:bodyPr/>
           <a:lstStyle/>
           <a:p>
-            <a:r>
-              <a:rPr lang="en-US" dirty="0"/>
-              <a:t/>
-            </a:r>
             <a:endParaRPr lang="en-US" dirty="0"/>
           </a:p>
         </p:txBody>
@@ -599,10 +376,6 @@
           <a:bodyPr/>
           <a:lstStyle/>
           <a:p>
-            <a:r>
-              <a:rPr lang="en-US" dirty="0"/>
-              <a:t/>
-            </a:r>
             <a:endParaRPr lang="en-US" dirty="0"/>
           </a:p>
         </p:txBody>
@@ -687,10 +460,6 @@
           <a:bodyPr/>
           <a:lstStyle/>
           <a:p>
-            <a:r>
-              <a:rPr lang="en-US" dirty="0"/>
-              <a:t/>
-            </a:r>
             <a:endParaRPr lang="en-US" dirty="0"/>
           </a:p>
         </p:txBody>
@@ -775,10 +544,6 @@
           <a:bodyPr/>
           <a:lstStyle/>
           <a:p>
-            <a:r>
-              <a:rPr lang="en-US" dirty="0"/>
-              <a:t/>
-            </a:r>
             <a:endParaRPr lang="en-US" dirty="0"/>
           </a:p>
         </p:txBody>
@@ -863,10 +628,6 @@
           <a:bodyPr/>
           <a:lstStyle/>
           <a:p>
-            <a:r>
-              <a:rPr lang="en-US" dirty="0"/>
-              <a:t/>
-            </a:r>
             <a:endParaRPr lang="en-US" dirty="0"/>
           </a:p>
         </p:txBody>
@@ -951,10 +712,6 @@
           <a:bodyPr/>
           <a:lstStyle/>
           <a:p>
-            <a:r>
-              <a:rPr lang="en-US" dirty="0"/>
-              <a:t/>
-            </a:r>
             <a:endParaRPr lang="en-US" dirty="0"/>
           </a:p>
         </p:txBody>
@@ -1039,10 +796,6 @@
           <a:bodyPr/>
           <a:lstStyle/>
           <a:p>
-            <a:r>
-              <a:rPr lang="en-US" dirty="0"/>
-              <a:t/>
-            </a:r>
             <a:endParaRPr lang="en-US" dirty="0"/>
           </a:p>
         </p:txBody>
@@ -1127,10 +880,6 @@
           <a:bodyPr/>
           <a:lstStyle/>
           <a:p>
-            <a:r>
-              <a:rPr lang="en-US" dirty="0"/>
-              <a:t/>
-            </a:r>
             <a:endParaRPr lang="en-US" dirty="0"/>
           </a:p>
         </p:txBody>
@@ -1215,10 +964,6 @@
           <a:bodyPr/>
           <a:lstStyle/>
           <a:p>
-            <a:r>
-              <a:rPr lang="en-US" dirty="0"/>
-              <a:t/>
-            </a:r>
             <a:endParaRPr lang="en-US" dirty="0"/>
           </a:p>
         </p:txBody>
@@ -1303,10 +1048,6 @@
           <a:bodyPr/>
           <a:lstStyle/>
           <a:p>
-            <a:r>
-              <a:rPr lang="en-US" dirty="0"/>
-              <a:t/>
-            </a:r>
             <a:endParaRPr lang="en-US" dirty="0"/>
           </a:p>
         </p:txBody>
@@ -1391,10 +1132,6 @@
           <a:bodyPr/>
           <a:lstStyle/>
           <a:p>
-            <a:r>
-              <a:rPr lang="en-US" dirty="0"/>
-              <a:t/>
-            </a:r>
             <a:endParaRPr lang="en-US" dirty="0"/>
           </a:p>
         </p:txBody>
@@ -1479,10 +1216,6 @@
           <a:bodyPr/>
           <a:lstStyle/>
           <a:p>
-            <a:r>
-              <a:rPr lang="en-US" dirty="0"/>
-              <a:t/>
-            </a:r>
             <a:endParaRPr lang="en-US" dirty="0"/>
           </a:p>
         </p:txBody>
@@ -1556,6 +1289,11 @@
 <file path=ppt/slideMasters/slideMaster1.xml><?xml version="1.0" encoding="utf-8"?>
 <p:sldMaster xmlns:a="http://schemas.openxmlformats.org/drawingml/2006/main" xmlns:r="http://schemas.openxmlformats.org/officeDocument/2006/relationships" xmlns:p="http://schemas.openxmlformats.org/presentationml/2006/main">
   <p:cSld>
+    <p:bg>
+      <p:bgRef idx="1001">
+        <a:schemeClr val="bg1"/>
+      </p:bgRef>
+    </p:bg>
     <p:spTree>
       <p:nvGrpSpPr>
         <p:cNvPr id="1" name=""/>
@@ -1838,6 +1576,7 @@
         <a:solidFill>
           <a:srgbClr val="0F1117"/>
         </a:solidFill>
+        <a:effectLst/>
       </p:bgPr>
     </p:bg>
     <p:spTree>
@@ -1878,6 +1617,13 @@
             <a:prstDash val="solid"/>
           </a:ln>
         </p:spPr>
+        <p:txBody>
+          <a:bodyPr/>
+          <a:lstStyle/>
+          <a:p>
+            <a:endParaRPr lang="fr-FR"/>
+          </a:p>
+        </p:txBody>
       </p:sp>
       <p:sp>
         <p:nvSpPr>
@@ -1903,6 +1649,13 @@
             <a:prstDash val="solid"/>
           </a:ln>
         </p:spPr>
+        <p:txBody>
+          <a:bodyPr/>
+          <a:lstStyle/>
+          <a:p>
+            <a:endParaRPr lang="fr-FR"/>
+          </a:p>
+        </p:txBody>
       </p:sp>
       <p:sp>
         <p:nvSpPr>
@@ -1928,6 +1681,13 @@
             <a:prstDash val="solid"/>
           </a:ln>
         </p:spPr>
+        <p:txBody>
+          <a:bodyPr/>
+          <a:lstStyle/>
+          <a:p>
+            <a:endParaRPr lang="fr-FR"/>
+          </a:p>
+        </p:txBody>
       </p:sp>
       <p:sp>
         <p:nvSpPr>
@@ -1955,6 +1715,13 @@
             <a:prstDash val="solid"/>
           </a:ln>
         </p:spPr>
+        <p:txBody>
+          <a:bodyPr/>
+          <a:lstStyle/>
+          <a:p>
+            <a:endParaRPr lang="fr-FR"/>
+          </a:p>
+        </p:txBody>
       </p:sp>
       <p:sp>
         <p:nvSpPr>
@@ -1977,11 +1744,11 @@
           <a:bodyPr wrap="square" rtlCol="0" anchor="ctr"/>
           <a:lstStyle/>
           <a:p>
-            <a:pPr algn="ctr" indent="0" marL="0">
+            <a:pPr marL="0" indent="0" algn="ctr">
               <a:buNone/>
             </a:pPr>
             <a:r>
-              <a:rPr lang="en-US" sz="800" b="1" spc="150" kern="0" dirty="0">
+              <a:rPr lang="en-US" sz="800" b="1" kern="0" spc="150" dirty="0">
                 <a:solidFill>
                   <a:srgbClr val="6C8EF7"/>
                 </a:solidFill>
@@ -2016,7 +1783,7 @@
           <a:bodyPr wrap="square" lIns="0" tIns="0" rIns="0" bIns="0" rtlCol="0" anchor="ctr"/>
           <a:lstStyle/>
           <a:p>
-            <a:pPr indent="0" marL="0">
+            <a:pPr marL="0" indent="0">
               <a:buNone/>
             </a:pPr>
             <a:r>
@@ -2055,7 +1822,7 @@
           <a:bodyPr wrap="square" lIns="0" tIns="0" rIns="0" bIns="0" rtlCol="0" anchor="ctr"/>
           <a:lstStyle/>
           <a:p>
-            <a:pPr indent="0" marL="0">
+            <a:pPr marL="0" indent="0">
               <a:buNone/>
             </a:pPr>
             <a:r>
@@ -2094,7 +1861,7 @@
           <a:bodyPr wrap="square" rtlCol="0" anchor="ctr"/>
           <a:lstStyle/>
           <a:p>
-            <a:pPr indent="0" marL="0">
+            <a:pPr marL="0" indent="0">
               <a:buNone/>
             </a:pPr>
             <a:r>
@@ -2134,6 +1901,13 @@
             <a:prstDash val="solid"/>
           </a:ln>
         </p:spPr>
+        <p:txBody>
+          <a:bodyPr/>
+          <a:lstStyle/>
+          <a:p>
+            <a:endParaRPr lang="fr-FR"/>
+          </a:p>
+        </p:txBody>
       </p:sp>
       <p:sp>
         <p:nvSpPr>
@@ -2156,11 +1930,11 @@
           <a:bodyPr wrap="square" rtlCol="0" anchor="ctr"/>
           <a:lstStyle/>
           <a:p>
-            <a:pPr indent="0" marL="0">
+            <a:pPr marL="0" indent="0">
               <a:buNone/>
             </a:pPr>
             <a:r>
-              <a:rPr lang="en-US" sz="800" b="1" spc="100" kern="0" dirty="0">
+              <a:rPr lang="en-US" sz="800" b="1" kern="0" spc="100" dirty="0">
                 <a:solidFill>
                   <a:srgbClr val="64748B"/>
                 </a:solidFill>
@@ -2195,7 +1969,7 @@
           <a:bodyPr wrap="square" rtlCol="0" anchor="ctr"/>
           <a:lstStyle/>
           <a:p>
-            <a:pPr indent="0" marL="0">
+            <a:pPr marL="0" indent="0">
               <a:buNone/>
             </a:pPr>
             <a:r>
@@ -2234,11 +2008,11 @@
           <a:bodyPr wrap="square" rtlCol="0" anchor="ctr"/>
           <a:lstStyle/>
           <a:p>
-            <a:pPr indent="0" marL="0">
+            <a:pPr marL="0" indent="0">
               <a:buNone/>
             </a:pPr>
             <a:r>
-              <a:rPr lang="en-US" sz="800" b="1" spc="100" kern="0" dirty="0">
+              <a:rPr lang="en-US" sz="800" b="1" kern="0" spc="100" dirty="0">
                 <a:solidFill>
                   <a:srgbClr val="64748B"/>
                 </a:solidFill>
@@ -2273,7 +2047,7 @@
           <a:bodyPr wrap="square" rtlCol="0" anchor="ctr"/>
           <a:lstStyle/>
           <a:p>
-            <a:pPr indent="0" marL="0">
+            <a:pPr marL="0" indent="0">
               <a:buNone/>
             </a:pPr>
             <a:r>
@@ -2312,11 +2086,11 @@
           <a:bodyPr wrap="square" rtlCol="0" anchor="ctr"/>
           <a:lstStyle/>
           <a:p>
-            <a:pPr indent="0" marL="0">
+            <a:pPr marL="0" indent="0">
               <a:buNone/>
             </a:pPr>
             <a:r>
-              <a:rPr lang="en-US" sz="800" b="1" spc="100" kern="0" dirty="0">
+              <a:rPr lang="en-US" sz="800" b="1" kern="0" spc="100" dirty="0">
                 <a:solidFill>
                   <a:srgbClr val="64748B"/>
                 </a:solidFill>
@@ -2351,7 +2125,7 @@
           <a:bodyPr wrap="square" rtlCol="0" anchor="ctr"/>
           <a:lstStyle/>
           <a:p>
-            <a:pPr indent="0" marL="0">
+            <a:pPr marL="0" indent="0">
               <a:buNone/>
             </a:pPr>
             <a:r>
@@ -2390,11 +2164,11 @@
           <a:bodyPr wrap="square" rtlCol="0" anchor="ctr"/>
           <a:lstStyle/>
           <a:p>
-            <a:pPr indent="0" marL="0">
+            <a:pPr marL="0" indent="0">
               <a:buNone/>
             </a:pPr>
             <a:r>
-              <a:rPr lang="en-US" sz="800" b="1" spc="100" kern="0" dirty="0">
+              <a:rPr lang="en-US" sz="800" b="1" kern="0" spc="100" dirty="0">
                 <a:solidFill>
                   <a:srgbClr val="64748B"/>
                 </a:solidFill>
@@ -2429,7 +2203,7 @@
           <a:bodyPr wrap="square" rtlCol="0" anchor="ctr"/>
           <a:lstStyle/>
           <a:p>
-            <a:pPr indent="0" marL="0">
+            <a:pPr marL="0" indent="0">
               <a:buNone/>
             </a:pPr>
             <a:r>
@@ -2468,7 +2242,7 @@
           <a:bodyPr wrap="square" rtlCol="0" anchor="ctr"/>
           <a:lstStyle/>
           <a:p>
-            <a:pPr algn="ctr" indent="0" marL="0">
+            <a:pPr marL="0" indent="0" algn="ctr">
               <a:buNone/>
             </a:pPr>
             <a:r>
@@ -2502,6 +2276,7 @@
         <a:solidFill>
           <a:srgbClr val="0F1117"/>
         </a:solidFill>
+        <a:effectLst/>
       </p:bgPr>
     </p:bg>
     <p:spTree>
@@ -2542,6 +2317,13 @@
             <a:prstDash val="solid"/>
           </a:ln>
         </p:spPr>
+        <p:txBody>
+          <a:bodyPr/>
+          <a:lstStyle/>
+          <a:p>
+            <a:endParaRPr lang="fr-FR"/>
+          </a:p>
+        </p:txBody>
       </p:sp>
       <p:sp>
         <p:nvSpPr>
@@ -2569,6 +2351,13 @@
             <a:prstDash val="solid"/>
           </a:ln>
         </p:spPr>
+        <p:txBody>
+          <a:bodyPr/>
+          <a:lstStyle/>
+          <a:p>
+            <a:endParaRPr lang="fr-FR"/>
+          </a:p>
+        </p:txBody>
       </p:sp>
       <p:sp>
         <p:nvSpPr>
@@ -2591,7 +2380,7 @@
           <a:bodyPr wrap="square" lIns="0" tIns="0" rIns="0" bIns="0" rtlCol="0" anchor="ctr"/>
           <a:lstStyle/>
           <a:p>
-            <a:pPr algn="ctr" indent="0" marL="0">
+            <a:pPr marL="0" indent="0" algn="ctr">
               <a:buNone/>
             </a:pPr>
             <a:r>
@@ -2627,7 +2416,7 @@
           <a:bodyPr wrap="square" rtlCol="0" anchor="ctr"/>
           <a:lstStyle/>
           <a:p>
-            <a:pPr indent="0" marL="0">
+            <a:pPr marL="0" indent="0">
               <a:buNone/>
             </a:pPr>
             <a:r>
@@ -2661,16 +2450,34 @@
         </p:nvGraphicFramePr>
         <p:xfrm>
           <a:off x="320040" y="749808"/>
-          <a:ext cx="8503920" cy="3566160"/>
+          <a:ext cx="8503920" cy="2615184"/>
         </p:xfrm>
         <a:graphic>
           <a:graphicData uri="http://schemas.openxmlformats.org/drawingml/2006/table">
             <a:tbl>
               <a:tblPr/>
               <a:tblGrid>
-                <a:gridCol w="2011680"/>
-                <a:gridCol w="2743200"/>
-                <a:gridCol w="3749040"/>
+                <a:gridCol w="2011680">
+                  <a:extLst>
+                    <a:ext uri="{9D8B030D-6E8A-4147-A177-3AD203B41FA5}">
+                      <a16:colId xmlns:a16="http://schemas.microsoft.com/office/drawing/2014/main" val="20000"/>
+                    </a:ext>
+                  </a:extLst>
+                </a:gridCol>
+                <a:gridCol w="2743200">
+                  <a:extLst>
+                    <a:ext uri="{9D8B030D-6E8A-4147-A177-3AD203B41FA5}">
+                      <a16:colId xmlns:a16="http://schemas.microsoft.com/office/drawing/2014/main" val="20001"/>
+                    </a:ext>
+                  </a:extLst>
+                </a:gridCol>
+                <a:gridCol w="3749040">
+                  <a:extLst>
+                    <a:ext uri="{9D8B030D-6E8A-4147-A177-3AD203B41FA5}">
+                      <a16:colId xmlns:a16="http://schemas.microsoft.com/office/drawing/2014/main" val="20002"/>
+                    </a:ext>
+                  </a:extLst>
+                </a:gridCol>
               </a:tblGrid>
               <a:tr h="237744">
                 <a:tc>
@@ -2678,7 +2485,7 @@
                     <a:bodyPr/>
                     <a:lstStyle/>
                     <a:p>
-                      <a:pPr algn="l" indent="0" marL="0">
+                      <a:pPr marL="0" indent="0" algn="l">
                         <a:buNone/>
                       </a:pPr>
                       <a:r>
@@ -2699,7 +2506,7 @@
                       </a:endParaRPr>
                     </a:p>
                   </a:txBody>
-                  <a:tcPr marL="91440" marR="91440" marT="45720" marB="45720" anchor="ctr">
+                  <a:tcPr anchor="ctr">
                     <a:lnL w="6350" cap="flat" cmpd="sng" algn="ctr">
                       <a:solidFill>
                         <a:srgbClr val="2E3250"/>
@@ -2746,7 +2553,7 @@
                     <a:bodyPr/>
                     <a:lstStyle/>
                     <a:p>
-                      <a:pPr algn="l" indent="0" marL="0">
+                      <a:pPr marL="0" indent="0" algn="l">
                         <a:buNone/>
                       </a:pPr>
                       <a:r>
@@ -2767,7 +2574,7 @@
                       </a:endParaRPr>
                     </a:p>
                   </a:txBody>
-                  <a:tcPr marL="91440" marR="91440" marT="45720" marB="45720" anchor="ctr">
+                  <a:tcPr anchor="ctr">
                     <a:lnL w="6350" cap="flat" cmpd="sng" algn="ctr">
                       <a:solidFill>
                         <a:srgbClr val="2E3250"/>
@@ -2814,7 +2621,7 @@
                     <a:bodyPr/>
                     <a:lstStyle/>
                     <a:p>
-                      <a:pPr algn="l" indent="0" marL="0">
+                      <a:pPr marL="0" indent="0" algn="l">
                         <a:buNone/>
                       </a:pPr>
                       <a:r>
@@ -2835,7 +2642,7 @@
                       </a:endParaRPr>
                     </a:p>
                   </a:txBody>
-                  <a:tcPr marL="91440" marR="91440" marT="45720" marB="45720" anchor="ctr">
+                  <a:tcPr anchor="ctr">
                     <a:lnL w="6350" cap="flat" cmpd="sng" algn="ctr">
                       <a:solidFill>
                         <a:srgbClr val="2E3250"/>
@@ -2877,6 +2684,11 @@
                     </a:solidFill>
                   </a:tcPr>
                 </a:tc>
+                <a:extLst>
+                  <a:ext uri="{0D108BD9-81ED-4DB2-BD59-A6C34878D82A}">
+                    <a16:rowId xmlns:a16="http://schemas.microsoft.com/office/drawing/2014/main" val="10000"/>
+                  </a:ext>
+                </a:extLst>
               </a:tr>
               <a:tr h="237744">
                 <a:tc>
@@ -2884,7 +2696,7 @@
                     <a:bodyPr/>
                     <a:lstStyle/>
                     <a:p>
-                      <a:pPr algn="l" indent="0" marL="0">
+                      <a:pPr marL="0" indent="0" algn="l">
                         <a:buNone/>
                       </a:pPr>
                       <a:r>
@@ -2905,7 +2717,7 @@
                       </a:endParaRPr>
                     </a:p>
                   </a:txBody>
-                  <a:tcPr marL="91440" marR="91440" marT="45720" marB="45720" anchor="ctr">
+                  <a:tcPr anchor="ctr">
                     <a:lnL w="6350" cap="flat" cmpd="sng" algn="ctr">
                       <a:solidFill>
                         <a:srgbClr val="2E3250"/>
@@ -2952,7 +2764,7 @@
                     <a:bodyPr/>
                     <a:lstStyle/>
                     <a:p>
-                      <a:pPr algn="l" indent="0" marL="0">
+                      <a:pPr marL="0" indent="0" algn="l">
                         <a:buNone/>
                       </a:pPr>
                       <a:r>
@@ -2973,7 +2785,7 @@
                       </a:endParaRPr>
                     </a:p>
                   </a:txBody>
-                  <a:tcPr marL="91440" marR="91440" marT="45720" marB="45720" anchor="ctr">
+                  <a:tcPr anchor="ctr">
                     <a:lnL w="6350" cap="flat" cmpd="sng" algn="ctr">
                       <a:solidFill>
                         <a:srgbClr val="2E3250"/>
@@ -3020,7 +2832,7 @@
                     <a:bodyPr/>
                     <a:lstStyle/>
                     <a:p>
-                      <a:pPr algn="l" indent="0" marL="0">
+                      <a:pPr marL="0" indent="0" algn="l">
                         <a:buNone/>
                       </a:pPr>
                       <a:r>
@@ -3041,7 +2853,7 @@
                       </a:endParaRPr>
                     </a:p>
                   </a:txBody>
-                  <a:tcPr marL="91440" marR="91440" marT="45720" marB="45720" anchor="ctr">
+                  <a:tcPr anchor="ctr">
                     <a:lnL w="6350" cap="flat" cmpd="sng" algn="ctr">
                       <a:solidFill>
                         <a:srgbClr val="2E3250"/>
@@ -3083,6 +2895,11 @@
                     </a:solidFill>
                   </a:tcPr>
                 </a:tc>
+                <a:extLst>
+                  <a:ext uri="{0D108BD9-81ED-4DB2-BD59-A6C34878D82A}">
+                    <a16:rowId xmlns:a16="http://schemas.microsoft.com/office/drawing/2014/main" val="10001"/>
+                  </a:ext>
+                </a:extLst>
               </a:tr>
               <a:tr h="237744">
                 <a:tc>
@@ -3090,7 +2907,7 @@
                     <a:bodyPr/>
                     <a:lstStyle/>
                     <a:p>
-                      <a:pPr algn="l" indent="0" marL="0">
+                      <a:pPr marL="0" indent="0" algn="l">
                         <a:buNone/>
                       </a:pPr>
                       <a:r>
@@ -3111,7 +2928,7 @@
                       </a:endParaRPr>
                     </a:p>
                   </a:txBody>
-                  <a:tcPr marL="91440" marR="91440" marT="45720" marB="45720" anchor="ctr">
+                  <a:tcPr anchor="ctr">
                     <a:lnL w="6350" cap="flat" cmpd="sng" algn="ctr">
                       <a:solidFill>
                         <a:srgbClr val="2E3250"/>
@@ -3158,7 +2975,7 @@
                     <a:bodyPr/>
                     <a:lstStyle/>
                     <a:p>
-                      <a:pPr algn="l" indent="0" marL="0">
+                      <a:pPr marL="0" indent="0" algn="l">
                         <a:buNone/>
                       </a:pPr>
                       <a:r>
@@ -3179,7 +2996,7 @@
                       </a:endParaRPr>
                     </a:p>
                   </a:txBody>
-                  <a:tcPr marL="91440" marR="91440" marT="45720" marB="45720" anchor="ctr">
+                  <a:tcPr anchor="ctr">
                     <a:lnL w="6350" cap="flat" cmpd="sng" algn="ctr">
                       <a:solidFill>
                         <a:srgbClr val="2E3250"/>
@@ -3226,7 +3043,7 @@
                     <a:bodyPr/>
                     <a:lstStyle/>
                     <a:p>
-                      <a:pPr algn="l" indent="0" marL="0">
+                      <a:pPr marL="0" indent="0" algn="l">
                         <a:buNone/>
                       </a:pPr>
                       <a:r>
@@ -3247,7 +3064,7 @@
                       </a:endParaRPr>
                     </a:p>
                   </a:txBody>
-                  <a:tcPr marL="91440" marR="91440" marT="45720" marB="45720" anchor="ctr">
+                  <a:tcPr anchor="ctr">
                     <a:lnL w="6350" cap="flat" cmpd="sng" algn="ctr">
                       <a:solidFill>
                         <a:srgbClr val="2E3250"/>
@@ -3289,6 +3106,11 @@
                     </a:solidFill>
                   </a:tcPr>
                 </a:tc>
+                <a:extLst>
+                  <a:ext uri="{0D108BD9-81ED-4DB2-BD59-A6C34878D82A}">
+                    <a16:rowId xmlns:a16="http://schemas.microsoft.com/office/drawing/2014/main" val="10002"/>
+                  </a:ext>
+                </a:extLst>
               </a:tr>
               <a:tr h="237744">
                 <a:tc>
@@ -3296,7 +3118,7 @@
                     <a:bodyPr/>
                     <a:lstStyle/>
                     <a:p>
-                      <a:pPr algn="l" indent="0" marL="0">
+                      <a:pPr marL="0" indent="0" algn="l">
                         <a:buNone/>
                       </a:pPr>
                       <a:r>
@@ -3317,7 +3139,7 @@
                       </a:endParaRPr>
                     </a:p>
                   </a:txBody>
-                  <a:tcPr marL="91440" marR="91440" marT="45720" marB="45720" anchor="ctr">
+                  <a:tcPr anchor="ctr">
                     <a:lnL w="6350" cap="flat" cmpd="sng" algn="ctr">
                       <a:solidFill>
                         <a:srgbClr val="2E3250"/>
@@ -3364,7 +3186,7 @@
                     <a:bodyPr/>
                     <a:lstStyle/>
                     <a:p>
-                      <a:pPr algn="l" indent="0" marL="0">
+                      <a:pPr marL="0" indent="0" algn="l">
                         <a:buNone/>
                       </a:pPr>
                       <a:r>
@@ -3385,7 +3207,7 @@
                       </a:endParaRPr>
                     </a:p>
                   </a:txBody>
-                  <a:tcPr marL="91440" marR="91440" marT="45720" marB="45720" anchor="ctr">
+                  <a:tcPr anchor="ctr">
                     <a:lnL w="6350" cap="flat" cmpd="sng" algn="ctr">
                       <a:solidFill>
                         <a:srgbClr val="2E3250"/>
@@ -3432,7 +3254,7 @@
                     <a:bodyPr/>
                     <a:lstStyle/>
                     <a:p>
-                      <a:pPr algn="l" indent="0" marL="0">
+                      <a:pPr marL="0" indent="0" algn="l">
                         <a:buNone/>
                       </a:pPr>
                       <a:r>
@@ -3453,7 +3275,7 @@
                       </a:endParaRPr>
                     </a:p>
                   </a:txBody>
-                  <a:tcPr marL="91440" marR="91440" marT="45720" marB="45720" anchor="ctr">
+                  <a:tcPr anchor="ctr">
                     <a:lnL w="6350" cap="flat" cmpd="sng" algn="ctr">
                       <a:solidFill>
                         <a:srgbClr val="2E3250"/>
@@ -3495,6 +3317,11 @@
                     </a:solidFill>
                   </a:tcPr>
                 </a:tc>
+                <a:extLst>
+                  <a:ext uri="{0D108BD9-81ED-4DB2-BD59-A6C34878D82A}">
+                    <a16:rowId xmlns:a16="http://schemas.microsoft.com/office/drawing/2014/main" val="10003"/>
+                  </a:ext>
+                </a:extLst>
               </a:tr>
               <a:tr h="237744">
                 <a:tc>
@@ -3502,7 +3329,7 @@
                     <a:bodyPr/>
                     <a:lstStyle/>
                     <a:p>
-                      <a:pPr algn="l" indent="0" marL="0">
+                      <a:pPr marL="0" indent="0" algn="l">
                         <a:buNone/>
                       </a:pPr>
                       <a:r>
@@ -3523,7 +3350,7 @@
                       </a:endParaRPr>
                     </a:p>
                   </a:txBody>
-                  <a:tcPr marL="91440" marR="91440" marT="45720" marB="45720" anchor="ctr">
+                  <a:tcPr anchor="ctr">
                     <a:lnL w="6350" cap="flat" cmpd="sng" algn="ctr">
                       <a:solidFill>
                         <a:srgbClr val="2E3250"/>
@@ -3570,7 +3397,7 @@
                     <a:bodyPr/>
                     <a:lstStyle/>
                     <a:p>
-                      <a:pPr algn="l" indent="0" marL="0">
+                      <a:pPr marL="0" indent="0" algn="l">
                         <a:buNone/>
                       </a:pPr>
                       <a:r>
@@ -3591,7 +3418,7 @@
                       </a:endParaRPr>
                     </a:p>
                   </a:txBody>
-                  <a:tcPr marL="91440" marR="91440" marT="45720" marB="45720" anchor="ctr">
+                  <a:tcPr anchor="ctr">
                     <a:lnL w="6350" cap="flat" cmpd="sng" algn="ctr">
                       <a:solidFill>
                         <a:srgbClr val="2E3250"/>
@@ -3638,7 +3465,7 @@
                     <a:bodyPr/>
                     <a:lstStyle/>
                     <a:p>
-                      <a:pPr algn="l" indent="0" marL="0">
+                      <a:pPr marL="0" indent="0" algn="l">
                         <a:buNone/>
                       </a:pPr>
                       <a:r>
@@ -3659,7 +3486,7 @@
                       </a:endParaRPr>
                     </a:p>
                   </a:txBody>
-                  <a:tcPr marL="91440" marR="91440" marT="45720" marB="45720" anchor="ctr">
+                  <a:tcPr anchor="ctr">
                     <a:lnL w="6350" cap="flat" cmpd="sng" algn="ctr">
                       <a:solidFill>
                         <a:srgbClr val="2E3250"/>
@@ -3701,6 +3528,11 @@
                     </a:solidFill>
                   </a:tcPr>
                 </a:tc>
+                <a:extLst>
+                  <a:ext uri="{0D108BD9-81ED-4DB2-BD59-A6C34878D82A}">
+                    <a16:rowId xmlns:a16="http://schemas.microsoft.com/office/drawing/2014/main" val="10004"/>
+                  </a:ext>
+                </a:extLst>
               </a:tr>
               <a:tr h="237744">
                 <a:tc>
@@ -3708,7 +3540,7 @@
                     <a:bodyPr/>
                     <a:lstStyle/>
                     <a:p>
-                      <a:pPr algn="l" indent="0" marL="0">
+                      <a:pPr marL="0" indent="0" algn="l">
                         <a:buNone/>
                       </a:pPr>
                       <a:r>
@@ -3729,7 +3561,7 @@
                       </a:endParaRPr>
                     </a:p>
                   </a:txBody>
-                  <a:tcPr marL="91440" marR="91440" marT="45720" marB="45720" anchor="ctr">
+                  <a:tcPr anchor="ctr">
                     <a:lnL w="6350" cap="flat" cmpd="sng" algn="ctr">
                       <a:solidFill>
                         <a:srgbClr val="2E3250"/>
@@ -3776,7 +3608,7 @@
                     <a:bodyPr/>
                     <a:lstStyle/>
                     <a:p>
-                      <a:pPr algn="l" indent="0" marL="0">
+                      <a:pPr marL="0" indent="0" algn="l">
                         <a:buNone/>
                       </a:pPr>
                       <a:r>
@@ -3797,7 +3629,7 @@
                       </a:endParaRPr>
                     </a:p>
                   </a:txBody>
-                  <a:tcPr marL="91440" marR="91440" marT="45720" marB="45720" anchor="ctr">
+                  <a:tcPr anchor="ctr">
                     <a:lnL w="6350" cap="flat" cmpd="sng" algn="ctr">
                       <a:solidFill>
                         <a:srgbClr val="2E3250"/>
@@ -3844,7 +3676,7 @@
                     <a:bodyPr/>
                     <a:lstStyle/>
                     <a:p>
-                      <a:pPr algn="l" indent="0" marL="0">
+                      <a:pPr marL="0" indent="0" algn="l">
                         <a:buNone/>
                       </a:pPr>
                       <a:r>
@@ -3865,7 +3697,7 @@
                       </a:endParaRPr>
                     </a:p>
                   </a:txBody>
-                  <a:tcPr marL="91440" marR="91440" marT="45720" marB="45720" anchor="ctr">
+                  <a:tcPr anchor="ctr">
                     <a:lnL w="6350" cap="flat" cmpd="sng" algn="ctr">
                       <a:solidFill>
                         <a:srgbClr val="2E3250"/>
@@ -3907,6 +3739,11 @@
                     </a:solidFill>
                   </a:tcPr>
                 </a:tc>
+                <a:extLst>
+                  <a:ext uri="{0D108BD9-81ED-4DB2-BD59-A6C34878D82A}">
+                    <a16:rowId xmlns:a16="http://schemas.microsoft.com/office/drawing/2014/main" val="10005"/>
+                  </a:ext>
+                </a:extLst>
               </a:tr>
               <a:tr h="237744">
                 <a:tc>
@@ -3914,7 +3751,7 @@
                     <a:bodyPr/>
                     <a:lstStyle/>
                     <a:p>
-                      <a:pPr algn="l" indent="0" marL="0">
+                      <a:pPr marL="0" indent="0" algn="l">
                         <a:buNone/>
                       </a:pPr>
                       <a:r>
@@ -3935,7 +3772,7 @@
                       </a:endParaRPr>
                     </a:p>
                   </a:txBody>
-                  <a:tcPr marL="91440" marR="91440" marT="45720" marB="45720" anchor="ctr">
+                  <a:tcPr anchor="ctr">
                     <a:lnL w="6350" cap="flat" cmpd="sng" algn="ctr">
                       <a:solidFill>
                         <a:srgbClr val="2E3250"/>
@@ -3982,7 +3819,7 @@
                     <a:bodyPr/>
                     <a:lstStyle/>
                     <a:p>
-                      <a:pPr algn="l" indent="0" marL="0">
+                      <a:pPr marL="0" indent="0" algn="l">
                         <a:buNone/>
                       </a:pPr>
                       <a:r>
@@ -4003,7 +3840,7 @@
                       </a:endParaRPr>
                     </a:p>
                   </a:txBody>
-                  <a:tcPr marL="91440" marR="91440" marT="45720" marB="45720" anchor="ctr">
+                  <a:tcPr anchor="ctr">
                     <a:lnL w="6350" cap="flat" cmpd="sng" algn="ctr">
                       <a:solidFill>
                         <a:srgbClr val="2E3250"/>
@@ -4050,7 +3887,7 @@
                     <a:bodyPr/>
                     <a:lstStyle/>
                     <a:p>
-                      <a:pPr algn="l" indent="0" marL="0">
+                      <a:pPr marL="0" indent="0" algn="l">
                         <a:buNone/>
                       </a:pPr>
                       <a:r>
@@ -4071,7 +3908,7 @@
                       </a:endParaRPr>
                     </a:p>
                   </a:txBody>
-                  <a:tcPr marL="91440" marR="91440" marT="45720" marB="45720" anchor="ctr">
+                  <a:tcPr anchor="ctr">
                     <a:lnL w="6350" cap="flat" cmpd="sng" algn="ctr">
                       <a:solidFill>
                         <a:srgbClr val="2E3250"/>
@@ -4113,6 +3950,11 @@
                     </a:solidFill>
                   </a:tcPr>
                 </a:tc>
+                <a:extLst>
+                  <a:ext uri="{0D108BD9-81ED-4DB2-BD59-A6C34878D82A}">
+                    <a16:rowId xmlns:a16="http://schemas.microsoft.com/office/drawing/2014/main" val="10006"/>
+                  </a:ext>
+                </a:extLst>
               </a:tr>
               <a:tr h="237744">
                 <a:tc>
@@ -4120,7 +3962,7 @@
                     <a:bodyPr/>
                     <a:lstStyle/>
                     <a:p>
-                      <a:pPr algn="l" indent="0" marL="0">
+                      <a:pPr marL="0" indent="0" algn="l">
                         <a:buNone/>
                       </a:pPr>
                       <a:r>
@@ -4141,7 +3983,7 @@
                       </a:endParaRPr>
                     </a:p>
                   </a:txBody>
-                  <a:tcPr marL="91440" marR="91440" marT="45720" marB="45720" anchor="ctr">
+                  <a:tcPr anchor="ctr">
                     <a:lnL w="6350" cap="flat" cmpd="sng" algn="ctr">
                       <a:solidFill>
                         <a:srgbClr val="2E3250"/>
@@ -4188,7 +4030,7 @@
                     <a:bodyPr/>
                     <a:lstStyle/>
                     <a:p>
-                      <a:pPr algn="l" indent="0" marL="0">
+                      <a:pPr marL="0" indent="0" algn="l">
                         <a:buNone/>
                       </a:pPr>
                       <a:r>
@@ -4209,7 +4051,7 @@
                       </a:endParaRPr>
                     </a:p>
                   </a:txBody>
-                  <a:tcPr marL="91440" marR="91440" marT="45720" marB="45720" anchor="ctr">
+                  <a:tcPr anchor="ctr">
                     <a:lnL w="6350" cap="flat" cmpd="sng" algn="ctr">
                       <a:solidFill>
                         <a:srgbClr val="2E3250"/>
@@ -4256,7 +4098,7 @@
                     <a:bodyPr/>
                     <a:lstStyle/>
                     <a:p>
-                      <a:pPr algn="l" indent="0" marL="0">
+                      <a:pPr marL="0" indent="0" algn="l">
                         <a:buNone/>
                       </a:pPr>
                       <a:r>
@@ -4277,7 +4119,7 @@
                       </a:endParaRPr>
                     </a:p>
                   </a:txBody>
-                  <a:tcPr marL="91440" marR="91440" marT="45720" marB="45720" anchor="ctr">
+                  <a:tcPr anchor="ctr">
                     <a:lnL w="6350" cap="flat" cmpd="sng" algn="ctr">
                       <a:solidFill>
                         <a:srgbClr val="2E3250"/>
@@ -4319,6 +4161,11 @@
                     </a:solidFill>
                   </a:tcPr>
                 </a:tc>
+                <a:extLst>
+                  <a:ext uri="{0D108BD9-81ED-4DB2-BD59-A6C34878D82A}">
+                    <a16:rowId xmlns:a16="http://schemas.microsoft.com/office/drawing/2014/main" val="10007"/>
+                  </a:ext>
+                </a:extLst>
               </a:tr>
               <a:tr h="237744">
                 <a:tc>
@@ -4326,7 +4173,7 @@
                     <a:bodyPr/>
                     <a:lstStyle/>
                     <a:p>
-                      <a:pPr algn="l" indent="0" marL="0">
+                      <a:pPr marL="0" indent="0" algn="l">
                         <a:buNone/>
                       </a:pPr>
                       <a:r>
@@ -4347,7 +4194,7 @@
                       </a:endParaRPr>
                     </a:p>
                   </a:txBody>
-                  <a:tcPr marL="91440" marR="91440" marT="45720" marB="45720" anchor="ctr">
+                  <a:tcPr anchor="ctr">
                     <a:lnL w="6350" cap="flat" cmpd="sng" algn="ctr">
                       <a:solidFill>
                         <a:srgbClr val="2E3250"/>
@@ -4394,7 +4241,7 @@
                     <a:bodyPr/>
                     <a:lstStyle/>
                     <a:p>
-                      <a:pPr algn="l" indent="0" marL="0">
+                      <a:pPr marL="0" indent="0" algn="l">
                         <a:buNone/>
                       </a:pPr>
                       <a:r>
@@ -4415,7 +4262,7 @@
                       </a:endParaRPr>
                     </a:p>
                   </a:txBody>
-                  <a:tcPr marL="91440" marR="91440" marT="45720" marB="45720" anchor="ctr">
+                  <a:tcPr anchor="ctr">
                     <a:lnL w="6350" cap="flat" cmpd="sng" algn="ctr">
                       <a:solidFill>
                         <a:srgbClr val="2E3250"/>
@@ -4462,7 +4309,7 @@
                     <a:bodyPr/>
                     <a:lstStyle/>
                     <a:p>
-                      <a:pPr algn="l" indent="0" marL="0">
+                      <a:pPr marL="0" indent="0" algn="l">
                         <a:buNone/>
                       </a:pPr>
                       <a:r>
@@ -4483,7 +4330,7 @@
                       </a:endParaRPr>
                     </a:p>
                   </a:txBody>
-                  <a:tcPr marL="91440" marR="91440" marT="45720" marB="45720" anchor="ctr">
+                  <a:tcPr anchor="ctr">
                     <a:lnL w="6350" cap="flat" cmpd="sng" algn="ctr">
                       <a:solidFill>
                         <a:srgbClr val="2E3250"/>
@@ -4525,6 +4372,11 @@
                     </a:solidFill>
                   </a:tcPr>
                 </a:tc>
+                <a:extLst>
+                  <a:ext uri="{0D108BD9-81ED-4DB2-BD59-A6C34878D82A}">
+                    <a16:rowId xmlns:a16="http://schemas.microsoft.com/office/drawing/2014/main" val="10008"/>
+                  </a:ext>
+                </a:extLst>
               </a:tr>
               <a:tr h="237744">
                 <a:tc>
@@ -4532,7 +4384,7 @@
                     <a:bodyPr/>
                     <a:lstStyle/>
                     <a:p>
-                      <a:pPr algn="l" indent="0" marL="0">
+                      <a:pPr marL="0" indent="0" algn="l">
                         <a:buNone/>
                       </a:pPr>
                       <a:r>
@@ -4553,7 +4405,7 @@
                       </a:endParaRPr>
                     </a:p>
                   </a:txBody>
-                  <a:tcPr marL="91440" marR="91440" marT="45720" marB="45720" anchor="ctr">
+                  <a:tcPr anchor="ctr">
                     <a:lnL w="6350" cap="flat" cmpd="sng" algn="ctr">
                       <a:solidFill>
                         <a:srgbClr val="2E3250"/>
@@ -4600,7 +4452,7 @@
                     <a:bodyPr/>
                     <a:lstStyle/>
                     <a:p>
-                      <a:pPr algn="l" indent="0" marL="0">
+                      <a:pPr marL="0" indent="0" algn="l">
                         <a:buNone/>
                       </a:pPr>
                       <a:r>
@@ -4621,7 +4473,7 @@
                       </a:endParaRPr>
                     </a:p>
                   </a:txBody>
-                  <a:tcPr marL="91440" marR="91440" marT="45720" marB="45720" anchor="ctr">
+                  <a:tcPr anchor="ctr">
                     <a:lnL w="6350" cap="flat" cmpd="sng" algn="ctr">
                       <a:solidFill>
                         <a:srgbClr val="2E3250"/>
@@ -4668,7 +4520,7 @@
                     <a:bodyPr/>
                     <a:lstStyle/>
                     <a:p>
-                      <a:pPr algn="l" indent="0" marL="0">
+                      <a:pPr marL="0" indent="0" algn="l">
                         <a:buNone/>
                       </a:pPr>
                       <a:r>
@@ -4689,7 +4541,7 @@
                       </a:endParaRPr>
                     </a:p>
                   </a:txBody>
-                  <a:tcPr marL="91440" marR="91440" marT="45720" marB="45720" anchor="ctr">
+                  <a:tcPr anchor="ctr">
                     <a:lnL w="6350" cap="flat" cmpd="sng" algn="ctr">
                       <a:solidFill>
                         <a:srgbClr val="2E3250"/>
@@ -4731,6 +4583,11 @@
                     </a:solidFill>
                   </a:tcPr>
                 </a:tc>
+                <a:extLst>
+                  <a:ext uri="{0D108BD9-81ED-4DB2-BD59-A6C34878D82A}">
+                    <a16:rowId xmlns:a16="http://schemas.microsoft.com/office/drawing/2014/main" val="10009"/>
+                  </a:ext>
+                </a:extLst>
               </a:tr>
               <a:tr h="237744">
                 <a:tc>
@@ -4738,7 +4595,7 @@
                     <a:bodyPr/>
                     <a:lstStyle/>
                     <a:p>
-                      <a:pPr algn="l" indent="0" marL="0">
+                      <a:pPr marL="0" indent="0" algn="l">
                         <a:buNone/>
                       </a:pPr>
                       <a:r>
@@ -4759,7 +4616,7 @@
                       </a:endParaRPr>
                     </a:p>
                   </a:txBody>
-                  <a:tcPr marL="91440" marR="91440" marT="45720" marB="45720" anchor="ctr">
+                  <a:tcPr anchor="ctr">
                     <a:lnL w="6350" cap="flat" cmpd="sng" algn="ctr">
                       <a:solidFill>
                         <a:srgbClr val="2E3250"/>
@@ -4806,7 +4663,7 @@
                     <a:bodyPr/>
                     <a:lstStyle/>
                     <a:p>
-                      <a:pPr algn="l" indent="0" marL="0">
+                      <a:pPr marL="0" indent="0" algn="l">
                         <a:buNone/>
                       </a:pPr>
                       <a:r>
@@ -4827,7 +4684,7 @@
                       </a:endParaRPr>
                     </a:p>
                   </a:txBody>
-                  <a:tcPr marL="91440" marR="91440" marT="45720" marB="45720" anchor="ctr">
+                  <a:tcPr anchor="ctr">
                     <a:lnL w="6350" cap="flat" cmpd="sng" algn="ctr">
                       <a:solidFill>
                         <a:srgbClr val="2E3250"/>
@@ -4874,7 +4731,7 @@
                     <a:bodyPr/>
                     <a:lstStyle/>
                     <a:p>
-                      <a:pPr algn="l" indent="0" marL="0">
+                      <a:pPr marL="0" indent="0" algn="l">
                         <a:buNone/>
                       </a:pPr>
                       <a:r>
@@ -4895,7 +4752,7 @@
                       </a:endParaRPr>
                     </a:p>
                   </a:txBody>
-                  <a:tcPr marL="91440" marR="91440" marT="45720" marB="45720" anchor="ctr">
+                  <a:tcPr anchor="ctr">
                     <a:lnL w="6350" cap="flat" cmpd="sng" algn="ctr">
                       <a:solidFill>
                         <a:srgbClr val="2E3250"/>
@@ -4937,6 +4794,11 @@
                     </a:solidFill>
                   </a:tcPr>
                 </a:tc>
+                <a:extLst>
+                  <a:ext uri="{0D108BD9-81ED-4DB2-BD59-A6C34878D82A}">
+                    <a16:rowId xmlns:a16="http://schemas.microsoft.com/office/drawing/2014/main" val="10010"/>
+                  </a:ext>
+                </a:extLst>
               </a:tr>
             </a:tbl>
           </a:graphicData>
@@ -4968,6 +4830,13 @@
             <a:prstDash val="solid"/>
           </a:ln>
         </p:spPr>
+        <p:txBody>
+          <a:bodyPr/>
+          <a:lstStyle/>
+          <a:p>
+            <a:endParaRPr lang="fr-FR"/>
+          </a:p>
+        </p:txBody>
       </p:sp>
       <p:sp>
         <p:nvSpPr>
@@ -4990,7 +4859,7 @@
           <a:bodyPr wrap="square" rtlCol="0" anchor="ctr"/>
           <a:lstStyle/>
           <a:p>
-            <a:pPr indent="0" marL="0">
+            <a:pPr marL="0" indent="0">
               <a:buNone/>
             </a:pPr>
             <a:r>
@@ -5029,7 +4898,7 @@
           <a:bodyPr wrap="square" rtlCol="0" anchor="ctr"/>
           <a:lstStyle/>
           <a:p>
-            <a:pPr indent="0" marL="0">
+            <a:pPr marL="0" indent="0">
               <a:buNone/>
             </a:pPr>
             <a:r>
@@ -5063,6 +4932,7 @@
         <a:solidFill>
           <a:srgbClr val="0F1117"/>
         </a:solidFill>
+        <a:effectLst/>
       </p:bgPr>
     </p:bg>
     <p:spTree>
@@ -5103,6 +4973,13 @@
             <a:prstDash val="solid"/>
           </a:ln>
         </p:spPr>
+        <p:txBody>
+          <a:bodyPr/>
+          <a:lstStyle/>
+          <a:p>
+            <a:endParaRPr lang="fr-FR"/>
+          </a:p>
+        </p:txBody>
       </p:sp>
       <p:sp>
         <p:nvSpPr>
@@ -5130,6 +5007,13 @@
             <a:prstDash val="solid"/>
           </a:ln>
         </p:spPr>
+        <p:txBody>
+          <a:bodyPr/>
+          <a:lstStyle/>
+          <a:p>
+            <a:endParaRPr lang="fr-FR"/>
+          </a:p>
+        </p:txBody>
       </p:sp>
       <p:sp>
         <p:nvSpPr>
@@ -5152,7 +5036,7 @@
           <a:bodyPr wrap="square" lIns="0" tIns="0" rIns="0" bIns="0" rtlCol="0" anchor="ctr"/>
           <a:lstStyle/>
           <a:p>
-            <a:pPr algn="ctr" indent="0" marL="0">
+            <a:pPr marL="0" indent="0" algn="ctr">
               <a:buNone/>
             </a:pPr>
             <a:r>
@@ -5188,7 +5072,7 @@
           <a:bodyPr wrap="square" rtlCol="0" anchor="ctr"/>
           <a:lstStyle/>
           <a:p>
-            <a:pPr indent="0" marL="0">
+            <a:pPr marL="0" indent="0">
               <a:buNone/>
             </a:pPr>
             <a:r>
@@ -5227,7 +5111,7 @@
           <a:bodyPr wrap="square" rtlCol="0" anchor="ctr"/>
           <a:lstStyle/>
           <a:p>
-            <a:pPr indent="0" marL="0">
+            <a:pPr marL="0" indent="0">
               <a:buNone/>
             </a:pPr>
             <a:r>
@@ -5261,15 +5145,27 @@
         </p:nvGraphicFramePr>
         <p:xfrm>
           <a:off x="320040" y="1042416"/>
-          <a:ext cx="4114800" cy="1463040"/>
+          <a:ext cx="4114800" cy="1188720"/>
         </p:xfrm>
         <a:graphic>
           <a:graphicData uri="http://schemas.openxmlformats.org/drawingml/2006/table">
             <a:tbl>
               <a:tblPr/>
               <a:tblGrid>
-                <a:gridCol w="1920240"/>
-                <a:gridCol w="2194560"/>
+                <a:gridCol w="1920240">
+                  <a:extLst>
+                    <a:ext uri="{9D8B030D-6E8A-4147-A177-3AD203B41FA5}">
+                      <a16:colId xmlns:a16="http://schemas.microsoft.com/office/drawing/2014/main" val="20000"/>
+                    </a:ext>
+                  </a:extLst>
+                </a:gridCol>
+                <a:gridCol w="2194560">
+                  <a:extLst>
+                    <a:ext uri="{9D8B030D-6E8A-4147-A177-3AD203B41FA5}">
+                      <a16:colId xmlns:a16="http://schemas.microsoft.com/office/drawing/2014/main" val="20001"/>
+                    </a:ext>
+                  </a:extLst>
+                </a:gridCol>
               </a:tblGrid>
               <a:tr h="237744">
                 <a:tc>
@@ -5277,7 +5173,7 @@
                     <a:bodyPr/>
                     <a:lstStyle/>
                     <a:p>
-                      <a:pPr algn="l" indent="0" marL="0">
+                      <a:pPr marL="0" indent="0" algn="l">
                         <a:buNone/>
                       </a:pPr>
                       <a:r>
@@ -5298,7 +5194,7 @@
                       </a:endParaRPr>
                     </a:p>
                   </a:txBody>
-                  <a:tcPr marL="91440" marR="91440" marT="45720" marB="45720" anchor="ctr">
+                  <a:tcPr anchor="ctr">
                     <a:lnL w="6350" cap="flat" cmpd="sng" algn="ctr">
                       <a:solidFill>
                         <a:srgbClr val="2E3250"/>
@@ -5345,7 +5241,7 @@
                     <a:bodyPr/>
                     <a:lstStyle/>
                     <a:p>
-                      <a:pPr algn="l" indent="0" marL="0">
+                      <a:pPr marL="0" indent="0" algn="l">
                         <a:buNone/>
                       </a:pPr>
                       <a:r>
@@ -5366,7 +5262,7 @@
                       </a:endParaRPr>
                     </a:p>
                   </a:txBody>
-                  <a:tcPr marL="91440" marR="91440" marT="45720" marB="45720" anchor="ctr">
+                  <a:tcPr anchor="ctr">
                     <a:lnL w="6350" cap="flat" cmpd="sng" algn="ctr">
                       <a:solidFill>
                         <a:srgbClr val="2E3250"/>
@@ -5408,6 +5304,11 @@
                     </a:solidFill>
                   </a:tcPr>
                 </a:tc>
+                <a:extLst>
+                  <a:ext uri="{0D108BD9-81ED-4DB2-BD59-A6C34878D82A}">
+                    <a16:rowId xmlns:a16="http://schemas.microsoft.com/office/drawing/2014/main" val="10000"/>
+                  </a:ext>
+                </a:extLst>
               </a:tr>
               <a:tr h="237744">
                 <a:tc>
@@ -5415,7 +5316,7 @@
                     <a:bodyPr/>
                     <a:lstStyle/>
                     <a:p>
-                      <a:pPr algn="l" indent="0" marL="0">
+                      <a:pPr marL="0" indent="0" algn="l">
                         <a:buNone/>
                       </a:pPr>
                       <a:r>
@@ -5436,7 +5337,7 @@
                       </a:endParaRPr>
                     </a:p>
                   </a:txBody>
-                  <a:tcPr marL="91440" marR="91440" marT="45720" marB="45720" anchor="ctr">
+                  <a:tcPr anchor="ctr">
                     <a:lnL w="6350" cap="flat" cmpd="sng" algn="ctr">
                       <a:solidFill>
                         <a:srgbClr val="2E3250"/>
@@ -5483,7 +5384,7 @@
                     <a:bodyPr/>
                     <a:lstStyle/>
                     <a:p>
-                      <a:pPr algn="l" indent="0" marL="0">
+                      <a:pPr marL="0" indent="0" algn="l">
                         <a:buNone/>
                       </a:pPr>
                       <a:r>
@@ -5504,7 +5405,7 @@
                       </a:endParaRPr>
                     </a:p>
                   </a:txBody>
-                  <a:tcPr marL="91440" marR="91440" marT="45720" marB="45720" anchor="ctr">
+                  <a:tcPr anchor="ctr">
                     <a:lnL w="6350" cap="flat" cmpd="sng" algn="ctr">
                       <a:solidFill>
                         <a:srgbClr val="2E3250"/>
@@ -5546,6 +5447,11 @@
                     </a:solidFill>
                   </a:tcPr>
                 </a:tc>
+                <a:extLst>
+                  <a:ext uri="{0D108BD9-81ED-4DB2-BD59-A6C34878D82A}">
+                    <a16:rowId xmlns:a16="http://schemas.microsoft.com/office/drawing/2014/main" val="10001"/>
+                  </a:ext>
+                </a:extLst>
               </a:tr>
               <a:tr h="237744">
                 <a:tc>
@@ -5553,7 +5459,7 @@
                     <a:bodyPr/>
                     <a:lstStyle/>
                     <a:p>
-                      <a:pPr algn="l" indent="0" marL="0">
+                      <a:pPr marL="0" indent="0" algn="l">
                         <a:buNone/>
                       </a:pPr>
                       <a:r>
@@ -5574,7 +5480,7 @@
                       </a:endParaRPr>
                     </a:p>
                   </a:txBody>
-                  <a:tcPr marL="91440" marR="91440" marT="45720" marB="45720" anchor="ctr">
+                  <a:tcPr anchor="ctr">
                     <a:lnL w="6350" cap="flat" cmpd="sng" algn="ctr">
                       <a:solidFill>
                         <a:srgbClr val="2E3250"/>
@@ -5621,7 +5527,7 @@
                     <a:bodyPr/>
                     <a:lstStyle/>
                     <a:p>
-                      <a:pPr algn="l" indent="0" marL="0">
+                      <a:pPr marL="0" indent="0" algn="l">
                         <a:buNone/>
                       </a:pPr>
                       <a:r>
@@ -5642,7 +5548,7 @@
                       </a:endParaRPr>
                     </a:p>
                   </a:txBody>
-                  <a:tcPr marL="91440" marR="91440" marT="45720" marB="45720" anchor="ctr">
+                  <a:tcPr anchor="ctr">
                     <a:lnL w="6350" cap="flat" cmpd="sng" algn="ctr">
                       <a:solidFill>
                         <a:srgbClr val="2E3250"/>
@@ -5684,6 +5590,11 @@
                     </a:solidFill>
                   </a:tcPr>
                 </a:tc>
+                <a:extLst>
+                  <a:ext uri="{0D108BD9-81ED-4DB2-BD59-A6C34878D82A}">
+                    <a16:rowId xmlns:a16="http://schemas.microsoft.com/office/drawing/2014/main" val="10002"/>
+                  </a:ext>
+                </a:extLst>
               </a:tr>
               <a:tr h="237744">
                 <a:tc>
@@ -5691,7 +5602,7 @@
                     <a:bodyPr/>
                     <a:lstStyle/>
                     <a:p>
-                      <a:pPr algn="l" indent="0" marL="0">
+                      <a:pPr marL="0" indent="0" algn="l">
                         <a:buNone/>
                       </a:pPr>
                       <a:r>
@@ -5712,7 +5623,7 @@
                       </a:endParaRPr>
                     </a:p>
                   </a:txBody>
-                  <a:tcPr marL="91440" marR="91440" marT="45720" marB="45720" anchor="ctr">
+                  <a:tcPr anchor="ctr">
                     <a:lnL w="6350" cap="flat" cmpd="sng" algn="ctr">
                       <a:solidFill>
                         <a:srgbClr val="2E3250"/>
@@ -5759,7 +5670,7 @@
                     <a:bodyPr/>
                     <a:lstStyle/>
                     <a:p>
-                      <a:pPr algn="l" indent="0" marL="0">
+                      <a:pPr marL="0" indent="0" algn="l">
                         <a:buNone/>
                       </a:pPr>
                       <a:r>
@@ -5780,7 +5691,7 @@
                       </a:endParaRPr>
                     </a:p>
                   </a:txBody>
-                  <a:tcPr marL="91440" marR="91440" marT="45720" marB="45720" anchor="ctr">
+                  <a:tcPr anchor="ctr">
                     <a:lnL w="6350" cap="flat" cmpd="sng" algn="ctr">
                       <a:solidFill>
                         <a:srgbClr val="2E3250"/>
@@ -5822,6 +5733,11 @@
                     </a:solidFill>
                   </a:tcPr>
                 </a:tc>
+                <a:extLst>
+                  <a:ext uri="{0D108BD9-81ED-4DB2-BD59-A6C34878D82A}">
+                    <a16:rowId xmlns:a16="http://schemas.microsoft.com/office/drawing/2014/main" val="10003"/>
+                  </a:ext>
+                </a:extLst>
               </a:tr>
               <a:tr h="237744">
                 <a:tc>
@@ -5829,7 +5745,7 @@
                     <a:bodyPr/>
                     <a:lstStyle/>
                     <a:p>
-                      <a:pPr algn="l" indent="0" marL="0">
+                      <a:pPr marL="0" indent="0" algn="l">
                         <a:buNone/>
                       </a:pPr>
                       <a:r>
@@ -5850,7 +5766,7 @@
                       </a:endParaRPr>
                     </a:p>
                   </a:txBody>
-                  <a:tcPr marL="91440" marR="91440" marT="45720" marB="45720" anchor="ctr">
+                  <a:tcPr anchor="ctr">
                     <a:lnL w="6350" cap="flat" cmpd="sng" algn="ctr">
                       <a:solidFill>
                         <a:srgbClr val="2E3250"/>
@@ -5897,7 +5813,7 @@
                     <a:bodyPr/>
                     <a:lstStyle/>
                     <a:p>
-                      <a:pPr algn="l" indent="0" marL="0">
+                      <a:pPr marL="0" indent="0" algn="l">
                         <a:buNone/>
                       </a:pPr>
                       <a:r>
@@ -5918,7 +5834,7 @@
                       </a:endParaRPr>
                     </a:p>
                   </a:txBody>
-                  <a:tcPr marL="91440" marR="91440" marT="45720" marB="45720" anchor="ctr">
+                  <a:tcPr anchor="ctr">
                     <a:lnL w="6350" cap="flat" cmpd="sng" algn="ctr">
                       <a:solidFill>
                         <a:srgbClr val="2E3250"/>
@@ -5960,6 +5876,11 @@
                     </a:solidFill>
                   </a:tcPr>
                 </a:tc>
+                <a:extLst>
+                  <a:ext uri="{0D108BD9-81ED-4DB2-BD59-A6C34878D82A}">
+                    <a16:rowId xmlns:a16="http://schemas.microsoft.com/office/drawing/2014/main" val="10004"/>
+                  </a:ext>
+                </a:extLst>
               </a:tr>
             </a:tbl>
           </a:graphicData>
@@ -5986,7 +5907,7 @@
           <a:bodyPr wrap="square" rtlCol="0" anchor="ctr"/>
           <a:lstStyle/>
           <a:p>
-            <a:pPr indent="0" marL="0">
+            <a:pPr marL="0" indent="0">
               <a:buNone/>
             </a:pPr>
             <a:r>
@@ -6025,7 +5946,7 @@
           <a:bodyPr wrap="square" rtlCol="0" anchor="ctr"/>
           <a:lstStyle/>
           <a:p>
-            <a:pPr indent="0" marL="0">
+            <a:pPr marL="0" indent="0">
               <a:buNone/>
             </a:pPr>
             <a:r>
@@ -6064,7 +5985,7 @@
           <a:bodyPr wrap="square" rtlCol="0" anchor="ctr"/>
           <a:lstStyle/>
           <a:p>
-            <a:pPr indent="0" marL="0">
+            <a:pPr marL="0" indent="0">
               <a:buNone/>
             </a:pPr>
             <a:r>
@@ -6103,7 +6024,7 @@
           <a:bodyPr wrap="square" rtlCol="0" anchor="ctr"/>
           <a:lstStyle/>
           <a:p>
-            <a:pPr indent="0" marL="0">
+            <a:pPr marL="0" indent="0">
               <a:buNone/>
             </a:pPr>
             <a:r>
@@ -6123,7 +6044,7 @@
       </p:sp>
       <p:sp>
         <p:nvSpPr>
-          <p:cNvPr id="12" name="Text 9"/>
+          <p:cNvPr id="7" name="Text 9"/>
           <p:cNvSpPr/>
           <p:nvPr/>
         </p:nvSpPr>
@@ -6142,7 +6063,7 @@
           <a:bodyPr wrap="square" rtlCol="0" anchor="ctr"/>
           <a:lstStyle/>
           <a:p>
-            <a:pPr indent="0" marL="0">
+            <a:pPr marL="0" indent="0">
               <a:buNone/>
             </a:pPr>
             <a:r>
@@ -6181,7 +6102,7 @@
           <a:bodyPr wrap="square" rtlCol="0" anchor="ctr"/>
           <a:lstStyle/>
           <a:p>
-            <a:pPr indent="0" marL="0">
+            <a:pPr marL="0" indent="0">
               <a:buNone/>
             </a:pPr>
             <a:r>
@@ -6220,7 +6141,7 @@
           <a:bodyPr wrap="square" rtlCol="0" anchor="ctr"/>
           <a:lstStyle/>
           <a:p>
-            <a:pPr indent="0" marL="0">
+            <a:pPr marL="0" indent="0">
               <a:buNone/>
             </a:pPr>
             <a:r>
@@ -6254,16 +6175,34 @@
         </p:nvGraphicFramePr>
         <p:xfrm>
           <a:off x="4663440" y="1042416"/>
-          <a:ext cx="4160520" cy="1481328"/>
+          <a:ext cx="4160520" cy="1188720"/>
         </p:xfrm>
         <a:graphic>
           <a:graphicData uri="http://schemas.openxmlformats.org/drawingml/2006/table">
             <a:tbl>
               <a:tblPr/>
               <a:tblGrid>
-                <a:gridCol w="1371600"/>
-                <a:gridCol w="1737360"/>
-                <a:gridCol w="1051560"/>
+                <a:gridCol w="1371600">
+                  <a:extLst>
+                    <a:ext uri="{9D8B030D-6E8A-4147-A177-3AD203B41FA5}">
+                      <a16:colId xmlns:a16="http://schemas.microsoft.com/office/drawing/2014/main" val="20000"/>
+                    </a:ext>
+                  </a:extLst>
+                </a:gridCol>
+                <a:gridCol w="1737360">
+                  <a:extLst>
+                    <a:ext uri="{9D8B030D-6E8A-4147-A177-3AD203B41FA5}">
+                      <a16:colId xmlns:a16="http://schemas.microsoft.com/office/drawing/2014/main" val="20001"/>
+                    </a:ext>
+                  </a:extLst>
+                </a:gridCol>
+                <a:gridCol w="1051560">
+                  <a:extLst>
+                    <a:ext uri="{9D8B030D-6E8A-4147-A177-3AD203B41FA5}">
+                      <a16:colId xmlns:a16="http://schemas.microsoft.com/office/drawing/2014/main" val="20002"/>
+                    </a:ext>
+                  </a:extLst>
+                </a:gridCol>
               </a:tblGrid>
               <a:tr h="237744">
                 <a:tc>
@@ -6271,7 +6210,7 @@
                     <a:bodyPr/>
                     <a:lstStyle/>
                     <a:p>
-                      <a:pPr algn="l" indent="0" marL="0">
+                      <a:pPr marL="0" indent="0" algn="l">
                         <a:buNone/>
                       </a:pPr>
                       <a:r>
@@ -6292,7 +6231,7 @@
                       </a:endParaRPr>
                     </a:p>
                   </a:txBody>
-                  <a:tcPr marL="91440" marR="91440" marT="45720" marB="45720" anchor="ctr">
+                  <a:tcPr anchor="ctr">
                     <a:lnL w="6350" cap="flat" cmpd="sng" algn="ctr">
                       <a:solidFill>
                         <a:srgbClr val="2E3250"/>
@@ -6339,7 +6278,7 @@
                     <a:bodyPr/>
                     <a:lstStyle/>
                     <a:p>
-                      <a:pPr algn="l" indent="0" marL="0">
+                      <a:pPr marL="0" indent="0" algn="l">
                         <a:buNone/>
                       </a:pPr>
                       <a:r>
@@ -6360,7 +6299,7 @@
                       </a:endParaRPr>
                     </a:p>
                   </a:txBody>
-                  <a:tcPr marL="91440" marR="91440" marT="45720" marB="45720" anchor="ctr">
+                  <a:tcPr anchor="ctr">
                     <a:lnL w="6350" cap="flat" cmpd="sng" algn="ctr">
                       <a:solidFill>
                         <a:srgbClr val="2E3250"/>
@@ -6407,7 +6346,7 @@
                     <a:bodyPr/>
                     <a:lstStyle/>
                     <a:p>
-                      <a:pPr algn="l" indent="0" marL="0">
+                      <a:pPr marL="0" indent="0" algn="l">
                         <a:buNone/>
                       </a:pPr>
                       <a:r>
@@ -6428,7 +6367,7 @@
                       </a:endParaRPr>
                     </a:p>
                   </a:txBody>
-                  <a:tcPr marL="91440" marR="91440" marT="45720" marB="45720" anchor="ctr">
+                  <a:tcPr anchor="ctr">
                     <a:lnL w="6350" cap="flat" cmpd="sng" algn="ctr">
                       <a:solidFill>
                         <a:srgbClr val="2E3250"/>
@@ -6470,6 +6409,11 @@
                     </a:solidFill>
                   </a:tcPr>
                 </a:tc>
+                <a:extLst>
+                  <a:ext uri="{0D108BD9-81ED-4DB2-BD59-A6C34878D82A}">
+                    <a16:rowId xmlns:a16="http://schemas.microsoft.com/office/drawing/2014/main" val="10000"/>
+                  </a:ext>
+                </a:extLst>
               </a:tr>
               <a:tr h="237744">
                 <a:tc>
@@ -6477,7 +6421,7 @@
                     <a:bodyPr/>
                     <a:lstStyle/>
                     <a:p>
-                      <a:pPr algn="l" indent="0" marL="0">
+                      <a:pPr marL="0" indent="0" algn="l">
                         <a:buNone/>
                       </a:pPr>
                       <a:r>
@@ -6498,7 +6442,7 @@
                       </a:endParaRPr>
                     </a:p>
                   </a:txBody>
-                  <a:tcPr marL="91440" marR="91440" marT="45720" marB="45720" anchor="ctr">
+                  <a:tcPr anchor="ctr">
                     <a:lnL w="6350" cap="flat" cmpd="sng" algn="ctr">
                       <a:solidFill>
                         <a:srgbClr val="2E3250"/>
@@ -6545,7 +6489,7 @@
                     <a:bodyPr/>
                     <a:lstStyle/>
                     <a:p>
-                      <a:pPr algn="l" indent="0" marL="0">
+                      <a:pPr marL="0" indent="0" algn="l">
                         <a:buNone/>
                       </a:pPr>
                       <a:r>
@@ -6566,7 +6510,7 @@
                       </a:endParaRPr>
                     </a:p>
                   </a:txBody>
-                  <a:tcPr marL="91440" marR="91440" marT="45720" marB="45720" anchor="ctr">
+                  <a:tcPr anchor="ctr">
                     <a:lnL w="6350" cap="flat" cmpd="sng" algn="ctr">
                       <a:solidFill>
                         <a:srgbClr val="2E3250"/>
@@ -6613,7 +6557,7 @@
                     <a:bodyPr/>
                     <a:lstStyle/>
                     <a:p>
-                      <a:pPr algn="l" indent="0" marL="0">
+                      <a:pPr marL="0" indent="0" algn="l">
                         <a:buNone/>
                       </a:pPr>
                       <a:r>
@@ -6634,7 +6578,7 @@
                       </a:endParaRPr>
                     </a:p>
                   </a:txBody>
-                  <a:tcPr marL="91440" marR="91440" marT="45720" marB="45720" anchor="ctr">
+                  <a:tcPr anchor="ctr">
                     <a:lnL w="6350" cap="flat" cmpd="sng" algn="ctr">
                       <a:solidFill>
                         <a:srgbClr val="2E3250"/>
@@ -6676,6 +6620,11 @@
                     </a:solidFill>
                   </a:tcPr>
                 </a:tc>
+                <a:extLst>
+                  <a:ext uri="{0D108BD9-81ED-4DB2-BD59-A6C34878D82A}">
+                    <a16:rowId xmlns:a16="http://schemas.microsoft.com/office/drawing/2014/main" val="10001"/>
+                  </a:ext>
+                </a:extLst>
               </a:tr>
               <a:tr h="237744">
                 <a:tc>
@@ -6683,7 +6632,7 @@
                     <a:bodyPr/>
                     <a:lstStyle/>
                     <a:p>
-                      <a:pPr algn="l" indent="0" marL="0">
+                      <a:pPr marL="0" indent="0" algn="l">
                         <a:buNone/>
                       </a:pPr>
                       <a:r>
@@ -6704,7 +6653,7 @@
                       </a:endParaRPr>
                     </a:p>
                   </a:txBody>
-                  <a:tcPr marL="91440" marR="91440" marT="45720" marB="45720" anchor="ctr">
+                  <a:tcPr anchor="ctr">
                     <a:lnL w="6350" cap="flat" cmpd="sng" algn="ctr">
                       <a:solidFill>
                         <a:srgbClr val="2E3250"/>
@@ -6751,7 +6700,7 @@
                     <a:bodyPr/>
                     <a:lstStyle/>
                     <a:p>
-                      <a:pPr algn="l" indent="0" marL="0">
+                      <a:pPr marL="0" indent="0" algn="l">
                         <a:buNone/>
                       </a:pPr>
                       <a:r>
@@ -6772,7 +6721,7 @@
                       </a:endParaRPr>
                     </a:p>
                   </a:txBody>
-                  <a:tcPr marL="91440" marR="91440" marT="45720" marB="45720" anchor="ctr">
+                  <a:tcPr anchor="ctr">
                     <a:lnL w="6350" cap="flat" cmpd="sng" algn="ctr">
                       <a:solidFill>
                         <a:srgbClr val="2E3250"/>
@@ -6819,7 +6768,7 @@
                     <a:bodyPr/>
                     <a:lstStyle/>
                     <a:p>
-                      <a:pPr algn="l" indent="0" marL="0">
+                      <a:pPr marL="0" indent="0" algn="l">
                         <a:buNone/>
                       </a:pPr>
                       <a:r>
@@ -6840,7 +6789,7 @@
                       </a:endParaRPr>
                     </a:p>
                   </a:txBody>
-                  <a:tcPr marL="91440" marR="91440" marT="45720" marB="45720" anchor="ctr">
+                  <a:tcPr anchor="ctr">
                     <a:lnL w="6350" cap="flat" cmpd="sng" algn="ctr">
                       <a:solidFill>
                         <a:srgbClr val="2E3250"/>
@@ -6882,6 +6831,11 @@
                     </a:solidFill>
                   </a:tcPr>
                 </a:tc>
+                <a:extLst>
+                  <a:ext uri="{0D108BD9-81ED-4DB2-BD59-A6C34878D82A}">
+                    <a16:rowId xmlns:a16="http://schemas.microsoft.com/office/drawing/2014/main" val="10002"/>
+                  </a:ext>
+                </a:extLst>
               </a:tr>
               <a:tr h="237744">
                 <a:tc>
@@ -6889,7 +6843,7 @@
                     <a:bodyPr/>
                     <a:lstStyle/>
                     <a:p>
-                      <a:pPr algn="l" indent="0" marL="0">
+                      <a:pPr marL="0" indent="0" algn="l">
                         <a:buNone/>
                       </a:pPr>
                       <a:r>
@@ -6910,7 +6864,7 @@
                       </a:endParaRPr>
                     </a:p>
                   </a:txBody>
-                  <a:tcPr marL="91440" marR="91440" marT="45720" marB="45720" anchor="ctr">
+                  <a:tcPr anchor="ctr">
                     <a:lnL w="6350" cap="flat" cmpd="sng" algn="ctr">
                       <a:solidFill>
                         <a:srgbClr val="2E3250"/>
@@ -6957,7 +6911,7 @@
                     <a:bodyPr/>
                     <a:lstStyle/>
                     <a:p>
-                      <a:pPr algn="l" indent="0" marL="0">
+                      <a:pPr marL="0" indent="0" algn="l">
                         <a:buNone/>
                       </a:pPr>
                       <a:r>
@@ -6978,7 +6932,7 @@
                       </a:endParaRPr>
                     </a:p>
                   </a:txBody>
-                  <a:tcPr marL="91440" marR="91440" marT="45720" marB="45720" anchor="ctr">
+                  <a:tcPr anchor="ctr">
                     <a:lnL w="6350" cap="flat" cmpd="sng" algn="ctr">
                       <a:solidFill>
                         <a:srgbClr val="2E3250"/>
@@ -7025,7 +6979,7 @@
                     <a:bodyPr/>
                     <a:lstStyle/>
                     <a:p>
-                      <a:pPr algn="l" indent="0" marL="0">
+                      <a:pPr marL="0" indent="0" algn="l">
                         <a:buNone/>
                       </a:pPr>
                       <a:r>
@@ -7046,7 +7000,7 @@
                       </a:endParaRPr>
                     </a:p>
                   </a:txBody>
-                  <a:tcPr marL="91440" marR="91440" marT="45720" marB="45720" anchor="ctr">
+                  <a:tcPr anchor="ctr">
                     <a:lnL w="6350" cap="flat" cmpd="sng" algn="ctr">
                       <a:solidFill>
                         <a:srgbClr val="2E3250"/>
@@ -7088,6 +7042,11 @@
                     </a:solidFill>
                   </a:tcPr>
                 </a:tc>
+                <a:extLst>
+                  <a:ext uri="{0D108BD9-81ED-4DB2-BD59-A6C34878D82A}">
+                    <a16:rowId xmlns:a16="http://schemas.microsoft.com/office/drawing/2014/main" val="10003"/>
+                  </a:ext>
+                </a:extLst>
               </a:tr>
               <a:tr h="237744">
                 <a:tc>
@@ -7095,7 +7054,7 @@
                     <a:bodyPr/>
                     <a:lstStyle/>
                     <a:p>
-                      <a:pPr algn="l" indent="0" marL="0">
+                      <a:pPr marL="0" indent="0" algn="l">
                         <a:buNone/>
                       </a:pPr>
                       <a:r>
@@ -7116,7 +7075,7 @@
                       </a:endParaRPr>
                     </a:p>
                   </a:txBody>
-                  <a:tcPr marL="91440" marR="91440" marT="45720" marB="45720" anchor="ctr">
+                  <a:tcPr anchor="ctr">
                     <a:lnL w="6350" cap="flat" cmpd="sng" algn="ctr">
                       <a:solidFill>
                         <a:srgbClr val="2E3250"/>
@@ -7163,7 +7122,7 @@
                     <a:bodyPr/>
                     <a:lstStyle/>
                     <a:p>
-                      <a:pPr algn="l" indent="0" marL="0">
+                      <a:pPr marL="0" indent="0" algn="l">
                         <a:buNone/>
                       </a:pPr>
                       <a:r>
@@ -7184,7 +7143,7 @@
                       </a:endParaRPr>
                     </a:p>
                   </a:txBody>
-                  <a:tcPr marL="91440" marR="91440" marT="45720" marB="45720" anchor="ctr">
+                  <a:tcPr anchor="ctr">
                     <a:lnL w="6350" cap="flat" cmpd="sng" algn="ctr">
                       <a:solidFill>
                         <a:srgbClr val="2E3250"/>
@@ -7231,7 +7190,7 @@
                     <a:bodyPr/>
                     <a:lstStyle/>
                     <a:p>
-                      <a:pPr algn="l" indent="0" marL="0">
+                      <a:pPr marL="0" indent="0" algn="l">
                         <a:buNone/>
                       </a:pPr>
                       <a:r>
@@ -7252,7 +7211,7 @@
                       </a:endParaRPr>
                     </a:p>
                   </a:txBody>
-                  <a:tcPr marL="91440" marR="91440" marT="45720" marB="45720" anchor="ctr">
+                  <a:tcPr anchor="ctr">
                     <a:lnL w="6350" cap="flat" cmpd="sng" algn="ctr">
                       <a:solidFill>
                         <a:srgbClr val="2E3250"/>
@@ -7294,6 +7253,11 @@
                     </a:solidFill>
                   </a:tcPr>
                 </a:tc>
+                <a:extLst>
+                  <a:ext uri="{0D108BD9-81ED-4DB2-BD59-A6C34878D82A}">
+                    <a16:rowId xmlns:a16="http://schemas.microsoft.com/office/drawing/2014/main" val="10004"/>
+                  </a:ext>
+                </a:extLst>
               </a:tr>
             </a:tbl>
           </a:graphicData>
@@ -7325,6 +7289,13 @@
             <a:prstDash val="solid"/>
           </a:ln>
         </p:spPr>
+        <p:txBody>
+          <a:bodyPr/>
+          <a:lstStyle/>
+          <a:p>
+            <a:endParaRPr lang="fr-FR"/>
+          </a:p>
+        </p:txBody>
       </p:sp>
       <p:sp>
         <p:nvSpPr>
@@ -7347,7 +7318,7 @@
           <a:bodyPr wrap="square" rtlCol="0" anchor="ctr"/>
           <a:lstStyle/>
           <a:p>
-            <a:pPr algn="ctr" indent="0" marL="0">
+            <a:pPr marL="0" indent="0" algn="ctr">
               <a:buNone/>
             </a:pPr>
             <a:r>
@@ -7364,7 +7335,7 @@
             <a:endParaRPr lang="en-US" sz="850" dirty="0"/>
           </a:p>
           <a:p>
-            <a:pPr algn="ctr" indent="0" marL="0">
+            <a:pPr marL="0" indent="0" algn="ctr">
               <a:buNone/>
             </a:pPr>
             <a:r>
@@ -7405,6 +7376,13 @@
             <a:tailEnd type="arrow"/>
           </a:ln>
         </p:spPr>
+        <p:txBody>
+          <a:bodyPr/>
+          <a:lstStyle/>
+          <a:p>
+            <a:endParaRPr lang="fr-FR"/>
+          </a:p>
+        </p:txBody>
       </p:sp>
       <p:sp>
         <p:nvSpPr>
@@ -7432,6 +7410,13 @@
             <a:prstDash val="solid"/>
           </a:ln>
         </p:spPr>
+        <p:txBody>
+          <a:bodyPr/>
+          <a:lstStyle/>
+          <a:p>
+            <a:endParaRPr lang="fr-FR"/>
+          </a:p>
+        </p:txBody>
       </p:sp>
       <p:sp>
         <p:nvSpPr>
@@ -7454,7 +7439,7 @@
           <a:bodyPr wrap="square" rtlCol="0" anchor="ctr"/>
           <a:lstStyle/>
           <a:p>
-            <a:pPr algn="ctr" indent="0" marL="0">
+            <a:pPr marL="0" indent="0" algn="ctr">
               <a:buNone/>
             </a:pPr>
             <a:r>
@@ -7471,7 +7456,7 @@
             <a:endParaRPr lang="en-US" sz="850" dirty="0"/>
           </a:p>
           <a:p>
-            <a:pPr algn="ctr" indent="0" marL="0">
+            <a:pPr marL="0" indent="0" algn="ctr">
               <a:buNone/>
             </a:pPr>
             <a:r>
@@ -7512,6 +7497,13 @@
             <a:tailEnd type="arrow"/>
           </a:ln>
         </p:spPr>
+        <p:txBody>
+          <a:bodyPr/>
+          <a:lstStyle/>
+          <a:p>
+            <a:endParaRPr lang="fr-FR"/>
+          </a:p>
+        </p:txBody>
       </p:sp>
       <p:sp>
         <p:nvSpPr>
@@ -7539,10 +7531,17 @@
             <a:prstDash val="solid"/>
           </a:ln>
         </p:spPr>
-      </p:sp>
-      <p:sp>
-        <p:nvSpPr>
-          <p:cNvPr id="23" name="Text 19"/>
+        <p:txBody>
+          <a:bodyPr/>
+          <a:lstStyle/>
+          <a:p>
+            <a:endParaRPr lang="fr-FR"/>
+          </a:p>
+        </p:txBody>
+      </p:sp>
+      <p:sp>
+        <p:nvSpPr>
+          <p:cNvPr id="15" name="Text 19"/>
           <p:cNvSpPr/>
           <p:nvPr/>
         </p:nvSpPr>
@@ -7561,7 +7560,7 @@
           <a:bodyPr wrap="square" rtlCol="0" anchor="ctr"/>
           <a:lstStyle/>
           <a:p>
-            <a:pPr algn="ctr" indent="0" marL="0">
+            <a:pPr marL="0" indent="0" algn="ctr">
               <a:buNone/>
             </a:pPr>
             <a:r>
@@ -7578,7 +7577,7 @@
             <a:endParaRPr lang="en-US" sz="850" dirty="0"/>
           </a:p>
           <a:p>
-            <a:pPr algn="ctr" indent="0" marL="0">
+            <a:pPr marL="0" indent="0" algn="ctr">
               <a:buNone/>
             </a:pPr>
             <a:r>
@@ -7619,6 +7618,13 @@
             <a:tailEnd type="arrow"/>
           </a:ln>
         </p:spPr>
+        <p:txBody>
+          <a:bodyPr/>
+          <a:lstStyle/>
+          <a:p>
+            <a:endParaRPr lang="fr-FR"/>
+          </a:p>
+        </p:txBody>
       </p:sp>
       <p:sp>
         <p:nvSpPr>
@@ -7646,6 +7652,13 @@
             <a:prstDash val="solid"/>
           </a:ln>
         </p:spPr>
+        <p:txBody>
+          <a:bodyPr/>
+          <a:lstStyle/>
+          <a:p>
+            <a:endParaRPr lang="fr-FR"/>
+          </a:p>
+        </p:txBody>
       </p:sp>
       <p:sp>
         <p:nvSpPr>
@@ -7668,7 +7681,7 @@
           <a:bodyPr wrap="square" rtlCol="0" anchor="ctr"/>
           <a:lstStyle/>
           <a:p>
-            <a:pPr algn="ctr" indent="0" marL="0">
+            <a:pPr marL="0" indent="0" algn="ctr">
               <a:buNone/>
             </a:pPr>
             <a:r>
@@ -7685,7 +7698,7 @@
             <a:endParaRPr lang="en-US" sz="850" dirty="0"/>
           </a:p>
           <a:p>
-            <a:pPr algn="ctr" indent="0" marL="0">
+            <a:pPr marL="0" indent="0" algn="ctr">
               <a:buNone/>
             </a:pPr>
             <a:r>
@@ -7726,6 +7739,13 @@
             <a:tailEnd type="arrow"/>
           </a:ln>
         </p:spPr>
+        <p:txBody>
+          <a:bodyPr/>
+          <a:lstStyle/>
+          <a:p>
+            <a:endParaRPr lang="fr-FR"/>
+          </a:p>
+        </p:txBody>
       </p:sp>
       <p:sp>
         <p:nvSpPr>
@@ -7753,6 +7773,13 @@
             <a:prstDash val="solid"/>
           </a:ln>
         </p:spPr>
+        <p:txBody>
+          <a:bodyPr/>
+          <a:lstStyle/>
+          <a:p>
+            <a:endParaRPr lang="fr-FR"/>
+          </a:p>
+        </p:txBody>
       </p:sp>
       <p:sp>
         <p:nvSpPr>
@@ -7775,7 +7802,7 @@
           <a:bodyPr wrap="square" rtlCol="0" anchor="ctr"/>
           <a:lstStyle/>
           <a:p>
-            <a:pPr algn="ctr" indent="0" marL="0">
+            <a:pPr marL="0" indent="0" algn="ctr">
               <a:buNone/>
             </a:pPr>
             <a:r>
@@ -7792,7 +7819,7 @@
             <a:endParaRPr lang="en-US" sz="850" dirty="0"/>
           </a:p>
           <a:p>
-            <a:pPr algn="ctr" indent="0" marL="0">
+            <a:pPr marL="0" indent="0" algn="ctr">
               <a:buNone/>
             </a:pPr>
             <a:r>
@@ -7831,7 +7858,7 @@
           <a:bodyPr wrap="square" rtlCol="0" anchor="ctr"/>
           <a:lstStyle/>
           <a:p>
-            <a:pPr indent="0" marL="0">
+            <a:pPr marL="0" indent="0">
               <a:buNone/>
             </a:pPr>
             <a:r>
@@ -7875,6 +7902,13 @@
             <a:prstDash val="solid"/>
           </a:ln>
         </p:spPr>
+        <p:txBody>
+          <a:bodyPr/>
+          <a:lstStyle/>
+          <a:p>
+            <a:endParaRPr lang="fr-FR"/>
+          </a:p>
+        </p:txBody>
       </p:sp>
       <p:sp>
         <p:nvSpPr>
@@ -7897,7 +7931,7 @@
           <a:bodyPr wrap="square" rtlCol="0" anchor="ctr"/>
           <a:lstStyle/>
           <a:p>
-            <a:pPr indent="0" marL="0">
+            <a:pPr marL="0" indent="0">
               <a:buNone/>
             </a:pPr>
             <a:r>
@@ -7936,7 +7970,7 @@
           <a:bodyPr wrap="square" rtlCol="0" anchor="ctr"/>
           <a:lstStyle/>
           <a:p>
-            <a:pPr indent="0" marL="0">
+            <a:pPr marL="0" indent="0">
               <a:buNone/>
             </a:pPr>
             <a:r>
@@ -7975,7 +8009,7 @@
           <a:bodyPr wrap="square" rtlCol="0" anchor="ctr"/>
           <a:lstStyle/>
           <a:p>
-            <a:pPr indent="0" marL="0">
+            <a:pPr marL="0" indent="0">
               <a:buNone/>
             </a:pPr>
             <a:r>
@@ -7990,6 +8024,38 @@
               <a:t>Apple ID -1001 : ouvrir Xcode → Signing &amp; Capabilities → View Accounts… → teams rechargent automatiquement.</a:t>
             </a:r>
             <a:endParaRPr lang="en-US" sz="900" dirty="0"/>
+          </a:p>
+        </p:txBody>
+      </p:sp>
+      <p:sp>
+        <p:nvSpPr>
+          <p:cNvPr id="35" name="ZoneTexte 34">
+            <a:extLst>
+              <a:ext uri="{FF2B5EF4-FFF2-40B4-BE49-F238E27FC236}">
+                <a16:creationId xmlns:a16="http://schemas.microsoft.com/office/drawing/2014/main" id="{DD3C440C-7D96-741C-0693-D54545C30205}"/>
+              </a:ext>
+            </a:extLst>
+          </p:cNvPr>
+          <p:cNvSpPr txBox="1"/>
+          <p:nvPr/>
+        </p:nvSpPr>
+        <p:spPr>
+          <a:xfrm>
+            <a:off x="747423" y="3586038"/>
+            <a:ext cx="184731" cy="369332"/>
+          </a:xfrm>
+          <a:prstGeom prst="rect">
+            <a:avLst/>
+          </a:prstGeom>
+          <a:noFill/>
+        </p:spPr>
+        <p:txBody>
+          <a:bodyPr wrap="none" rtlCol="0">
+            <a:spAutoFit/>
+          </a:bodyPr>
+          <a:lstStyle/>
+          <a:p>
+            <a:endParaRPr lang="fr-FR"/>
           </a:p>
         </p:txBody>
       </p:sp>
@@ -8009,6 +8075,7 @@
         <a:solidFill>
           <a:srgbClr val="0F1117"/>
         </a:solidFill>
+        <a:effectLst/>
       </p:bgPr>
     </p:bg>
     <p:spTree>
@@ -8049,6 +8116,13 @@
             <a:prstDash val="solid"/>
           </a:ln>
         </p:spPr>
+        <p:txBody>
+          <a:bodyPr/>
+          <a:lstStyle/>
+          <a:p>
+            <a:endParaRPr lang="fr-FR"/>
+          </a:p>
+        </p:txBody>
       </p:sp>
       <p:sp>
         <p:nvSpPr>
@@ -8076,6 +8150,13 @@
             <a:prstDash val="solid"/>
           </a:ln>
         </p:spPr>
+        <p:txBody>
+          <a:bodyPr/>
+          <a:lstStyle/>
+          <a:p>
+            <a:endParaRPr lang="fr-FR"/>
+          </a:p>
+        </p:txBody>
       </p:sp>
       <p:sp>
         <p:nvSpPr>
@@ -8098,7 +8179,7 @@
           <a:bodyPr wrap="square" lIns="0" tIns="0" rIns="0" bIns="0" rtlCol="0" anchor="ctr"/>
           <a:lstStyle/>
           <a:p>
-            <a:pPr algn="ctr" indent="0" marL="0">
+            <a:pPr marL="0" indent="0" algn="ctr">
               <a:buNone/>
             </a:pPr>
             <a:r>
@@ -8134,7 +8215,7 @@
           <a:bodyPr wrap="square" rtlCol="0" anchor="ctr"/>
           <a:lstStyle/>
           <a:p>
-            <a:pPr indent="0" marL="0">
+            <a:pPr marL="0" indent="0">
               <a:buNone/>
             </a:pPr>
             <a:r>
@@ -8178,6 +8259,13 @@
             <a:prstDash val="solid"/>
           </a:ln>
         </p:spPr>
+        <p:txBody>
+          <a:bodyPr/>
+          <a:lstStyle/>
+          <a:p>
+            <a:endParaRPr lang="fr-FR"/>
+          </a:p>
+        </p:txBody>
       </p:sp>
       <p:sp>
         <p:nvSpPr>
@@ -8205,6 +8293,13 @@
             <a:prstDash val="solid"/>
           </a:ln>
         </p:spPr>
+        <p:txBody>
+          <a:bodyPr/>
+          <a:lstStyle/>
+          <a:p>
+            <a:endParaRPr lang="fr-FR"/>
+          </a:p>
+        </p:txBody>
       </p:sp>
       <p:sp>
         <p:nvSpPr>
@@ -8227,7 +8322,7 @@
           <a:bodyPr wrap="square" rtlCol="0" anchor="ctr"/>
           <a:lstStyle/>
           <a:p>
-            <a:pPr indent="0" marL="0">
+            <a:pPr marL="0" indent="0">
               <a:buNone/>
             </a:pPr>
             <a:r>
@@ -8266,7 +8361,7 @@
           <a:bodyPr wrap="square" rtlCol="0" anchor="ctr"/>
           <a:lstStyle/>
           <a:p>
-            <a:pPr indent="0" marL="0">
+            <a:pPr marL="0" indent="0">
               <a:buNone/>
             </a:pPr>
             <a:r>
@@ -8306,6 +8401,13 @@
             <a:prstDash val="solid"/>
           </a:ln>
         </p:spPr>
+        <p:txBody>
+          <a:bodyPr/>
+          <a:lstStyle/>
+          <a:p>
+            <a:endParaRPr lang="fr-FR"/>
+          </a:p>
+        </p:txBody>
       </p:sp>
       <p:sp>
         <p:nvSpPr>
@@ -8328,7 +8430,7 @@
           <a:bodyPr wrap="square" rtlCol="0" anchor="ctr"/>
           <a:lstStyle/>
           <a:p>
-            <a:pPr indent="0" marL="0">
+            <a:pPr marL="0" indent="0">
               <a:buNone/>
             </a:pPr>
             <a:r>
@@ -8372,6 +8474,13 @@
             <a:prstDash val="solid"/>
           </a:ln>
         </p:spPr>
+        <p:txBody>
+          <a:bodyPr/>
+          <a:lstStyle/>
+          <a:p>
+            <a:endParaRPr lang="fr-FR"/>
+          </a:p>
+        </p:txBody>
       </p:sp>
       <p:sp>
         <p:nvSpPr>
@@ -8399,6 +8508,13 @@
             <a:prstDash val="solid"/>
           </a:ln>
         </p:spPr>
+        <p:txBody>
+          <a:bodyPr/>
+          <a:lstStyle/>
+          <a:p>
+            <a:endParaRPr lang="fr-FR"/>
+          </a:p>
+        </p:txBody>
       </p:sp>
       <p:sp>
         <p:nvSpPr>
@@ -8421,7 +8537,7 @@
           <a:bodyPr wrap="square" rtlCol="0" anchor="ctr"/>
           <a:lstStyle/>
           <a:p>
-            <a:pPr indent="0" marL="0">
+            <a:pPr marL="0" indent="0">
               <a:buNone/>
             </a:pPr>
             <a:r>
@@ -8460,7 +8576,7 @@
           <a:bodyPr wrap="square" rtlCol="0" anchor="ctr"/>
           <a:lstStyle/>
           <a:p>
-            <a:pPr indent="0" marL="0">
+            <a:pPr marL="0" indent="0">
               <a:buNone/>
             </a:pPr>
             <a:r>
@@ -8500,6 +8616,13 @@
             <a:prstDash val="solid"/>
           </a:ln>
         </p:spPr>
+        <p:txBody>
+          <a:bodyPr/>
+          <a:lstStyle/>
+          <a:p>
+            <a:endParaRPr lang="fr-FR"/>
+          </a:p>
+        </p:txBody>
       </p:sp>
       <p:sp>
         <p:nvSpPr>
@@ -8522,7 +8645,7 @@
           <a:bodyPr wrap="square" rtlCol="0" anchor="ctr"/>
           <a:lstStyle/>
           <a:p>
-            <a:pPr indent="0" marL="0">
+            <a:pPr marL="0" indent="0">
               <a:buNone/>
             </a:pPr>
             <a:r>
@@ -8566,6 +8689,13 @@
             <a:prstDash val="solid"/>
           </a:ln>
         </p:spPr>
+        <p:txBody>
+          <a:bodyPr/>
+          <a:lstStyle/>
+          <a:p>
+            <a:endParaRPr lang="fr-FR"/>
+          </a:p>
+        </p:txBody>
       </p:sp>
       <p:sp>
         <p:nvSpPr>
@@ -8593,6 +8723,13 @@
             <a:prstDash val="solid"/>
           </a:ln>
         </p:spPr>
+        <p:txBody>
+          <a:bodyPr/>
+          <a:lstStyle/>
+          <a:p>
+            <a:endParaRPr lang="fr-FR"/>
+          </a:p>
+        </p:txBody>
       </p:sp>
       <p:sp>
         <p:nvSpPr>
@@ -8615,7 +8752,7 @@
           <a:bodyPr wrap="square" rtlCol="0" anchor="ctr"/>
           <a:lstStyle/>
           <a:p>
-            <a:pPr indent="0" marL="0">
+            <a:pPr marL="0" indent="0">
               <a:buNone/>
             </a:pPr>
             <a:r>
@@ -8654,7 +8791,7 @@
           <a:bodyPr wrap="square" rtlCol="0" anchor="ctr"/>
           <a:lstStyle/>
           <a:p>
-            <a:pPr indent="0" marL="0">
+            <a:pPr marL="0" indent="0">
               <a:buNone/>
             </a:pPr>
             <a:r>
@@ -8694,6 +8831,13 @@
             <a:prstDash val="solid"/>
           </a:ln>
         </p:spPr>
+        <p:txBody>
+          <a:bodyPr/>
+          <a:lstStyle/>
+          <a:p>
+            <a:endParaRPr lang="fr-FR"/>
+          </a:p>
+        </p:txBody>
       </p:sp>
       <p:sp>
         <p:nvSpPr>
@@ -8716,7 +8860,7 @@
           <a:bodyPr wrap="square" rtlCol="0" anchor="ctr"/>
           <a:lstStyle/>
           <a:p>
-            <a:pPr indent="0" marL="0">
+            <a:pPr marL="0" indent="0">
               <a:buNone/>
             </a:pPr>
             <a:r>
@@ -8760,6 +8904,13 @@
             <a:prstDash val="solid"/>
           </a:ln>
         </p:spPr>
+        <p:txBody>
+          <a:bodyPr/>
+          <a:lstStyle/>
+          <a:p>
+            <a:endParaRPr lang="fr-FR"/>
+          </a:p>
+        </p:txBody>
       </p:sp>
       <p:sp>
         <p:nvSpPr>
@@ -8787,6 +8938,13 @@
             <a:prstDash val="solid"/>
           </a:ln>
         </p:spPr>
+        <p:txBody>
+          <a:bodyPr/>
+          <a:lstStyle/>
+          <a:p>
+            <a:endParaRPr lang="fr-FR"/>
+          </a:p>
+        </p:txBody>
       </p:sp>
       <p:sp>
         <p:nvSpPr>
@@ -8809,7 +8967,7 @@
           <a:bodyPr wrap="square" rtlCol="0" anchor="ctr"/>
           <a:lstStyle/>
           <a:p>
-            <a:pPr indent="0" marL="0">
+            <a:pPr marL="0" indent="0">
               <a:buNone/>
             </a:pPr>
             <a:r>
@@ -8848,7 +9006,7 @@
           <a:bodyPr wrap="square" rtlCol="0" anchor="ctr"/>
           <a:lstStyle/>
           <a:p>
-            <a:pPr indent="0" marL="0">
+            <a:pPr marL="0" indent="0">
               <a:buNone/>
             </a:pPr>
             <a:r>
@@ -8888,6 +9046,13 @@
             <a:prstDash val="solid"/>
           </a:ln>
         </p:spPr>
+        <p:txBody>
+          <a:bodyPr/>
+          <a:lstStyle/>
+          <a:p>
+            <a:endParaRPr lang="fr-FR"/>
+          </a:p>
+        </p:txBody>
       </p:sp>
       <p:sp>
         <p:nvSpPr>
@@ -8910,7 +9075,7 @@
           <a:bodyPr wrap="square" rtlCol="0" anchor="ctr"/>
           <a:lstStyle/>
           <a:p>
-            <a:pPr indent="0" marL="0">
+            <a:pPr marL="0" indent="0">
               <a:buNone/>
             </a:pPr>
             <a:r>
@@ -8954,6 +9119,13 @@
             <a:prstDash val="solid"/>
           </a:ln>
         </p:spPr>
+        <p:txBody>
+          <a:bodyPr/>
+          <a:lstStyle/>
+          <a:p>
+            <a:endParaRPr lang="fr-FR"/>
+          </a:p>
+        </p:txBody>
       </p:sp>
       <p:sp>
         <p:nvSpPr>
@@ -8981,6 +9153,13 @@
             <a:prstDash val="solid"/>
           </a:ln>
         </p:spPr>
+        <p:txBody>
+          <a:bodyPr/>
+          <a:lstStyle/>
+          <a:p>
+            <a:endParaRPr lang="fr-FR"/>
+          </a:p>
+        </p:txBody>
       </p:sp>
       <p:sp>
         <p:nvSpPr>
@@ -9003,7 +9182,7 @@
           <a:bodyPr wrap="square" rtlCol="0" anchor="ctr"/>
           <a:lstStyle/>
           <a:p>
-            <a:pPr indent="0" marL="0">
+            <a:pPr marL="0" indent="0">
               <a:buNone/>
             </a:pPr>
             <a:r>
@@ -9042,7 +9221,7 @@
           <a:bodyPr wrap="square" rtlCol="0" anchor="ctr"/>
           <a:lstStyle/>
           <a:p>
-            <a:pPr indent="0" marL="0">
+            <a:pPr marL="0" indent="0">
               <a:buNone/>
             </a:pPr>
             <a:r>
@@ -9082,6 +9261,13 @@
             <a:prstDash val="solid"/>
           </a:ln>
         </p:spPr>
+        <p:txBody>
+          <a:bodyPr/>
+          <a:lstStyle/>
+          <a:p>
+            <a:endParaRPr lang="fr-FR"/>
+          </a:p>
+        </p:txBody>
       </p:sp>
       <p:sp>
         <p:nvSpPr>
@@ -9104,7 +9290,7 @@
           <a:bodyPr wrap="square" rtlCol="0" anchor="ctr"/>
           <a:lstStyle/>
           <a:p>
-            <a:pPr indent="0" marL="0">
+            <a:pPr marL="0" indent="0">
               <a:buNone/>
             </a:pPr>
             <a:r>
@@ -9148,6 +9334,13 @@
             <a:prstDash val="solid"/>
           </a:ln>
         </p:spPr>
+        <p:txBody>
+          <a:bodyPr/>
+          <a:lstStyle/>
+          <a:p>
+            <a:endParaRPr lang="fr-FR"/>
+          </a:p>
+        </p:txBody>
       </p:sp>
       <p:sp>
         <p:nvSpPr>
@@ -9175,6 +9368,13 @@
             <a:prstDash val="solid"/>
           </a:ln>
         </p:spPr>
+        <p:txBody>
+          <a:bodyPr/>
+          <a:lstStyle/>
+          <a:p>
+            <a:endParaRPr lang="fr-FR"/>
+          </a:p>
+        </p:txBody>
       </p:sp>
       <p:sp>
         <p:nvSpPr>
@@ -9197,7 +9397,7 @@
           <a:bodyPr wrap="square" rtlCol="0" anchor="ctr"/>
           <a:lstStyle/>
           <a:p>
-            <a:pPr indent="0" marL="0">
+            <a:pPr marL="0" indent="0">
               <a:buNone/>
             </a:pPr>
             <a:r>
@@ -9236,7 +9436,7 @@
           <a:bodyPr wrap="square" rtlCol="0" anchor="ctr"/>
           <a:lstStyle/>
           <a:p>
-            <a:pPr indent="0" marL="0">
+            <a:pPr marL="0" indent="0">
               <a:buNone/>
             </a:pPr>
             <a:r>
@@ -9276,6 +9476,13 @@
             <a:prstDash val="solid"/>
           </a:ln>
         </p:spPr>
+        <p:txBody>
+          <a:bodyPr/>
+          <a:lstStyle/>
+          <a:p>
+            <a:endParaRPr lang="fr-FR"/>
+          </a:p>
+        </p:txBody>
       </p:sp>
       <p:sp>
         <p:nvSpPr>
@@ -9298,7 +9505,7 @@
           <a:bodyPr wrap="square" rtlCol="0" anchor="ctr"/>
           <a:lstStyle/>
           <a:p>
-            <a:pPr indent="0" marL="0">
+            <a:pPr marL="0" indent="0">
               <a:buNone/>
             </a:pPr>
             <a:r>
@@ -9342,6 +9549,13 @@
             <a:prstDash val="solid"/>
           </a:ln>
         </p:spPr>
+        <p:txBody>
+          <a:bodyPr/>
+          <a:lstStyle/>
+          <a:p>
+            <a:endParaRPr lang="fr-FR"/>
+          </a:p>
+        </p:txBody>
       </p:sp>
       <p:sp>
         <p:nvSpPr>
@@ -9369,6 +9583,13 @@
             <a:prstDash val="solid"/>
           </a:ln>
         </p:spPr>
+        <p:txBody>
+          <a:bodyPr/>
+          <a:lstStyle/>
+          <a:p>
+            <a:endParaRPr lang="fr-FR"/>
+          </a:p>
+        </p:txBody>
       </p:sp>
       <p:sp>
         <p:nvSpPr>
@@ -9391,7 +9612,7 @@
           <a:bodyPr wrap="square" rtlCol="0" anchor="ctr"/>
           <a:lstStyle/>
           <a:p>
-            <a:pPr indent="0" marL="0">
+            <a:pPr marL="0" indent="0">
               <a:buNone/>
             </a:pPr>
             <a:r>
@@ -9430,7 +9651,7 @@
           <a:bodyPr wrap="square" rtlCol="0" anchor="ctr"/>
           <a:lstStyle/>
           <a:p>
-            <a:pPr indent="0" marL="0">
+            <a:pPr marL="0" indent="0">
               <a:buNone/>
             </a:pPr>
             <a:r>
@@ -9470,6 +9691,13 @@
             <a:prstDash val="solid"/>
           </a:ln>
         </p:spPr>
+        <p:txBody>
+          <a:bodyPr/>
+          <a:lstStyle/>
+          <a:p>
+            <a:endParaRPr lang="fr-FR"/>
+          </a:p>
+        </p:txBody>
       </p:sp>
       <p:sp>
         <p:nvSpPr>
@@ -9492,7 +9720,7 @@
           <a:bodyPr wrap="square" rtlCol="0" anchor="ctr"/>
           <a:lstStyle/>
           <a:p>
-            <a:pPr indent="0" marL="0">
+            <a:pPr marL="0" indent="0">
               <a:buNone/>
             </a:pPr>
             <a:r>
@@ -9536,6 +9764,13 @@
             <a:prstDash val="solid"/>
           </a:ln>
         </p:spPr>
+        <p:txBody>
+          <a:bodyPr/>
+          <a:lstStyle/>
+          <a:p>
+            <a:endParaRPr lang="fr-FR"/>
+          </a:p>
+        </p:txBody>
       </p:sp>
       <p:sp>
         <p:nvSpPr>
@@ -9563,6 +9798,13 @@
             <a:prstDash val="solid"/>
           </a:ln>
         </p:spPr>
+        <p:txBody>
+          <a:bodyPr/>
+          <a:lstStyle/>
+          <a:p>
+            <a:endParaRPr lang="fr-FR"/>
+          </a:p>
+        </p:txBody>
       </p:sp>
       <p:sp>
         <p:nvSpPr>
@@ -9585,7 +9827,7 @@
           <a:bodyPr wrap="square" rtlCol="0" anchor="ctr"/>
           <a:lstStyle/>
           <a:p>
-            <a:pPr indent="0" marL="0">
+            <a:pPr marL="0" indent="0">
               <a:buNone/>
             </a:pPr>
             <a:r>
@@ -9624,7 +9866,7 @@
           <a:bodyPr wrap="square" rtlCol="0" anchor="ctr"/>
           <a:lstStyle/>
           <a:p>
-            <a:pPr indent="0" marL="0">
+            <a:pPr marL="0" indent="0">
               <a:buNone/>
             </a:pPr>
             <a:r>
@@ -9664,6 +9906,13 @@
             <a:prstDash val="solid"/>
           </a:ln>
         </p:spPr>
+        <p:txBody>
+          <a:bodyPr/>
+          <a:lstStyle/>
+          <a:p>
+            <a:endParaRPr lang="fr-FR"/>
+          </a:p>
+        </p:txBody>
       </p:sp>
       <p:sp>
         <p:nvSpPr>
@@ -9686,7 +9935,7 @@
           <a:bodyPr wrap="square" rtlCol="0" anchor="ctr"/>
           <a:lstStyle/>
           <a:p>
-            <a:pPr indent="0" marL="0">
+            <a:pPr marL="0" indent="0">
               <a:buNone/>
             </a:pPr>
             <a:r>
@@ -9720,6 +9969,7 @@
         <a:solidFill>
           <a:srgbClr val="0F1117"/>
         </a:solidFill>
+        <a:effectLst/>
       </p:bgPr>
     </p:bg>
     <p:spTree>
@@ -9760,6 +10010,13 @@
             <a:prstDash val="solid"/>
           </a:ln>
         </p:spPr>
+        <p:txBody>
+          <a:bodyPr/>
+          <a:lstStyle/>
+          <a:p>
+            <a:endParaRPr lang="fr-FR"/>
+          </a:p>
+        </p:txBody>
       </p:sp>
       <p:sp>
         <p:nvSpPr>
@@ -9787,6 +10044,13 @@
             <a:prstDash val="solid"/>
           </a:ln>
         </p:spPr>
+        <p:txBody>
+          <a:bodyPr/>
+          <a:lstStyle/>
+          <a:p>
+            <a:endParaRPr lang="fr-FR"/>
+          </a:p>
+        </p:txBody>
       </p:sp>
       <p:sp>
         <p:nvSpPr>
@@ -9809,7 +10073,7 @@
           <a:bodyPr wrap="square" lIns="0" tIns="0" rIns="0" bIns="0" rtlCol="0" anchor="ctr"/>
           <a:lstStyle/>
           <a:p>
-            <a:pPr algn="ctr" indent="0" marL="0">
+            <a:pPr marL="0" indent="0" algn="ctr">
               <a:buNone/>
             </a:pPr>
             <a:r>
@@ -9845,7 +10109,7 @@
           <a:bodyPr wrap="square" rtlCol="0" anchor="ctr"/>
           <a:lstStyle/>
           <a:p>
-            <a:pPr indent="0" marL="0">
+            <a:pPr marL="0" indent="0">
               <a:buNone/>
             </a:pPr>
             <a:r>
@@ -9884,7 +10148,7 @@
           <a:bodyPr wrap="square" rtlCol="0" anchor="ctr"/>
           <a:lstStyle/>
           <a:p>
-            <a:pPr indent="0" marL="0">
+            <a:pPr marL="0" indent="0">
               <a:buNone/>
             </a:pPr>
             <a:r>
@@ -9928,6 +10192,13 @@
             <a:prstDash val="solid"/>
           </a:ln>
         </p:spPr>
+        <p:txBody>
+          <a:bodyPr/>
+          <a:lstStyle/>
+          <a:p>
+            <a:endParaRPr lang="fr-FR"/>
+          </a:p>
+        </p:txBody>
       </p:sp>
       <p:sp>
         <p:nvSpPr>
@@ -9950,7 +10221,7 @@
           <a:bodyPr wrap="square" rtlCol="0" anchor="ctr"/>
           <a:lstStyle/>
           <a:p>
-            <a:pPr indent="0" marL="0">
+            <a:pPr marL="0" indent="0">
               <a:buNone/>
             </a:pPr>
             <a:r>
@@ -9989,7 +10260,7 @@
           <a:bodyPr wrap="square" rtlCol="0" anchor="ctr"/>
           <a:lstStyle/>
           <a:p>
-            <a:pPr indent="0" marL="0">
+            <a:pPr marL="0" indent="0">
               <a:buNone/>
             </a:pPr>
             <a:r>
@@ -10033,6 +10304,13 @@
             <a:prstDash val="solid"/>
           </a:ln>
         </p:spPr>
+        <p:txBody>
+          <a:bodyPr/>
+          <a:lstStyle/>
+          <a:p>
+            <a:endParaRPr lang="fr-FR"/>
+          </a:p>
+        </p:txBody>
       </p:sp>
       <p:sp>
         <p:nvSpPr>
@@ -10055,7 +10333,7 @@
           <a:bodyPr wrap="square" rtlCol="0" anchor="ctr"/>
           <a:lstStyle/>
           <a:p>
-            <a:pPr indent="0" marL="0">
+            <a:pPr marL="0" indent="0">
               <a:buNone/>
             </a:pPr>
             <a:r>
@@ -10094,7 +10372,7 @@
           <a:bodyPr wrap="square" rtlCol="0" anchor="ctr"/>
           <a:lstStyle/>
           <a:p>
-            <a:pPr indent="0" marL="0">
+            <a:pPr marL="0" indent="0">
               <a:buNone/>
             </a:pPr>
             <a:r>
@@ -10133,11 +10411,11 @@
           <a:bodyPr wrap="square" rtlCol="0" anchor="ctr"/>
           <a:lstStyle/>
           <a:p>
-            <a:pPr indent="0" marL="0">
+            <a:pPr marL="0" indent="0">
               <a:buNone/>
             </a:pPr>
             <a:r>
-              <a:rPr lang="en-US" sz="800" b="1" spc="100" kern="0" dirty="0">
+              <a:rPr lang="en-US" sz="800" b="1" kern="0" spc="100" dirty="0">
                 <a:solidFill>
                   <a:srgbClr val="64748B"/>
                 </a:solidFill>
@@ -10177,6 +10455,13 @@
             <a:prstDash val="solid"/>
           </a:ln>
         </p:spPr>
+        <p:txBody>
+          <a:bodyPr/>
+          <a:lstStyle/>
+          <a:p>
+            <a:endParaRPr lang="fr-FR"/>
+          </a:p>
+        </p:txBody>
       </p:sp>
       <p:sp>
         <p:nvSpPr>
@@ -10199,7 +10484,7 @@
           <a:bodyPr wrap="square" rtlCol="0" anchor="ctr"/>
           <a:lstStyle/>
           <a:p>
-            <a:pPr algn="ctr" indent="0" marL="0">
+            <a:pPr marL="0" indent="0" algn="ctr">
               <a:buNone/>
             </a:pPr>
             <a:r>
@@ -10243,6 +10528,13 @@
             <a:prstDash val="solid"/>
           </a:ln>
         </p:spPr>
+        <p:txBody>
+          <a:bodyPr/>
+          <a:lstStyle/>
+          <a:p>
+            <a:endParaRPr lang="fr-FR"/>
+          </a:p>
+        </p:txBody>
       </p:sp>
       <p:sp>
         <p:nvSpPr>
@@ -10265,7 +10557,7 @@
           <a:bodyPr wrap="square" rtlCol="0" anchor="ctr"/>
           <a:lstStyle/>
           <a:p>
-            <a:pPr algn="ctr" indent="0" marL="0">
+            <a:pPr marL="0" indent="0" algn="ctr">
               <a:buNone/>
             </a:pPr>
             <a:r>
@@ -10309,6 +10601,13 @@
             <a:prstDash val="solid"/>
           </a:ln>
         </p:spPr>
+        <p:txBody>
+          <a:bodyPr/>
+          <a:lstStyle/>
+          <a:p>
+            <a:endParaRPr lang="fr-FR"/>
+          </a:p>
+        </p:txBody>
       </p:sp>
       <p:sp>
         <p:nvSpPr>
@@ -10331,7 +10630,7 @@
           <a:bodyPr wrap="square" rtlCol="0" anchor="ctr"/>
           <a:lstStyle/>
           <a:p>
-            <a:pPr algn="ctr" indent="0" marL="0">
+            <a:pPr marL="0" indent="0" algn="ctr">
               <a:buNone/>
             </a:pPr>
             <a:r>
@@ -10375,6 +10674,13 @@
             <a:prstDash val="solid"/>
           </a:ln>
         </p:spPr>
+        <p:txBody>
+          <a:bodyPr/>
+          <a:lstStyle/>
+          <a:p>
+            <a:endParaRPr lang="fr-FR"/>
+          </a:p>
+        </p:txBody>
       </p:sp>
       <p:sp>
         <p:nvSpPr>
@@ -10397,7 +10703,7 @@
           <a:bodyPr wrap="square" rtlCol="0" anchor="ctr"/>
           <a:lstStyle/>
           <a:p>
-            <a:pPr algn="ctr" indent="0" marL="0">
+            <a:pPr marL="0" indent="0" algn="ctr">
               <a:buNone/>
             </a:pPr>
             <a:r>
@@ -10441,6 +10747,13 @@
             <a:prstDash val="solid"/>
           </a:ln>
         </p:spPr>
+        <p:txBody>
+          <a:bodyPr/>
+          <a:lstStyle/>
+          <a:p>
+            <a:endParaRPr lang="fr-FR"/>
+          </a:p>
+        </p:txBody>
       </p:sp>
       <p:sp>
         <p:nvSpPr>
@@ -10463,7 +10776,7 @@
           <a:bodyPr wrap="square" rtlCol="0" anchor="ctr"/>
           <a:lstStyle/>
           <a:p>
-            <a:pPr algn="ctr" indent="0" marL="0">
+            <a:pPr marL="0" indent="0" algn="ctr">
               <a:buNone/>
             </a:pPr>
             <a:r>
@@ -10507,6 +10820,13 @@
             <a:prstDash val="solid"/>
           </a:ln>
         </p:spPr>
+        <p:txBody>
+          <a:bodyPr/>
+          <a:lstStyle/>
+          <a:p>
+            <a:endParaRPr lang="fr-FR"/>
+          </a:p>
+        </p:txBody>
       </p:sp>
       <p:sp>
         <p:nvSpPr>
@@ -10529,7 +10849,7 @@
           <a:bodyPr wrap="square" rtlCol="0" anchor="ctr"/>
           <a:lstStyle/>
           <a:p>
-            <a:pPr algn="ctr" indent="0" marL="0">
+            <a:pPr marL="0" indent="0" algn="ctr">
               <a:buNone/>
             </a:pPr>
             <a:r>
@@ -10573,6 +10893,13 @@
             <a:prstDash val="solid"/>
           </a:ln>
         </p:spPr>
+        <p:txBody>
+          <a:bodyPr/>
+          <a:lstStyle/>
+          <a:p>
+            <a:endParaRPr lang="fr-FR"/>
+          </a:p>
+        </p:txBody>
       </p:sp>
       <p:sp>
         <p:nvSpPr>
@@ -10595,7 +10922,7 @@
           <a:bodyPr wrap="square" rtlCol="0" anchor="ctr"/>
           <a:lstStyle/>
           <a:p>
-            <a:pPr algn="ctr" indent="0" marL="0">
+            <a:pPr marL="0" indent="0" algn="ctr">
               <a:buNone/>
             </a:pPr>
             <a:r>
@@ -10639,6 +10966,13 @@
             <a:prstDash val="solid"/>
           </a:ln>
         </p:spPr>
+        <p:txBody>
+          <a:bodyPr/>
+          <a:lstStyle/>
+          <a:p>
+            <a:endParaRPr lang="fr-FR"/>
+          </a:p>
+        </p:txBody>
       </p:sp>
       <p:sp>
         <p:nvSpPr>
@@ -10661,7 +10995,7 @@
           <a:bodyPr wrap="square" rtlCol="0" anchor="ctr"/>
           <a:lstStyle/>
           <a:p>
-            <a:pPr algn="ctr" indent="0" marL="0">
+            <a:pPr marL="0" indent="0" algn="ctr">
               <a:buNone/>
             </a:pPr>
             <a:r>
@@ -10681,7 +11015,7 @@
       </p:sp>
       <p:graphicFrame>
         <p:nvGraphicFramePr>
-          <p:cNvPr id="3" name="Table 0"/>
+          <p:cNvPr id="30" name="Table 0"/>
           <p:cNvGraphicFramePr>
             <a:graphicFrameLocks noGrp="1"/>
           </p:cNvGraphicFramePr>
@@ -10695,15 +11029,27 @@
         </p:nvGraphicFramePr>
         <p:xfrm>
           <a:off x="4846320" y="749808"/>
-          <a:ext cx="3977640" cy="4114800"/>
+          <a:ext cx="3977640" cy="2139696"/>
         </p:xfrm>
         <a:graphic>
           <a:graphicData uri="http://schemas.openxmlformats.org/drawingml/2006/table">
             <a:tbl>
               <a:tblPr/>
               <a:tblGrid>
-                <a:gridCol w="1645920"/>
-                <a:gridCol w="2331720"/>
+                <a:gridCol w="1645920">
+                  <a:extLst>
+                    <a:ext uri="{9D8B030D-6E8A-4147-A177-3AD203B41FA5}">
+                      <a16:colId xmlns:a16="http://schemas.microsoft.com/office/drawing/2014/main" val="20000"/>
+                    </a:ext>
+                  </a:extLst>
+                </a:gridCol>
+                <a:gridCol w="2331720">
+                  <a:extLst>
+                    <a:ext uri="{9D8B030D-6E8A-4147-A177-3AD203B41FA5}">
+                      <a16:colId xmlns:a16="http://schemas.microsoft.com/office/drawing/2014/main" val="20001"/>
+                    </a:ext>
+                  </a:extLst>
+                </a:gridCol>
               </a:tblGrid>
               <a:tr h="237744">
                 <a:tc>
@@ -10711,7 +11057,7 @@
                     <a:bodyPr/>
                     <a:lstStyle/>
                     <a:p>
-                      <a:pPr algn="l" indent="0" marL="0">
+                      <a:pPr marL="0" indent="0" algn="l">
                         <a:buNone/>
                       </a:pPr>
                       <a:r>
@@ -10732,7 +11078,7 @@
                       </a:endParaRPr>
                     </a:p>
                   </a:txBody>
-                  <a:tcPr marL="91440" marR="91440" marT="45720" marB="45720" anchor="ctr">
+                  <a:tcPr anchor="ctr">
                     <a:lnL w="6350" cap="flat" cmpd="sng" algn="ctr">
                       <a:solidFill>
                         <a:srgbClr val="2E3250"/>
@@ -10779,7 +11125,7 @@
                     <a:bodyPr/>
                     <a:lstStyle/>
                     <a:p>
-                      <a:pPr algn="l" indent="0" marL="0">
+                      <a:pPr marL="0" indent="0" algn="l">
                         <a:buNone/>
                       </a:pPr>
                       <a:r>
@@ -10800,7 +11146,7 @@
                       </a:endParaRPr>
                     </a:p>
                   </a:txBody>
-                  <a:tcPr marL="91440" marR="91440" marT="45720" marB="45720" anchor="ctr">
+                  <a:tcPr anchor="ctr">
                     <a:lnL w="6350" cap="flat" cmpd="sng" algn="ctr">
                       <a:solidFill>
                         <a:srgbClr val="2E3250"/>
@@ -10842,6 +11188,11 @@
                     </a:solidFill>
                   </a:tcPr>
                 </a:tc>
+                <a:extLst>
+                  <a:ext uri="{0D108BD9-81ED-4DB2-BD59-A6C34878D82A}">
+                    <a16:rowId xmlns:a16="http://schemas.microsoft.com/office/drawing/2014/main" val="10000"/>
+                  </a:ext>
+                </a:extLst>
               </a:tr>
               <a:tr h="237744">
                 <a:tc>
@@ -10849,7 +11200,7 @@
                     <a:bodyPr/>
                     <a:lstStyle/>
                     <a:p>
-                      <a:pPr algn="l" indent="0" marL="0">
+                      <a:pPr marL="0" indent="0" algn="l">
                         <a:buNone/>
                       </a:pPr>
                       <a:r>
@@ -10870,7 +11221,7 @@
                       </a:endParaRPr>
                     </a:p>
                   </a:txBody>
-                  <a:tcPr marL="91440" marR="91440" marT="45720" marB="45720" anchor="ctr">
+                  <a:tcPr anchor="ctr">
                     <a:lnL w="6350" cap="flat" cmpd="sng" algn="ctr">
                       <a:solidFill>
                         <a:srgbClr val="2E3250"/>
@@ -10917,7 +11268,7 @@
                     <a:bodyPr/>
                     <a:lstStyle/>
                     <a:p>
-                      <a:pPr algn="l" indent="0" marL="0">
+                      <a:pPr marL="0" indent="0" algn="l">
                         <a:buNone/>
                       </a:pPr>
                       <a:r>
@@ -10938,7 +11289,7 @@
                       </a:endParaRPr>
                     </a:p>
                   </a:txBody>
-                  <a:tcPr marL="91440" marR="91440" marT="45720" marB="45720" anchor="ctr">
+                  <a:tcPr anchor="ctr">
                     <a:lnL w="6350" cap="flat" cmpd="sng" algn="ctr">
                       <a:solidFill>
                         <a:srgbClr val="2E3250"/>
@@ -10980,6 +11331,11 @@
                     </a:solidFill>
                   </a:tcPr>
                 </a:tc>
+                <a:extLst>
+                  <a:ext uri="{0D108BD9-81ED-4DB2-BD59-A6C34878D82A}">
+                    <a16:rowId xmlns:a16="http://schemas.microsoft.com/office/drawing/2014/main" val="10001"/>
+                  </a:ext>
+                </a:extLst>
               </a:tr>
               <a:tr h="237744">
                 <a:tc>
@@ -10987,7 +11343,7 @@
                     <a:bodyPr/>
                     <a:lstStyle/>
                     <a:p>
-                      <a:pPr algn="l" indent="0" marL="0">
+                      <a:pPr marL="0" indent="0" algn="l">
                         <a:buNone/>
                       </a:pPr>
                       <a:r>
@@ -11008,7 +11364,7 @@
                       </a:endParaRPr>
                     </a:p>
                   </a:txBody>
-                  <a:tcPr marL="91440" marR="91440" marT="45720" marB="45720" anchor="ctr">
+                  <a:tcPr anchor="ctr">
                     <a:lnL w="6350" cap="flat" cmpd="sng" algn="ctr">
                       <a:solidFill>
                         <a:srgbClr val="2E3250"/>
@@ -11055,7 +11411,7 @@
                     <a:bodyPr/>
                     <a:lstStyle/>
                     <a:p>
-                      <a:pPr algn="l" indent="0" marL="0">
+                      <a:pPr marL="0" indent="0" algn="l">
                         <a:buNone/>
                       </a:pPr>
                       <a:r>
@@ -11076,7 +11432,7 @@
                       </a:endParaRPr>
                     </a:p>
                   </a:txBody>
-                  <a:tcPr marL="91440" marR="91440" marT="45720" marB="45720" anchor="ctr">
+                  <a:tcPr anchor="ctr">
                     <a:lnL w="6350" cap="flat" cmpd="sng" algn="ctr">
                       <a:solidFill>
                         <a:srgbClr val="2E3250"/>
@@ -11118,6 +11474,11 @@
                     </a:solidFill>
                   </a:tcPr>
                 </a:tc>
+                <a:extLst>
+                  <a:ext uri="{0D108BD9-81ED-4DB2-BD59-A6C34878D82A}">
+                    <a16:rowId xmlns:a16="http://schemas.microsoft.com/office/drawing/2014/main" val="10002"/>
+                  </a:ext>
+                </a:extLst>
               </a:tr>
               <a:tr h="237744">
                 <a:tc>
@@ -11125,7 +11486,7 @@
                     <a:bodyPr/>
                     <a:lstStyle/>
                     <a:p>
-                      <a:pPr algn="l" indent="0" marL="0">
+                      <a:pPr marL="0" indent="0" algn="l">
                         <a:buNone/>
                       </a:pPr>
                       <a:r>
@@ -11146,7 +11507,7 @@
                       </a:endParaRPr>
                     </a:p>
                   </a:txBody>
-                  <a:tcPr marL="91440" marR="91440" marT="45720" marB="45720" anchor="ctr">
+                  <a:tcPr anchor="ctr">
                     <a:lnL w="6350" cap="flat" cmpd="sng" algn="ctr">
                       <a:solidFill>
                         <a:srgbClr val="2E3250"/>
@@ -11193,7 +11554,7 @@
                     <a:bodyPr/>
                     <a:lstStyle/>
                     <a:p>
-                      <a:pPr algn="l" indent="0" marL="0">
+                      <a:pPr marL="0" indent="0" algn="l">
                         <a:buNone/>
                       </a:pPr>
                       <a:r>
@@ -11214,7 +11575,7 @@
                       </a:endParaRPr>
                     </a:p>
                   </a:txBody>
-                  <a:tcPr marL="91440" marR="91440" marT="45720" marB="45720" anchor="ctr">
+                  <a:tcPr anchor="ctr">
                     <a:lnL w="6350" cap="flat" cmpd="sng" algn="ctr">
                       <a:solidFill>
                         <a:srgbClr val="2E3250"/>
@@ -11256,6 +11617,11 @@
                     </a:solidFill>
                   </a:tcPr>
                 </a:tc>
+                <a:extLst>
+                  <a:ext uri="{0D108BD9-81ED-4DB2-BD59-A6C34878D82A}">
+                    <a16:rowId xmlns:a16="http://schemas.microsoft.com/office/drawing/2014/main" val="10003"/>
+                  </a:ext>
+                </a:extLst>
               </a:tr>
               <a:tr h="237744">
                 <a:tc>
@@ -11263,7 +11629,7 @@
                     <a:bodyPr/>
                     <a:lstStyle/>
                     <a:p>
-                      <a:pPr algn="l" indent="0" marL="0">
+                      <a:pPr marL="0" indent="0" algn="l">
                         <a:buNone/>
                       </a:pPr>
                       <a:r>
@@ -11284,7 +11650,7 @@
                       </a:endParaRPr>
                     </a:p>
                   </a:txBody>
-                  <a:tcPr marL="91440" marR="91440" marT="45720" marB="45720" anchor="ctr">
+                  <a:tcPr anchor="ctr">
                     <a:lnL w="6350" cap="flat" cmpd="sng" algn="ctr">
                       <a:solidFill>
                         <a:srgbClr val="2E3250"/>
@@ -11331,7 +11697,7 @@
                     <a:bodyPr/>
                     <a:lstStyle/>
                     <a:p>
-                      <a:pPr algn="l" indent="0" marL="0">
+                      <a:pPr marL="0" indent="0" algn="l">
                         <a:buNone/>
                       </a:pPr>
                       <a:r>
@@ -11352,7 +11718,7 @@
                       </a:endParaRPr>
                     </a:p>
                   </a:txBody>
-                  <a:tcPr marL="91440" marR="91440" marT="45720" marB="45720" anchor="ctr">
+                  <a:tcPr anchor="ctr">
                     <a:lnL w="6350" cap="flat" cmpd="sng" algn="ctr">
                       <a:solidFill>
                         <a:srgbClr val="2E3250"/>
@@ -11394,6 +11760,11 @@
                     </a:solidFill>
                   </a:tcPr>
                 </a:tc>
+                <a:extLst>
+                  <a:ext uri="{0D108BD9-81ED-4DB2-BD59-A6C34878D82A}">
+                    <a16:rowId xmlns:a16="http://schemas.microsoft.com/office/drawing/2014/main" val="10004"/>
+                  </a:ext>
+                </a:extLst>
               </a:tr>
               <a:tr h="237744">
                 <a:tc>
@@ -11401,7 +11772,7 @@
                     <a:bodyPr/>
                     <a:lstStyle/>
                     <a:p>
-                      <a:pPr algn="l" indent="0" marL="0">
+                      <a:pPr marL="0" indent="0" algn="l">
                         <a:buNone/>
                       </a:pPr>
                       <a:r>
@@ -11422,7 +11793,7 @@
                       </a:endParaRPr>
                     </a:p>
                   </a:txBody>
-                  <a:tcPr marL="91440" marR="91440" marT="45720" marB="45720" anchor="ctr">
+                  <a:tcPr anchor="ctr">
                     <a:lnL w="6350" cap="flat" cmpd="sng" algn="ctr">
                       <a:solidFill>
                         <a:srgbClr val="2E3250"/>
@@ -11469,7 +11840,7 @@
                     <a:bodyPr/>
                     <a:lstStyle/>
                     <a:p>
-                      <a:pPr algn="l" indent="0" marL="0">
+                      <a:pPr marL="0" indent="0" algn="l">
                         <a:buNone/>
                       </a:pPr>
                       <a:r>
@@ -11490,7 +11861,7 @@
                       </a:endParaRPr>
                     </a:p>
                   </a:txBody>
-                  <a:tcPr marL="91440" marR="91440" marT="45720" marB="45720" anchor="ctr">
+                  <a:tcPr anchor="ctr">
                     <a:lnL w="6350" cap="flat" cmpd="sng" algn="ctr">
                       <a:solidFill>
                         <a:srgbClr val="2E3250"/>
@@ -11532,6 +11903,11 @@
                     </a:solidFill>
                   </a:tcPr>
                 </a:tc>
+                <a:extLst>
+                  <a:ext uri="{0D108BD9-81ED-4DB2-BD59-A6C34878D82A}">
+                    <a16:rowId xmlns:a16="http://schemas.microsoft.com/office/drawing/2014/main" val="10005"/>
+                  </a:ext>
+                </a:extLst>
               </a:tr>
               <a:tr h="237744">
                 <a:tc>
@@ -11539,7 +11915,7 @@
                     <a:bodyPr/>
                     <a:lstStyle/>
                     <a:p>
-                      <a:pPr algn="l" indent="0" marL="0">
+                      <a:pPr marL="0" indent="0" algn="l">
                         <a:buNone/>
                       </a:pPr>
                       <a:r>
@@ -11560,7 +11936,7 @@
                       </a:endParaRPr>
                     </a:p>
                   </a:txBody>
-                  <a:tcPr marL="91440" marR="91440" marT="45720" marB="45720" anchor="ctr">
+                  <a:tcPr anchor="ctr">
                     <a:lnL w="6350" cap="flat" cmpd="sng" algn="ctr">
                       <a:solidFill>
                         <a:srgbClr val="2E3250"/>
@@ -11607,7 +11983,7 @@
                     <a:bodyPr/>
                     <a:lstStyle/>
                     <a:p>
-                      <a:pPr indent="0" marL="0">
+                      <a:pPr marL="0" indent="0">
                         <a:buNone/>
                       </a:pPr>
                       <a:r>
@@ -11628,7 +12004,7 @@
                       </a:endParaRPr>
                     </a:p>
                   </a:txBody>
-                  <a:tcPr marL="91440" marR="91440" marT="45720" marB="45720" anchor="ctr">
+                  <a:tcPr anchor="ctr">
                     <a:lnL w="6350" cap="flat" cmpd="sng" algn="ctr">
                       <a:solidFill>
                         <a:srgbClr val="2E3250"/>
@@ -11670,6 +12046,11 @@
                     </a:solidFill>
                   </a:tcPr>
                 </a:tc>
+                <a:extLst>
+                  <a:ext uri="{0D108BD9-81ED-4DB2-BD59-A6C34878D82A}">
+                    <a16:rowId xmlns:a16="http://schemas.microsoft.com/office/drawing/2014/main" val="10006"/>
+                  </a:ext>
+                </a:extLst>
               </a:tr>
               <a:tr h="237744">
                 <a:tc>
@@ -11677,7 +12058,7 @@
                     <a:bodyPr/>
                     <a:lstStyle/>
                     <a:p>
-                      <a:pPr algn="l" indent="0" marL="0">
+                      <a:pPr marL="0" indent="0" algn="l">
                         <a:buNone/>
                       </a:pPr>
                       <a:r>
@@ -11698,7 +12079,7 @@
                       </a:endParaRPr>
                     </a:p>
                   </a:txBody>
-                  <a:tcPr marL="91440" marR="91440" marT="45720" marB="45720" anchor="ctr">
+                  <a:tcPr anchor="ctr">
                     <a:lnL w="6350" cap="flat" cmpd="sng" algn="ctr">
                       <a:solidFill>
                         <a:srgbClr val="2E3250"/>
@@ -11745,7 +12126,7 @@
                     <a:bodyPr/>
                     <a:lstStyle/>
                     <a:p>
-                      <a:pPr algn="l" indent="0" marL="0">
+                      <a:pPr marL="0" indent="0" algn="l">
                         <a:buNone/>
                       </a:pPr>
                       <a:r>
@@ -11766,7 +12147,7 @@
                       </a:endParaRPr>
                     </a:p>
                   </a:txBody>
-                  <a:tcPr marL="91440" marR="91440" marT="45720" marB="45720" anchor="ctr">
+                  <a:tcPr anchor="ctr">
                     <a:lnL w="6350" cap="flat" cmpd="sng" algn="ctr">
                       <a:solidFill>
                         <a:srgbClr val="2E3250"/>
@@ -11808,6 +12189,11 @@
                     </a:solidFill>
                   </a:tcPr>
                 </a:tc>
+                <a:extLst>
+                  <a:ext uri="{0D108BD9-81ED-4DB2-BD59-A6C34878D82A}">
+                    <a16:rowId xmlns:a16="http://schemas.microsoft.com/office/drawing/2014/main" val="10007"/>
+                  </a:ext>
+                </a:extLst>
               </a:tr>
               <a:tr h="237744">
                 <a:tc>
@@ -11815,7 +12201,7 @@
                     <a:bodyPr/>
                     <a:lstStyle/>
                     <a:p>
-                      <a:pPr algn="l" indent="0" marL="0">
+                      <a:pPr marL="0" indent="0" algn="l">
                         <a:buNone/>
                       </a:pPr>
                       <a:r>
@@ -11836,7 +12222,7 @@
                       </a:endParaRPr>
                     </a:p>
                   </a:txBody>
-                  <a:tcPr marL="91440" marR="91440" marT="45720" marB="45720" anchor="ctr">
+                  <a:tcPr anchor="ctr">
                     <a:lnL w="6350" cap="flat" cmpd="sng" algn="ctr">
                       <a:solidFill>
                         <a:srgbClr val="2E3250"/>
@@ -11883,7 +12269,7 @@
                     <a:bodyPr/>
                     <a:lstStyle/>
                     <a:p>
-                      <a:pPr indent="0" marL="0">
+                      <a:pPr marL="0" indent="0">
                         <a:buNone/>
                       </a:pPr>
                       <a:r>
@@ -11904,7 +12290,7 @@
                       </a:endParaRPr>
                     </a:p>
                   </a:txBody>
-                  <a:tcPr marL="91440" marR="91440" marT="45720" marB="45720" anchor="ctr">
+                  <a:tcPr anchor="ctr">
                     <a:lnL w="6350" cap="flat" cmpd="sng" algn="ctr">
                       <a:solidFill>
                         <a:srgbClr val="2E3250"/>
@@ -11946,6 +12332,11 @@
                     </a:solidFill>
                   </a:tcPr>
                 </a:tc>
+                <a:extLst>
+                  <a:ext uri="{0D108BD9-81ED-4DB2-BD59-A6C34878D82A}">
+                    <a16:rowId xmlns:a16="http://schemas.microsoft.com/office/drawing/2014/main" val="10008"/>
+                  </a:ext>
+                </a:extLst>
               </a:tr>
             </a:tbl>
           </a:graphicData>
@@ -11967,6 +12358,7 @@
         <a:solidFill>
           <a:srgbClr val="0F1117"/>
         </a:solidFill>
+        <a:effectLst/>
       </p:bgPr>
     </p:bg>
     <p:spTree>
@@ -12007,6 +12399,13 @@
             <a:prstDash val="solid"/>
           </a:ln>
         </p:spPr>
+        <p:txBody>
+          <a:bodyPr/>
+          <a:lstStyle/>
+          <a:p>
+            <a:endParaRPr lang="fr-FR"/>
+          </a:p>
+        </p:txBody>
       </p:sp>
       <p:sp>
         <p:nvSpPr>
@@ -12034,6 +12433,13 @@
             <a:prstDash val="solid"/>
           </a:ln>
         </p:spPr>
+        <p:txBody>
+          <a:bodyPr/>
+          <a:lstStyle/>
+          <a:p>
+            <a:endParaRPr lang="fr-FR"/>
+          </a:p>
+        </p:txBody>
       </p:sp>
       <p:sp>
         <p:nvSpPr>
@@ -12056,7 +12462,7 @@
           <a:bodyPr wrap="square" lIns="0" tIns="0" rIns="0" bIns="0" rtlCol="0" anchor="ctr"/>
           <a:lstStyle/>
           <a:p>
-            <a:pPr algn="ctr" indent="0" marL="0">
+            <a:pPr marL="0" indent="0" algn="ctr">
               <a:buNone/>
             </a:pPr>
             <a:r>
@@ -12092,7 +12498,7 @@
           <a:bodyPr wrap="square" rtlCol="0" anchor="ctr"/>
           <a:lstStyle/>
           <a:p>
-            <a:pPr indent="0" marL="0">
+            <a:pPr marL="0" indent="0">
               <a:buNone/>
             </a:pPr>
             <a:r>
@@ -12136,6 +12542,13 @@
             <a:prstDash val="solid"/>
           </a:ln>
         </p:spPr>
+        <p:txBody>
+          <a:bodyPr/>
+          <a:lstStyle/>
+          <a:p>
+            <a:endParaRPr lang="fr-FR"/>
+          </a:p>
+        </p:txBody>
       </p:sp>
       <p:sp>
         <p:nvSpPr>
@@ -12158,7 +12571,7 @@
           <a:bodyPr wrap="square" rtlCol="0" anchor="ctr"/>
           <a:lstStyle/>
           <a:p>
-            <a:pPr indent="0" marL="0">
+            <a:pPr marL="0" indent="0">
               <a:buNone/>
             </a:pPr>
             <a:r>
@@ -12197,7 +12610,7 @@
           <a:bodyPr wrap="square" rtlCol="0" anchor="ctr"/>
           <a:lstStyle/>
           <a:p>
-            <a:pPr indent="0" marL="0">
+            <a:pPr marL="0" indent="0">
               <a:buNone/>
             </a:pPr>
             <a:r>
@@ -12239,6 +12652,13 @@
             <a:prstDash val="solid"/>
           </a:ln>
         </p:spPr>
+        <p:txBody>
+          <a:bodyPr/>
+          <a:lstStyle/>
+          <a:p>
+            <a:endParaRPr lang="fr-FR"/>
+          </a:p>
+        </p:txBody>
       </p:sp>
       <p:sp>
         <p:nvSpPr>
@@ -12261,7 +12681,7 @@
           <a:bodyPr wrap="square" rtlCol="0" anchor="ctr"/>
           <a:lstStyle/>
           <a:p>
-            <a:pPr algn="ctr" indent="0" marL="0">
+            <a:pPr marL="0" indent="0" algn="ctr">
               <a:buNone/>
             </a:pPr>
             <a:r>
@@ -12278,7 +12698,7 @@
             <a:endParaRPr lang="en-US" sz="1100" dirty="0"/>
           </a:p>
           <a:p>
-            <a:pPr algn="ctr" indent="0" marL="0">
+            <a:pPr marL="0" indent="0" algn="ctr">
               <a:buNone/>
             </a:pPr>
             <a:r>
@@ -12319,6 +12739,13 @@
             <a:tailEnd type="arrow"/>
           </a:ln>
         </p:spPr>
+        <p:txBody>
+          <a:bodyPr/>
+          <a:lstStyle/>
+          <a:p>
+            <a:endParaRPr lang="fr-FR"/>
+          </a:p>
+        </p:txBody>
       </p:sp>
       <p:sp>
         <p:nvSpPr>
@@ -12346,6 +12773,13 @@
             <a:prstDash val="solid"/>
           </a:ln>
         </p:spPr>
+        <p:txBody>
+          <a:bodyPr/>
+          <a:lstStyle/>
+          <a:p>
+            <a:endParaRPr lang="fr-FR"/>
+          </a:p>
+        </p:txBody>
       </p:sp>
       <p:sp>
         <p:nvSpPr>
@@ -12368,7 +12802,7 @@
           <a:bodyPr wrap="square" rtlCol="0" anchor="ctr"/>
           <a:lstStyle/>
           <a:p>
-            <a:pPr algn="ctr" indent="0" marL="0">
+            <a:pPr marL="0" indent="0" algn="ctr">
               <a:buNone/>
             </a:pPr>
             <a:r>
@@ -12407,7 +12841,7 @@
           <a:bodyPr wrap="square" rtlCol="0" anchor="ctr"/>
           <a:lstStyle/>
           <a:p>
-            <a:pPr algn="ctr" indent="0" marL="0">
+            <a:pPr marL="0" indent="0" algn="ctr">
               <a:buNone/>
             </a:pPr>
             <a:r>
@@ -12451,6 +12885,13 @@
             <a:prstDash val="solid"/>
           </a:ln>
         </p:spPr>
+        <p:txBody>
+          <a:bodyPr/>
+          <a:lstStyle/>
+          <a:p>
+            <a:endParaRPr lang="fr-FR"/>
+          </a:p>
+        </p:txBody>
       </p:sp>
       <p:sp>
         <p:nvSpPr>
@@ -12473,7 +12914,7 @@
           <a:bodyPr wrap="square" rtlCol="0" anchor="ctr"/>
           <a:lstStyle/>
           <a:p>
-            <a:pPr algn="ctr" indent="0" marL="0">
+            <a:pPr marL="0" indent="0" algn="ctr">
               <a:buNone/>
             </a:pPr>
             <a:r>
@@ -12517,6 +12958,13 @@
             <a:prstDash val="solid"/>
           </a:ln>
         </p:spPr>
+        <p:txBody>
+          <a:bodyPr/>
+          <a:lstStyle/>
+          <a:p>
+            <a:endParaRPr lang="fr-FR"/>
+          </a:p>
+        </p:txBody>
       </p:sp>
       <p:sp>
         <p:nvSpPr>
@@ -12539,7 +12987,7 @@
           <a:bodyPr wrap="square" rtlCol="0" anchor="ctr"/>
           <a:lstStyle/>
           <a:p>
-            <a:pPr algn="ctr" indent="0" marL="0">
+            <a:pPr marL="0" indent="0" algn="ctr">
               <a:buNone/>
             </a:pPr>
             <a:r>
@@ -12583,6 +13031,13 @@
             <a:prstDash val="solid"/>
           </a:ln>
         </p:spPr>
+        <p:txBody>
+          <a:bodyPr/>
+          <a:lstStyle/>
+          <a:p>
+            <a:endParaRPr lang="fr-FR"/>
+          </a:p>
+        </p:txBody>
       </p:sp>
       <p:sp>
         <p:nvSpPr>
@@ -12605,7 +13060,7 @@
           <a:bodyPr wrap="square" rtlCol="0" anchor="ctr"/>
           <a:lstStyle/>
           <a:p>
-            <a:pPr algn="ctr" indent="0" marL="0">
+            <a:pPr marL="0" indent="0" algn="ctr">
               <a:buNone/>
             </a:pPr>
             <a:r>
@@ -12649,6 +13104,13 @@
             <a:prstDash val="solid"/>
           </a:ln>
         </p:spPr>
+        <p:txBody>
+          <a:bodyPr/>
+          <a:lstStyle/>
+          <a:p>
+            <a:endParaRPr lang="fr-FR"/>
+          </a:p>
+        </p:txBody>
       </p:sp>
       <p:sp>
         <p:nvSpPr>
@@ -12671,7 +13133,7 @@
           <a:bodyPr wrap="square" rtlCol="0" anchor="ctr"/>
           <a:lstStyle/>
           <a:p>
-            <a:pPr algn="ctr" indent="0" marL="0">
+            <a:pPr marL="0" indent="0" algn="ctr">
               <a:buNone/>
             </a:pPr>
             <a:r>
@@ -12712,6 +13174,13 @@
             <a:tailEnd type="arrow"/>
           </a:ln>
         </p:spPr>
+        <p:txBody>
+          <a:bodyPr/>
+          <a:lstStyle/>
+          <a:p>
+            <a:endParaRPr lang="fr-FR"/>
+          </a:p>
+        </p:txBody>
       </p:sp>
       <p:sp>
         <p:nvSpPr>
@@ -12734,7 +13203,7 @@
           <a:bodyPr wrap="square" rtlCol="0" anchor="ctr"/>
           <a:lstStyle/>
           <a:p>
-            <a:pPr algn="ctr" indent="0" marL="0">
+            <a:pPr marL="0" indent="0" algn="ctr">
               <a:buNone/>
             </a:pPr>
             <a:r>
@@ -12751,7 +13220,7 @@
             <a:endParaRPr lang="en-US" sz="800" dirty="0"/>
           </a:p>
           <a:p>
-            <a:pPr algn="ctr" indent="0" marL="0">
+            <a:pPr marL="0" indent="0" algn="ctr">
               <a:buNone/>
             </a:pPr>
             <a:r>
@@ -12795,6 +13264,13 @@
             <a:prstDash val="solid"/>
           </a:ln>
         </p:spPr>
+        <p:txBody>
+          <a:bodyPr/>
+          <a:lstStyle/>
+          <a:p>
+            <a:endParaRPr lang="fr-FR"/>
+          </a:p>
+        </p:txBody>
       </p:sp>
       <p:sp>
         <p:nvSpPr>
@@ -12817,7 +13293,7 @@
           <a:bodyPr wrap="square" rtlCol="0" anchor="ctr"/>
           <a:lstStyle/>
           <a:p>
-            <a:pPr algn="ctr" indent="0" marL="0">
+            <a:pPr marL="0" indent="0" algn="ctr">
               <a:buNone/>
             </a:pPr>
             <a:r>
@@ -12856,7 +13332,7 @@
           <a:bodyPr wrap="square" rtlCol="0" anchor="ctr"/>
           <a:lstStyle/>
           <a:p>
-            <a:pPr algn="ctr" indent="0" marL="0">
+            <a:pPr marL="0" indent="0" algn="ctr">
               <a:buNone/>
             </a:pPr>
             <a:r>
@@ -12900,6 +13376,13 @@
             <a:prstDash val="solid"/>
           </a:ln>
         </p:spPr>
+        <p:txBody>
+          <a:bodyPr/>
+          <a:lstStyle/>
+          <a:p>
+            <a:endParaRPr lang="fr-FR"/>
+          </a:p>
+        </p:txBody>
       </p:sp>
       <p:sp>
         <p:nvSpPr>
@@ -12922,7 +13405,7 @@
           <a:bodyPr wrap="square" rtlCol="0" anchor="ctr"/>
           <a:lstStyle/>
           <a:p>
-            <a:pPr algn="ctr" indent="0" marL="0">
+            <a:pPr marL="0" indent="0" algn="ctr">
               <a:buNone/>
             </a:pPr>
             <a:r>
@@ -12966,6 +13449,13 @@
             <a:prstDash val="solid"/>
           </a:ln>
         </p:spPr>
+        <p:txBody>
+          <a:bodyPr/>
+          <a:lstStyle/>
+          <a:p>
+            <a:endParaRPr lang="fr-FR"/>
+          </a:p>
+        </p:txBody>
       </p:sp>
       <p:sp>
         <p:nvSpPr>
@@ -12988,7 +13478,7 @@
           <a:bodyPr wrap="square" rtlCol="0" anchor="ctr"/>
           <a:lstStyle/>
           <a:p>
-            <a:pPr algn="ctr" indent="0" marL="0">
+            <a:pPr marL="0" indent="0" algn="ctr">
               <a:buNone/>
             </a:pPr>
             <a:r>
@@ -13032,6 +13522,13 @@
             <a:prstDash val="solid"/>
           </a:ln>
         </p:spPr>
+        <p:txBody>
+          <a:bodyPr/>
+          <a:lstStyle/>
+          <a:p>
+            <a:endParaRPr lang="fr-FR"/>
+          </a:p>
+        </p:txBody>
       </p:sp>
       <p:sp>
         <p:nvSpPr>
@@ -13054,7 +13551,7 @@
           <a:bodyPr wrap="square" rtlCol="0" anchor="ctr"/>
           <a:lstStyle/>
           <a:p>
-            <a:pPr algn="ctr" indent="0" marL="0">
+            <a:pPr marL="0" indent="0" algn="ctr">
               <a:buNone/>
             </a:pPr>
             <a:r>
@@ -13098,6 +13595,13 @@
             <a:prstDash val="solid"/>
           </a:ln>
         </p:spPr>
+        <p:txBody>
+          <a:bodyPr/>
+          <a:lstStyle/>
+          <a:p>
+            <a:endParaRPr lang="fr-FR"/>
+          </a:p>
+        </p:txBody>
       </p:sp>
       <p:sp>
         <p:nvSpPr>
@@ -13120,7 +13624,7 @@
           <a:bodyPr wrap="square" rtlCol="0" anchor="ctr"/>
           <a:lstStyle/>
           <a:p>
-            <a:pPr algn="ctr" indent="0" marL="0">
+            <a:pPr marL="0" indent="0" algn="ctr">
               <a:buNone/>
             </a:pPr>
             <a:r>
@@ -13164,6 +13668,13 @@
             <a:prstDash val="solid"/>
           </a:ln>
         </p:spPr>
+        <p:txBody>
+          <a:bodyPr/>
+          <a:lstStyle/>
+          <a:p>
+            <a:endParaRPr lang="fr-FR"/>
+          </a:p>
+        </p:txBody>
       </p:sp>
       <p:sp>
         <p:nvSpPr>
@@ -13186,7 +13697,7 @@
           <a:bodyPr wrap="square" rtlCol="0" anchor="ctr"/>
           <a:lstStyle/>
           <a:p>
-            <a:pPr algn="ctr" indent="0" marL="0">
+            <a:pPr marL="0" indent="0" algn="ctr">
               <a:buNone/>
             </a:pPr>
             <a:r>
@@ -13203,7 +13714,7 @@
             <a:endParaRPr lang="en-US" sz="1000" dirty="0"/>
           </a:p>
           <a:p>
-            <a:pPr algn="ctr" indent="0" marL="0">
+            <a:pPr marL="0" indent="0" algn="ctr">
               <a:buNone/>
             </a:pPr>
             <a:r>
@@ -13247,6 +13758,13 @@
             <a:prstDash val="solid"/>
           </a:ln>
         </p:spPr>
+        <p:txBody>
+          <a:bodyPr/>
+          <a:lstStyle/>
+          <a:p>
+            <a:endParaRPr lang="fr-FR"/>
+          </a:p>
+        </p:txBody>
       </p:sp>
       <p:sp>
         <p:nvSpPr>
@@ -13269,7 +13787,7 @@
           <a:bodyPr wrap="square" rtlCol="0" anchor="ctr"/>
           <a:lstStyle/>
           <a:p>
-            <a:pPr algn="ctr" indent="0" marL="0">
+            <a:pPr marL="0" indent="0" algn="ctr">
               <a:buNone/>
             </a:pPr>
             <a:r>
@@ -13286,7 +13804,7 @@
             <a:endParaRPr lang="en-US" sz="1000" dirty="0"/>
           </a:p>
           <a:p>
-            <a:pPr algn="ctr" indent="0" marL="0">
+            <a:pPr marL="0" indent="0" algn="ctr">
               <a:buNone/>
             </a:pPr>
             <a:r>
@@ -13330,6 +13848,13 @@
             <a:prstDash val="solid"/>
           </a:ln>
         </p:spPr>
+        <p:txBody>
+          <a:bodyPr/>
+          <a:lstStyle/>
+          <a:p>
+            <a:endParaRPr lang="fr-FR"/>
+          </a:p>
+        </p:txBody>
       </p:sp>
       <p:sp>
         <p:nvSpPr>
@@ -13352,7 +13877,7 @@
           <a:bodyPr wrap="square" rtlCol="0" anchor="ctr"/>
           <a:lstStyle/>
           <a:p>
-            <a:pPr algn="ctr" indent="0" marL="0">
+            <a:pPr marL="0" indent="0" algn="ctr">
               <a:buNone/>
             </a:pPr>
             <a:r>
@@ -13369,7 +13894,7 @@
             <a:endParaRPr lang="en-US" sz="1000" dirty="0"/>
           </a:p>
           <a:p>
-            <a:pPr algn="ctr" indent="0" marL="0">
+            <a:pPr marL="0" indent="0" algn="ctr">
               <a:buNone/>
             </a:pPr>
             <a:r>
@@ -13408,7 +13933,7 @@
           <a:bodyPr wrap="square" rtlCol="0" anchor="ctr"/>
           <a:lstStyle/>
           <a:p>
-            <a:pPr indent="0" marL="0">
+            <a:pPr marL="0" indent="0">
               <a:buNone/>
             </a:pPr>
             <a:r>
@@ -13447,7 +13972,7 @@
           <a:bodyPr wrap="square" rtlCol="0" anchor="ctr"/>
           <a:lstStyle/>
           <a:p>
-            <a:pPr indent="0" marL="0">
+            <a:pPr marL="0" indent="0">
               <a:buNone/>
             </a:pPr>
             <a:r>
@@ -13481,6 +14006,7 @@
         <a:solidFill>
           <a:srgbClr val="0F1117"/>
         </a:solidFill>
+        <a:effectLst/>
       </p:bgPr>
     </p:bg>
     <p:spTree>
@@ -13521,6 +14047,13 @@
             <a:prstDash val="solid"/>
           </a:ln>
         </p:spPr>
+        <p:txBody>
+          <a:bodyPr/>
+          <a:lstStyle/>
+          <a:p>
+            <a:endParaRPr lang="fr-FR"/>
+          </a:p>
+        </p:txBody>
       </p:sp>
       <p:sp>
         <p:nvSpPr>
@@ -13548,6 +14081,13 @@
             <a:prstDash val="solid"/>
           </a:ln>
         </p:spPr>
+        <p:txBody>
+          <a:bodyPr/>
+          <a:lstStyle/>
+          <a:p>
+            <a:endParaRPr lang="fr-FR"/>
+          </a:p>
+        </p:txBody>
       </p:sp>
       <p:sp>
         <p:nvSpPr>
@@ -13570,7 +14110,7 @@
           <a:bodyPr wrap="square" lIns="0" tIns="0" rIns="0" bIns="0" rtlCol="0" anchor="ctr"/>
           <a:lstStyle/>
           <a:p>
-            <a:pPr algn="ctr" indent="0" marL="0">
+            <a:pPr marL="0" indent="0" algn="ctr">
               <a:buNone/>
             </a:pPr>
             <a:r>
@@ -13606,7 +14146,7 @@
           <a:bodyPr wrap="square" rtlCol="0" anchor="ctr"/>
           <a:lstStyle/>
           <a:p>
-            <a:pPr indent="0" marL="0">
+            <a:pPr marL="0" indent="0">
               <a:buNone/>
             </a:pPr>
             <a:r>
@@ -13645,7 +14185,7 @@
           <a:bodyPr wrap="square" rtlCol="0" anchor="ctr"/>
           <a:lstStyle/>
           <a:p>
-            <a:pPr indent="0" marL="0">
+            <a:pPr marL="0" indent="0">
               <a:buNone/>
             </a:pPr>
             <a:r>
@@ -13665,7 +14205,7 @@
       </p:sp>
       <p:graphicFrame>
         <p:nvGraphicFramePr>
-          <p:cNvPr id="5" name="Table 0"/>
+          <p:cNvPr id="7" name="Table 0"/>
           <p:cNvGraphicFramePr>
             <a:graphicFrameLocks noGrp="1"/>
           </p:cNvGraphicFramePr>
@@ -13679,16 +14219,34 @@
         </p:nvGraphicFramePr>
         <p:xfrm>
           <a:off x="320040" y="1042416"/>
-          <a:ext cx="4114800" cy="1920240"/>
+          <a:ext cx="4114800" cy="1664208"/>
         </p:xfrm>
         <a:graphic>
           <a:graphicData uri="http://schemas.openxmlformats.org/drawingml/2006/table">
             <a:tbl>
               <a:tblPr/>
               <a:tblGrid>
-                <a:gridCol w="1188720"/>
-                <a:gridCol w="822960"/>
-                <a:gridCol w="2103120"/>
+                <a:gridCol w="1188720">
+                  <a:extLst>
+                    <a:ext uri="{9D8B030D-6E8A-4147-A177-3AD203B41FA5}">
+                      <a16:colId xmlns:a16="http://schemas.microsoft.com/office/drawing/2014/main" val="20000"/>
+                    </a:ext>
+                  </a:extLst>
+                </a:gridCol>
+                <a:gridCol w="822960">
+                  <a:extLst>
+                    <a:ext uri="{9D8B030D-6E8A-4147-A177-3AD203B41FA5}">
+                      <a16:colId xmlns:a16="http://schemas.microsoft.com/office/drawing/2014/main" val="20001"/>
+                    </a:ext>
+                  </a:extLst>
+                </a:gridCol>
+                <a:gridCol w="2103120">
+                  <a:extLst>
+                    <a:ext uri="{9D8B030D-6E8A-4147-A177-3AD203B41FA5}">
+                      <a16:colId xmlns:a16="http://schemas.microsoft.com/office/drawing/2014/main" val="20002"/>
+                    </a:ext>
+                  </a:extLst>
+                </a:gridCol>
               </a:tblGrid>
               <a:tr h="237744">
                 <a:tc>
@@ -13696,7 +14254,7 @@
                     <a:bodyPr/>
                     <a:lstStyle/>
                     <a:p>
-                      <a:pPr algn="l" indent="0" marL="0">
+                      <a:pPr marL="0" indent="0" algn="l">
                         <a:buNone/>
                       </a:pPr>
                       <a:r>
@@ -13717,7 +14275,7 @@
                       </a:endParaRPr>
                     </a:p>
                   </a:txBody>
-                  <a:tcPr marL="91440" marR="91440" marT="45720" marB="45720" anchor="ctr">
+                  <a:tcPr anchor="ctr">
                     <a:lnL w="6350" cap="flat" cmpd="sng" algn="ctr">
                       <a:solidFill>
                         <a:srgbClr val="2E3250"/>
@@ -13764,7 +14322,7 @@
                     <a:bodyPr/>
                     <a:lstStyle/>
                     <a:p>
-                      <a:pPr algn="l" indent="0" marL="0">
+                      <a:pPr marL="0" indent="0" algn="l">
                         <a:buNone/>
                       </a:pPr>
                       <a:r>
@@ -13785,7 +14343,7 @@
                       </a:endParaRPr>
                     </a:p>
                   </a:txBody>
-                  <a:tcPr marL="91440" marR="91440" marT="45720" marB="45720" anchor="ctr">
+                  <a:tcPr anchor="ctr">
                     <a:lnL w="6350" cap="flat" cmpd="sng" algn="ctr">
                       <a:solidFill>
                         <a:srgbClr val="2E3250"/>
@@ -13832,7 +14390,7 @@
                     <a:bodyPr/>
                     <a:lstStyle/>
                     <a:p>
-                      <a:pPr algn="l" indent="0" marL="0">
+                      <a:pPr marL="0" indent="0" algn="l">
                         <a:buNone/>
                       </a:pPr>
                       <a:r>
@@ -13853,7 +14411,7 @@
                       </a:endParaRPr>
                     </a:p>
                   </a:txBody>
-                  <a:tcPr marL="91440" marR="91440" marT="45720" marB="45720" anchor="ctr">
+                  <a:tcPr anchor="ctr">
                     <a:lnL w="6350" cap="flat" cmpd="sng" algn="ctr">
                       <a:solidFill>
                         <a:srgbClr val="2E3250"/>
@@ -13895,6 +14453,11 @@
                     </a:solidFill>
                   </a:tcPr>
                 </a:tc>
+                <a:extLst>
+                  <a:ext uri="{0D108BD9-81ED-4DB2-BD59-A6C34878D82A}">
+                    <a16:rowId xmlns:a16="http://schemas.microsoft.com/office/drawing/2014/main" val="10000"/>
+                  </a:ext>
+                </a:extLst>
               </a:tr>
               <a:tr h="237744">
                 <a:tc>
@@ -13902,7 +14465,7 @@
                     <a:bodyPr/>
                     <a:lstStyle/>
                     <a:p>
-                      <a:pPr algn="l" indent="0" marL="0">
+                      <a:pPr marL="0" indent="0" algn="l">
                         <a:buNone/>
                       </a:pPr>
                       <a:r>
@@ -13923,7 +14486,7 @@
                       </a:endParaRPr>
                     </a:p>
                   </a:txBody>
-                  <a:tcPr marL="91440" marR="91440" marT="45720" marB="45720" anchor="ctr">
+                  <a:tcPr anchor="ctr">
                     <a:lnL w="6350" cap="flat" cmpd="sng" algn="ctr">
                       <a:solidFill>
                         <a:srgbClr val="2E3250"/>
@@ -13970,7 +14533,7 @@
                     <a:bodyPr/>
                     <a:lstStyle/>
                     <a:p>
-                      <a:pPr indent="0" marL="0">
+                      <a:pPr marL="0" indent="0">
                         <a:buNone/>
                       </a:pPr>
                       <a:r>
@@ -13991,7 +14554,7 @@
                       </a:endParaRPr>
                     </a:p>
                   </a:txBody>
-                  <a:tcPr marL="91440" marR="91440" marT="45720" marB="45720" anchor="ctr">
+                  <a:tcPr anchor="ctr">
                     <a:lnL w="6350" cap="flat" cmpd="sng" algn="ctr">
                       <a:solidFill>
                         <a:srgbClr val="2E3250"/>
@@ -14038,7 +14601,7 @@
                     <a:bodyPr/>
                     <a:lstStyle/>
                     <a:p>
-                      <a:pPr algn="l" indent="0" marL="0">
+                      <a:pPr marL="0" indent="0" algn="l">
                         <a:buNone/>
                       </a:pPr>
                       <a:r>
@@ -14059,7 +14622,7 @@
                       </a:endParaRPr>
                     </a:p>
                   </a:txBody>
-                  <a:tcPr marL="91440" marR="91440" marT="45720" marB="45720" anchor="ctr">
+                  <a:tcPr anchor="ctr">
                     <a:lnL w="6350" cap="flat" cmpd="sng" algn="ctr">
                       <a:solidFill>
                         <a:srgbClr val="2E3250"/>
@@ -14101,6 +14664,11 @@
                     </a:solidFill>
                   </a:tcPr>
                 </a:tc>
+                <a:extLst>
+                  <a:ext uri="{0D108BD9-81ED-4DB2-BD59-A6C34878D82A}">
+                    <a16:rowId xmlns:a16="http://schemas.microsoft.com/office/drawing/2014/main" val="10001"/>
+                  </a:ext>
+                </a:extLst>
               </a:tr>
               <a:tr h="237744">
                 <a:tc>
@@ -14108,7 +14676,7 @@
                     <a:bodyPr/>
                     <a:lstStyle/>
                     <a:p>
-                      <a:pPr algn="l" indent="0" marL="0">
+                      <a:pPr marL="0" indent="0" algn="l">
                         <a:buNone/>
                       </a:pPr>
                       <a:r>
@@ -14129,7 +14697,7 @@
                       </a:endParaRPr>
                     </a:p>
                   </a:txBody>
-                  <a:tcPr marL="91440" marR="91440" marT="45720" marB="45720" anchor="ctr">
+                  <a:tcPr anchor="ctr">
                     <a:lnL w="6350" cap="flat" cmpd="sng" algn="ctr">
                       <a:solidFill>
                         <a:srgbClr val="2E3250"/>
@@ -14176,7 +14744,7 @@
                     <a:bodyPr/>
                     <a:lstStyle/>
                     <a:p>
-                      <a:pPr indent="0" marL="0">
+                      <a:pPr marL="0" indent="0">
                         <a:buNone/>
                       </a:pPr>
                       <a:r>
@@ -14197,7 +14765,7 @@
                       </a:endParaRPr>
                     </a:p>
                   </a:txBody>
-                  <a:tcPr marL="91440" marR="91440" marT="45720" marB="45720" anchor="ctr">
+                  <a:tcPr anchor="ctr">
                     <a:lnL w="6350" cap="flat" cmpd="sng" algn="ctr">
                       <a:solidFill>
                         <a:srgbClr val="2E3250"/>
@@ -14244,7 +14812,7 @@
                     <a:bodyPr/>
                     <a:lstStyle/>
                     <a:p>
-                      <a:pPr algn="l" indent="0" marL="0">
+                      <a:pPr marL="0" indent="0" algn="l">
                         <a:buNone/>
                       </a:pPr>
                       <a:r>
@@ -14265,7 +14833,7 @@
                       </a:endParaRPr>
                     </a:p>
                   </a:txBody>
-                  <a:tcPr marL="91440" marR="91440" marT="45720" marB="45720" anchor="ctr">
+                  <a:tcPr anchor="ctr">
                     <a:lnL w="6350" cap="flat" cmpd="sng" algn="ctr">
                       <a:solidFill>
                         <a:srgbClr val="2E3250"/>
@@ -14307,6 +14875,11 @@
                     </a:solidFill>
                   </a:tcPr>
                 </a:tc>
+                <a:extLst>
+                  <a:ext uri="{0D108BD9-81ED-4DB2-BD59-A6C34878D82A}">
+                    <a16:rowId xmlns:a16="http://schemas.microsoft.com/office/drawing/2014/main" val="10002"/>
+                  </a:ext>
+                </a:extLst>
               </a:tr>
               <a:tr h="237744">
                 <a:tc>
@@ -14314,7 +14887,7 @@
                     <a:bodyPr/>
                     <a:lstStyle/>
                     <a:p>
-                      <a:pPr algn="l" indent="0" marL="0">
+                      <a:pPr marL="0" indent="0" algn="l">
                         <a:buNone/>
                       </a:pPr>
                       <a:r>
@@ -14335,7 +14908,7 @@
                       </a:endParaRPr>
                     </a:p>
                   </a:txBody>
-                  <a:tcPr marL="91440" marR="91440" marT="45720" marB="45720" anchor="ctr">
+                  <a:tcPr anchor="ctr">
                     <a:lnL w="6350" cap="flat" cmpd="sng" algn="ctr">
                       <a:solidFill>
                         <a:srgbClr val="2E3250"/>
@@ -14382,7 +14955,7 @@
                     <a:bodyPr/>
                     <a:lstStyle/>
                     <a:p>
-                      <a:pPr algn="l" indent="0" marL="0">
+                      <a:pPr marL="0" indent="0" algn="l">
                         <a:buNone/>
                       </a:pPr>
                       <a:r>
@@ -14403,7 +14976,7 @@
                       </a:endParaRPr>
                     </a:p>
                   </a:txBody>
-                  <a:tcPr marL="91440" marR="91440" marT="45720" marB="45720" anchor="ctr">
+                  <a:tcPr anchor="ctr">
                     <a:lnL w="6350" cap="flat" cmpd="sng" algn="ctr">
                       <a:solidFill>
                         <a:srgbClr val="2E3250"/>
@@ -14450,7 +15023,7 @@
                     <a:bodyPr/>
                     <a:lstStyle/>
                     <a:p>
-                      <a:pPr algn="l" indent="0" marL="0">
+                      <a:pPr marL="0" indent="0" algn="l">
                         <a:buNone/>
                       </a:pPr>
                       <a:r>
@@ -14471,7 +15044,7 @@
                       </a:endParaRPr>
                     </a:p>
                   </a:txBody>
-                  <a:tcPr marL="91440" marR="91440" marT="45720" marB="45720" anchor="ctr">
+                  <a:tcPr anchor="ctr">
                     <a:lnL w="6350" cap="flat" cmpd="sng" algn="ctr">
                       <a:solidFill>
                         <a:srgbClr val="2E3250"/>
@@ -14513,6 +15086,11 @@
                     </a:solidFill>
                   </a:tcPr>
                 </a:tc>
+                <a:extLst>
+                  <a:ext uri="{0D108BD9-81ED-4DB2-BD59-A6C34878D82A}">
+                    <a16:rowId xmlns:a16="http://schemas.microsoft.com/office/drawing/2014/main" val="10003"/>
+                  </a:ext>
+                </a:extLst>
               </a:tr>
               <a:tr h="237744">
                 <a:tc>
@@ -14520,7 +15098,7 @@
                     <a:bodyPr/>
                     <a:lstStyle/>
                     <a:p>
-                      <a:pPr algn="l" indent="0" marL="0">
+                      <a:pPr marL="0" indent="0" algn="l">
                         <a:buNone/>
                       </a:pPr>
                       <a:r>
@@ -14541,7 +15119,7 @@
                       </a:endParaRPr>
                     </a:p>
                   </a:txBody>
-                  <a:tcPr marL="91440" marR="91440" marT="45720" marB="45720" anchor="ctr">
+                  <a:tcPr anchor="ctr">
                     <a:lnL w="6350" cap="flat" cmpd="sng" algn="ctr">
                       <a:solidFill>
                         <a:srgbClr val="2E3250"/>
@@ -14588,7 +15166,7 @@
                     <a:bodyPr/>
                     <a:lstStyle/>
                     <a:p>
-                      <a:pPr indent="0" marL="0">
+                      <a:pPr marL="0" indent="0">
                         <a:buNone/>
                       </a:pPr>
                       <a:r>
@@ -14609,7 +15187,7 @@
                       </a:endParaRPr>
                     </a:p>
                   </a:txBody>
-                  <a:tcPr marL="91440" marR="91440" marT="45720" marB="45720" anchor="ctr">
+                  <a:tcPr anchor="ctr">
                     <a:lnL w="6350" cap="flat" cmpd="sng" algn="ctr">
                       <a:solidFill>
                         <a:srgbClr val="2E3250"/>
@@ -14656,7 +15234,7 @@
                     <a:bodyPr/>
                     <a:lstStyle/>
                     <a:p>
-                      <a:pPr algn="l" indent="0" marL="0">
+                      <a:pPr marL="0" indent="0" algn="l">
                         <a:buNone/>
                       </a:pPr>
                       <a:r>
@@ -14677,7 +15255,7 @@
                       </a:endParaRPr>
                     </a:p>
                   </a:txBody>
-                  <a:tcPr marL="91440" marR="91440" marT="45720" marB="45720" anchor="ctr">
+                  <a:tcPr anchor="ctr">
                     <a:lnL w="6350" cap="flat" cmpd="sng" algn="ctr">
                       <a:solidFill>
                         <a:srgbClr val="2E3250"/>
@@ -14719,6 +15297,11 @@
                     </a:solidFill>
                   </a:tcPr>
                 </a:tc>
+                <a:extLst>
+                  <a:ext uri="{0D108BD9-81ED-4DB2-BD59-A6C34878D82A}">
+                    <a16:rowId xmlns:a16="http://schemas.microsoft.com/office/drawing/2014/main" val="10004"/>
+                  </a:ext>
+                </a:extLst>
               </a:tr>
               <a:tr h="237744">
                 <a:tc>
@@ -14726,7 +15309,7 @@
                     <a:bodyPr/>
                     <a:lstStyle/>
                     <a:p>
-                      <a:pPr algn="l" indent="0" marL="0">
+                      <a:pPr marL="0" indent="0" algn="l">
                         <a:buNone/>
                       </a:pPr>
                       <a:r>
@@ -14747,7 +15330,7 @@
                       </a:endParaRPr>
                     </a:p>
                   </a:txBody>
-                  <a:tcPr marL="91440" marR="91440" marT="45720" marB="45720" anchor="ctr">
+                  <a:tcPr anchor="ctr">
                     <a:lnL w="6350" cap="flat" cmpd="sng" algn="ctr">
                       <a:solidFill>
                         <a:srgbClr val="2E3250"/>
@@ -14794,7 +15377,7 @@
                     <a:bodyPr/>
                     <a:lstStyle/>
                     <a:p>
-                      <a:pPr algn="l" indent="0" marL="0">
+                      <a:pPr marL="0" indent="0" algn="l">
                         <a:buNone/>
                       </a:pPr>
                       <a:r>
@@ -14815,7 +15398,7 @@
                       </a:endParaRPr>
                     </a:p>
                   </a:txBody>
-                  <a:tcPr marL="91440" marR="91440" marT="45720" marB="45720" anchor="ctr">
+                  <a:tcPr anchor="ctr">
                     <a:lnL w="6350" cap="flat" cmpd="sng" algn="ctr">
                       <a:solidFill>
                         <a:srgbClr val="2E3250"/>
@@ -14862,7 +15445,7 @@
                     <a:bodyPr/>
                     <a:lstStyle/>
                     <a:p>
-                      <a:pPr algn="l" indent="0" marL="0">
+                      <a:pPr marL="0" indent="0" algn="l">
                         <a:buNone/>
                       </a:pPr>
                       <a:r>
@@ -14883,7 +15466,7 @@
                       </a:endParaRPr>
                     </a:p>
                   </a:txBody>
-                  <a:tcPr marL="91440" marR="91440" marT="45720" marB="45720" anchor="ctr">
+                  <a:tcPr anchor="ctr">
                     <a:lnL w="6350" cap="flat" cmpd="sng" algn="ctr">
                       <a:solidFill>
                         <a:srgbClr val="2E3250"/>
@@ -14925,6 +15508,11 @@
                     </a:solidFill>
                   </a:tcPr>
                 </a:tc>
+                <a:extLst>
+                  <a:ext uri="{0D108BD9-81ED-4DB2-BD59-A6C34878D82A}">
+                    <a16:rowId xmlns:a16="http://schemas.microsoft.com/office/drawing/2014/main" val="10005"/>
+                  </a:ext>
+                </a:extLst>
               </a:tr>
               <a:tr h="237744">
                 <a:tc>
@@ -14932,7 +15520,7 @@
                     <a:bodyPr/>
                     <a:lstStyle/>
                     <a:p>
-                      <a:pPr algn="l" indent="0" marL="0">
+                      <a:pPr marL="0" indent="0" algn="l">
                         <a:buNone/>
                       </a:pPr>
                       <a:r>
@@ -14953,7 +15541,7 @@
                       </a:endParaRPr>
                     </a:p>
                   </a:txBody>
-                  <a:tcPr marL="91440" marR="91440" marT="45720" marB="45720" anchor="ctr">
+                  <a:tcPr anchor="ctr">
                     <a:lnL w="6350" cap="flat" cmpd="sng" algn="ctr">
                       <a:solidFill>
                         <a:srgbClr val="2E3250"/>
@@ -15000,7 +15588,7 @@
                     <a:bodyPr/>
                     <a:lstStyle/>
                     <a:p>
-                      <a:pPr algn="l" indent="0" marL="0">
+                      <a:pPr marL="0" indent="0" algn="l">
                         <a:buNone/>
                       </a:pPr>
                       <a:r>
@@ -15021,7 +15609,7 @@
                       </a:endParaRPr>
                     </a:p>
                   </a:txBody>
-                  <a:tcPr marL="91440" marR="91440" marT="45720" marB="45720" anchor="ctr">
+                  <a:tcPr anchor="ctr">
                     <a:lnL w="6350" cap="flat" cmpd="sng" algn="ctr">
                       <a:solidFill>
                         <a:srgbClr val="2E3250"/>
@@ -15068,7 +15656,7 @@
                     <a:bodyPr/>
                     <a:lstStyle/>
                     <a:p>
-                      <a:pPr algn="l" indent="0" marL="0">
+                      <a:pPr marL="0" indent="0" algn="l">
                         <a:buNone/>
                       </a:pPr>
                       <a:r>
@@ -15089,7 +15677,7 @@
                       </a:endParaRPr>
                     </a:p>
                   </a:txBody>
-                  <a:tcPr marL="91440" marR="91440" marT="45720" marB="45720" anchor="ctr">
+                  <a:tcPr anchor="ctr">
                     <a:lnL w="6350" cap="flat" cmpd="sng" algn="ctr">
                       <a:solidFill>
                         <a:srgbClr val="2E3250"/>
@@ -15131,6 +15719,11 @@
                     </a:solidFill>
                   </a:tcPr>
                 </a:tc>
+                <a:extLst>
+                  <a:ext uri="{0D108BD9-81ED-4DB2-BD59-A6C34878D82A}">
+                    <a16:rowId xmlns:a16="http://schemas.microsoft.com/office/drawing/2014/main" val="10006"/>
+                  </a:ext>
+                </a:extLst>
               </a:tr>
             </a:tbl>
           </a:graphicData>
@@ -15157,7 +15750,7 @@
           <a:bodyPr wrap="square" rtlCol="0" anchor="ctr"/>
           <a:lstStyle/>
           <a:p>
-            <a:pPr indent="0" marL="0">
+            <a:pPr marL="0" indent="0">
               <a:buNone/>
             </a:pPr>
             <a:r>
@@ -15201,6 +15794,13 @@
             <a:prstDash val="solid"/>
           </a:ln>
         </p:spPr>
+        <p:txBody>
+          <a:bodyPr/>
+          <a:lstStyle/>
+          <a:p>
+            <a:endParaRPr lang="fr-FR"/>
+          </a:p>
+        </p:txBody>
       </p:sp>
       <p:sp>
         <p:nvSpPr>
@@ -15223,7 +15823,7 @@
           <a:bodyPr wrap="square" rtlCol="0" anchor="ctr"/>
           <a:lstStyle/>
           <a:p>
-            <a:pPr indent="0" marL="0">
+            <a:pPr marL="0" indent="0">
               <a:buNone/>
             </a:pPr>
             <a:r>
@@ -15262,7 +15862,7 @@
           <a:bodyPr wrap="square" rtlCol="0" anchor="ctr"/>
           <a:lstStyle/>
           <a:p>
-            <a:pPr indent="0" marL="0">
+            <a:pPr marL="0" indent="0">
               <a:buNone/>
             </a:pPr>
             <a:r>
@@ -15306,6 +15906,13 @@
             <a:prstDash val="solid"/>
           </a:ln>
         </p:spPr>
+        <p:txBody>
+          <a:bodyPr/>
+          <a:lstStyle/>
+          <a:p>
+            <a:endParaRPr lang="fr-FR"/>
+          </a:p>
+        </p:txBody>
       </p:sp>
       <p:sp>
         <p:nvSpPr>
@@ -15328,7 +15935,7 @@
           <a:bodyPr wrap="square" rtlCol="0" anchor="ctr"/>
           <a:lstStyle/>
           <a:p>
-            <a:pPr indent="0" marL="0">
+            <a:pPr marL="0" indent="0">
               <a:buNone/>
             </a:pPr>
             <a:r>
@@ -15367,7 +15974,7 @@
           <a:bodyPr wrap="square" rtlCol="0" anchor="ctr"/>
           <a:lstStyle/>
           <a:p>
-            <a:pPr indent="0" marL="0">
+            <a:pPr marL="0" indent="0">
               <a:buNone/>
             </a:pPr>
             <a:r>
@@ -15406,7 +16013,7 @@
           <a:bodyPr wrap="square" rtlCol="0" anchor="ctr"/>
           <a:lstStyle/>
           <a:p>
-            <a:pPr indent="0" marL="0">
+            <a:pPr marL="0" indent="0">
               <a:buNone/>
             </a:pPr>
             <a:r>
@@ -15450,6 +16057,13 @@
             <a:prstDash val="solid"/>
           </a:ln>
         </p:spPr>
+        <p:txBody>
+          <a:bodyPr/>
+          <a:lstStyle/>
+          <a:p>
+            <a:endParaRPr lang="fr-FR"/>
+          </a:p>
+        </p:txBody>
       </p:sp>
       <p:sp>
         <p:nvSpPr>
@@ -15472,7 +16086,7 @@
           <a:bodyPr wrap="square" rtlCol="0" anchor="ctr"/>
           <a:lstStyle/>
           <a:p>
-            <a:pPr indent="0" marL="0">
+            <a:pPr marL="0" indent="0">
               <a:buNone/>
             </a:pPr>
             <a:r>
@@ -15511,7 +16125,7 @@
           <a:bodyPr wrap="square" rtlCol="0" anchor="ctr"/>
           <a:lstStyle/>
           <a:p>
-            <a:pPr indent="0" marL="0">
+            <a:pPr marL="0" indent="0">
               <a:buNone/>
             </a:pPr>
             <a:r>
@@ -15555,6 +16169,13 @@
             <a:prstDash val="solid"/>
           </a:ln>
         </p:spPr>
+        <p:txBody>
+          <a:bodyPr/>
+          <a:lstStyle/>
+          <a:p>
+            <a:endParaRPr lang="fr-FR"/>
+          </a:p>
+        </p:txBody>
       </p:sp>
       <p:sp>
         <p:nvSpPr>
@@ -15577,7 +16198,7 @@
           <a:bodyPr wrap="square" rtlCol="0" anchor="ctr"/>
           <a:lstStyle/>
           <a:p>
-            <a:pPr indent="0" marL="0">
+            <a:pPr marL="0" indent="0">
               <a:buNone/>
             </a:pPr>
             <a:r>
@@ -15621,6 +16242,13 @@
             <a:prstDash val="solid"/>
           </a:ln>
         </p:spPr>
+        <p:txBody>
+          <a:bodyPr/>
+          <a:lstStyle/>
+          <a:p>
+            <a:endParaRPr lang="fr-FR"/>
+          </a:p>
+        </p:txBody>
       </p:sp>
       <p:sp>
         <p:nvSpPr>
@@ -15643,7 +16271,7 @@
           <a:bodyPr wrap="square" rtlCol="0" anchor="ctr"/>
           <a:lstStyle/>
           <a:p>
-            <a:pPr indent="0" marL="0">
+            <a:pPr marL="0" indent="0">
               <a:buNone/>
             </a:pPr>
             <a:r>
@@ -15687,6 +16315,13 @@
             <a:prstDash val="solid"/>
           </a:ln>
         </p:spPr>
+        <p:txBody>
+          <a:bodyPr/>
+          <a:lstStyle/>
+          <a:p>
+            <a:endParaRPr lang="fr-FR"/>
+          </a:p>
+        </p:txBody>
       </p:sp>
       <p:sp>
         <p:nvSpPr>
@@ -15709,7 +16344,7 @@
           <a:bodyPr wrap="square" rtlCol="0" anchor="ctr"/>
           <a:lstStyle/>
           <a:p>
-            <a:pPr indent="0" marL="0">
+            <a:pPr marL="0" indent="0">
               <a:buNone/>
             </a:pPr>
             <a:r>
@@ -15753,6 +16388,13 @@
             <a:prstDash val="solid"/>
           </a:ln>
         </p:spPr>
+        <p:txBody>
+          <a:bodyPr/>
+          <a:lstStyle/>
+          <a:p>
+            <a:endParaRPr lang="fr-FR"/>
+          </a:p>
+        </p:txBody>
       </p:sp>
       <p:sp>
         <p:nvSpPr>
@@ -15775,7 +16417,7 @@
           <a:bodyPr wrap="square" rtlCol="0" anchor="ctr"/>
           <a:lstStyle/>
           <a:p>
-            <a:pPr indent="0" marL="0">
+            <a:pPr marL="0" indent="0">
               <a:buNone/>
             </a:pPr>
             <a:r>
@@ -15819,6 +16461,13 @@
             <a:prstDash val="solid"/>
           </a:ln>
         </p:spPr>
+        <p:txBody>
+          <a:bodyPr/>
+          <a:lstStyle/>
+          <a:p>
+            <a:endParaRPr lang="fr-FR"/>
+          </a:p>
+        </p:txBody>
       </p:sp>
       <p:sp>
         <p:nvSpPr>
@@ -15841,7 +16490,7 @@
           <a:bodyPr wrap="square" rtlCol="0" anchor="ctr"/>
           <a:lstStyle/>
           <a:p>
-            <a:pPr indent="0" marL="0">
+            <a:pPr marL="0" indent="0">
               <a:buNone/>
             </a:pPr>
             <a:r>
@@ -15880,7 +16529,7 @@
           <a:bodyPr wrap="square" rtlCol="0" anchor="ctr"/>
           <a:lstStyle/>
           <a:p>
-            <a:pPr indent="0" marL="0">
+            <a:pPr marL="0" indent="0">
               <a:buNone/>
             </a:pPr>
             <a:r>
@@ -15924,6 +16573,13 @@
             <a:prstDash val="solid"/>
           </a:ln>
         </p:spPr>
+        <p:txBody>
+          <a:bodyPr/>
+          <a:lstStyle/>
+          <a:p>
+            <a:endParaRPr lang="fr-FR"/>
+          </a:p>
+        </p:txBody>
       </p:sp>
       <p:sp>
         <p:nvSpPr>
@@ -15946,7 +16602,7 @@
           <a:bodyPr wrap="square" rtlCol="0" anchor="ctr"/>
           <a:lstStyle/>
           <a:p>
-            <a:pPr indent="0" marL="0">
+            <a:pPr marL="0" indent="0">
               <a:buNone/>
             </a:pPr>
             <a:r>
@@ -15990,6 +16646,13 @@
             <a:prstDash val="solid"/>
           </a:ln>
         </p:spPr>
+        <p:txBody>
+          <a:bodyPr/>
+          <a:lstStyle/>
+          <a:p>
+            <a:endParaRPr lang="fr-FR"/>
+          </a:p>
+        </p:txBody>
       </p:sp>
       <p:sp>
         <p:nvSpPr>
@@ -16012,7 +16675,7 @@
           <a:bodyPr wrap="square" rtlCol="0" anchor="ctr"/>
           <a:lstStyle/>
           <a:p>
-            <a:pPr indent="0" marL="0">
+            <a:pPr marL="0" indent="0">
               <a:buNone/>
             </a:pPr>
             <a:r>
@@ -16056,6 +16719,13 @@
             <a:prstDash val="solid"/>
           </a:ln>
         </p:spPr>
+        <p:txBody>
+          <a:bodyPr/>
+          <a:lstStyle/>
+          <a:p>
+            <a:endParaRPr lang="fr-FR"/>
+          </a:p>
+        </p:txBody>
       </p:sp>
       <p:sp>
         <p:nvSpPr>
@@ -16078,7 +16748,7 @@
           <a:bodyPr wrap="square" rtlCol="0" anchor="ctr"/>
           <a:lstStyle/>
           <a:p>
-            <a:pPr indent="0" marL="0">
+            <a:pPr marL="0" indent="0">
               <a:buNone/>
             </a:pPr>
             <a:r>
@@ -16122,6 +16792,13 @@
             <a:prstDash val="solid"/>
           </a:ln>
         </p:spPr>
+        <p:txBody>
+          <a:bodyPr/>
+          <a:lstStyle/>
+          <a:p>
+            <a:endParaRPr lang="fr-FR"/>
+          </a:p>
+        </p:txBody>
       </p:sp>
       <p:sp>
         <p:nvSpPr>
@@ -16144,7 +16821,7 @@
           <a:bodyPr wrap="square" rtlCol="0" anchor="ctr"/>
           <a:lstStyle/>
           <a:p>
-            <a:pPr indent="0" marL="0">
+            <a:pPr marL="0" indent="0">
               <a:buNone/>
             </a:pPr>
             <a:r>
@@ -16188,6 +16865,13 @@
             <a:prstDash val="solid"/>
           </a:ln>
         </p:spPr>
+        <p:txBody>
+          <a:bodyPr/>
+          <a:lstStyle/>
+          <a:p>
+            <a:endParaRPr lang="fr-FR"/>
+          </a:p>
+        </p:txBody>
       </p:sp>
       <p:sp>
         <p:nvSpPr>
@@ -16210,7 +16894,7 @@
           <a:bodyPr wrap="square" rtlCol="0" anchor="ctr"/>
           <a:lstStyle/>
           <a:p>
-            <a:pPr algn="ctr" indent="0" marL="0">
+            <a:pPr marL="0" indent="0" algn="ctr">
               <a:buNone/>
             </a:pPr>
             <a:r>
@@ -16249,7 +16933,7 @@
           <a:bodyPr wrap="square" rtlCol="0" anchor="ctr"/>
           <a:lstStyle/>
           <a:p>
-            <a:pPr algn="ctr" indent="0" marL="0">
+            <a:pPr marL="0" indent="0" algn="ctr">
               <a:buNone/>
             </a:pPr>
             <a:r>
@@ -16283,6 +16967,7 @@
         <a:solidFill>
           <a:srgbClr val="0F1117"/>
         </a:solidFill>
+        <a:effectLst/>
       </p:bgPr>
     </p:bg>
     <p:spTree>
@@ -16323,6 +17008,13 @@
             <a:prstDash val="solid"/>
           </a:ln>
         </p:spPr>
+        <p:txBody>
+          <a:bodyPr/>
+          <a:lstStyle/>
+          <a:p>
+            <a:endParaRPr lang="fr-FR"/>
+          </a:p>
+        </p:txBody>
       </p:sp>
       <p:sp>
         <p:nvSpPr>
@@ -16350,6 +17042,13 @@
             <a:prstDash val="solid"/>
           </a:ln>
         </p:spPr>
+        <p:txBody>
+          <a:bodyPr/>
+          <a:lstStyle/>
+          <a:p>
+            <a:endParaRPr lang="fr-FR"/>
+          </a:p>
+        </p:txBody>
       </p:sp>
       <p:sp>
         <p:nvSpPr>
@@ -16372,7 +17071,7 @@
           <a:bodyPr wrap="square" lIns="0" tIns="0" rIns="0" bIns="0" rtlCol="0" anchor="ctr"/>
           <a:lstStyle/>
           <a:p>
-            <a:pPr algn="ctr" indent="0" marL="0">
+            <a:pPr marL="0" indent="0" algn="ctr">
               <a:buNone/>
             </a:pPr>
             <a:r>
@@ -16408,7 +17107,7 @@
           <a:bodyPr wrap="square" rtlCol="0" anchor="ctr"/>
           <a:lstStyle/>
           <a:p>
-            <a:pPr indent="0" marL="0">
+            <a:pPr marL="0" indent="0">
               <a:buNone/>
             </a:pPr>
             <a:r>
@@ -16452,6 +17151,13 @@
             <a:prstDash val="solid"/>
           </a:ln>
         </p:spPr>
+        <p:txBody>
+          <a:bodyPr/>
+          <a:lstStyle/>
+          <a:p>
+            <a:endParaRPr lang="fr-FR"/>
+          </a:p>
+        </p:txBody>
       </p:sp>
       <p:sp>
         <p:nvSpPr>
@@ -16479,6 +17185,13 @@
             <a:prstDash val="solid"/>
           </a:ln>
         </p:spPr>
+        <p:txBody>
+          <a:bodyPr/>
+          <a:lstStyle/>
+          <a:p>
+            <a:endParaRPr lang="fr-FR"/>
+          </a:p>
+        </p:txBody>
       </p:sp>
       <p:sp>
         <p:nvSpPr>
@@ -16501,7 +17214,7 @@
           <a:bodyPr wrap="square" lIns="0" tIns="0" rIns="0" bIns="0" rtlCol="0" anchor="ctr"/>
           <a:lstStyle/>
           <a:p>
-            <a:pPr algn="ctr" indent="0" marL="0">
+            <a:pPr marL="0" indent="0" algn="ctr">
               <a:buNone/>
             </a:pPr>
             <a:r>
@@ -16540,7 +17253,7 @@
           <a:bodyPr wrap="square" rtlCol="0" anchor="ctr"/>
           <a:lstStyle/>
           <a:p>
-            <a:pPr indent="0" marL="0">
+            <a:pPr marL="0" indent="0">
               <a:buNone/>
             </a:pPr>
             <a:r>
@@ -16579,7 +17292,7 @@
           <a:bodyPr wrap="square" rtlCol="0" anchor="ctr"/>
           <a:lstStyle/>
           <a:p>
-            <a:pPr indent="0" marL="0">
+            <a:pPr marL="0" indent="0">
               <a:buNone/>
             </a:pPr>
             <a:r>
@@ -16618,7 +17331,7 @@
           <a:bodyPr wrap="square" rtlCol="0" anchor="ctr"/>
           <a:lstStyle/>
           <a:p>
-            <a:pPr indent="0" marL="0">
+            <a:pPr marL="0" indent="0">
               <a:buNone/>
             </a:pPr>
             <a:r>
@@ -16657,7 +17370,7 @@
           <a:bodyPr wrap="square" rtlCol="0" anchor="ctr"/>
           <a:lstStyle/>
           <a:p>
-            <a:pPr indent="0" marL="0">
+            <a:pPr marL="0" indent="0">
               <a:buNone/>
             </a:pPr>
             <a:r>
@@ -16696,7 +17409,7 @@
           <a:bodyPr wrap="square" rtlCol="0" anchor="ctr"/>
           <a:lstStyle/>
           <a:p>
-            <a:pPr indent="0" marL="0">
+            <a:pPr marL="0" indent="0">
               <a:buNone/>
             </a:pPr>
             <a:r>
@@ -16735,7 +17448,7 @@
           <a:bodyPr wrap="square" rtlCol="0" anchor="ctr"/>
           <a:lstStyle/>
           <a:p>
-            <a:pPr indent="0" marL="0">
+            <a:pPr marL="0" indent="0">
               <a:buNone/>
             </a:pPr>
             <a:r>
@@ -16779,6 +17492,13 @@
             <a:prstDash val="solid"/>
           </a:ln>
         </p:spPr>
+        <p:txBody>
+          <a:bodyPr/>
+          <a:lstStyle/>
+          <a:p>
+            <a:endParaRPr lang="fr-FR"/>
+          </a:p>
+        </p:txBody>
       </p:sp>
       <p:sp>
         <p:nvSpPr>
@@ -16806,6 +17526,13 @@
             <a:prstDash val="solid"/>
           </a:ln>
         </p:spPr>
+        <p:txBody>
+          <a:bodyPr/>
+          <a:lstStyle/>
+          <a:p>
+            <a:endParaRPr lang="fr-FR"/>
+          </a:p>
+        </p:txBody>
       </p:sp>
       <p:sp>
         <p:nvSpPr>
@@ -16828,7 +17555,7 @@
           <a:bodyPr wrap="square" lIns="0" tIns="0" rIns="0" bIns="0" rtlCol="0" anchor="ctr"/>
           <a:lstStyle/>
           <a:p>
-            <a:pPr algn="ctr" indent="0" marL="0">
+            <a:pPr marL="0" indent="0" algn="ctr">
               <a:buNone/>
             </a:pPr>
             <a:r>
@@ -16867,7 +17594,7 @@
           <a:bodyPr wrap="square" rtlCol="0" anchor="ctr"/>
           <a:lstStyle/>
           <a:p>
-            <a:pPr indent="0" marL="0">
+            <a:pPr marL="0" indent="0">
               <a:buNone/>
             </a:pPr>
             <a:r>
@@ -16906,7 +17633,7 @@
           <a:bodyPr wrap="square" rtlCol="0" anchor="ctr"/>
           <a:lstStyle/>
           <a:p>
-            <a:pPr indent="0" marL="0">
+            <a:pPr marL="0" indent="0">
               <a:buNone/>
             </a:pPr>
             <a:r>
@@ -16945,7 +17672,7 @@
           <a:bodyPr wrap="square" rtlCol="0" anchor="ctr"/>
           <a:lstStyle/>
           <a:p>
-            <a:pPr indent="0" marL="0">
+            <a:pPr marL="0" indent="0">
               <a:buNone/>
             </a:pPr>
             <a:r>
@@ -16984,7 +17711,7 @@
           <a:bodyPr wrap="square" rtlCol="0" anchor="ctr"/>
           <a:lstStyle/>
           <a:p>
-            <a:pPr indent="0" marL="0">
+            <a:pPr marL="0" indent="0">
               <a:buNone/>
             </a:pPr>
             <a:r>
@@ -17023,7 +17750,7 @@
           <a:bodyPr wrap="square" rtlCol="0" anchor="ctr"/>
           <a:lstStyle/>
           <a:p>
-            <a:pPr indent="0" marL="0">
+            <a:pPr marL="0" indent="0">
               <a:buNone/>
             </a:pPr>
             <a:r>
@@ -17062,7 +17789,7 @@
           <a:bodyPr wrap="square" rtlCol="0" anchor="ctr"/>
           <a:lstStyle/>
           <a:p>
-            <a:pPr indent="0" marL="0">
+            <a:pPr marL="0" indent="0">
               <a:buNone/>
             </a:pPr>
             <a:r>
@@ -17106,6 +17833,13 @@
             <a:prstDash val="solid"/>
           </a:ln>
         </p:spPr>
+        <p:txBody>
+          <a:bodyPr/>
+          <a:lstStyle/>
+          <a:p>
+            <a:endParaRPr lang="fr-FR"/>
+          </a:p>
+        </p:txBody>
       </p:sp>
       <p:sp>
         <p:nvSpPr>
@@ -17133,6 +17867,13 @@
             <a:prstDash val="solid"/>
           </a:ln>
         </p:spPr>
+        <p:txBody>
+          <a:bodyPr/>
+          <a:lstStyle/>
+          <a:p>
+            <a:endParaRPr lang="fr-FR"/>
+          </a:p>
+        </p:txBody>
       </p:sp>
       <p:sp>
         <p:nvSpPr>
@@ -17155,7 +17896,7 @@
           <a:bodyPr wrap="square" lIns="0" tIns="0" rIns="0" bIns="0" rtlCol="0" anchor="ctr"/>
           <a:lstStyle/>
           <a:p>
-            <a:pPr algn="ctr" indent="0" marL="0">
+            <a:pPr marL="0" indent="0" algn="ctr">
               <a:buNone/>
             </a:pPr>
             <a:r>
@@ -17194,7 +17935,7 @@
           <a:bodyPr wrap="square" rtlCol="0" anchor="ctr"/>
           <a:lstStyle/>
           <a:p>
-            <a:pPr indent="0" marL="0">
+            <a:pPr marL="0" indent="0">
               <a:buNone/>
             </a:pPr>
             <a:r>
@@ -17233,7 +17974,7 @@
           <a:bodyPr wrap="square" rtlCol="0" anchor="ctr"/>
           <a:lstStyle/>
           <a:p>
-            <a:pPr indent="0" marL="0">
+            <a:pPr marL="0" indent="0">
               <a:buNone/>
             </a:pPr>
             <a:r>
@@ -17272,7 +18013,7 @@
           <a:bodyPr wrap="square" rtlCol="0" anchor="ctr"/>
           <a:lstStyle/>
           <a:p>
-            <a:pPr indent="0" marL="0">
+            <a:pPr marL="0" indent="0">
               <a:buNone/>
             </a:pPr>
             <a:r>
@@ -17311,7 +18052,7 @@
           <a:bodyPr wrap="square" rtlCol="0" anchor="ctr"/>
           <a:lstStyle/>
           <a:p>
-            <a:pPr indent="0" marL="0">
+            <a:pPr marL="0" indent="0">
               <a:buNone/>
             </a:pPr>
             <a:r>
@@ -17350,7 +18091,7 @@
           <a:bodyPr wrap="square" rtlCol="0" anchor="ctr"/>
           <a:lstStyle/>
           <a:p>
-            <a:pPr indent="0" marL="0">
+            <a:pPr marL="0" indent="0">
               <a:buNone/>
             </a:pPr>
             <a:r>
@@ -17389,7 +18130,7 @@
           <a:bodyPr wrap="square" rtlCol="0" anchor="ctr"/>
           <a:lstStyle/>
           <a:p>
-            <a:pPr indent="0" marL="0">
+            <a:pPr marL="0" indent="0">
               <a:buNone/>
             </a:pPr>
             <a:r>
@@ -17428,7 +18169,7 @@
           <a:bodyPr wrap="square" rtlCol="0" anchor="ctr"/>
           <a:lstStyle/>
           <a:p>
-            <a:pPr indent="0" marL="0">
+            <a:pPr marL="0" indent="0">
               <a:buNone/>
             </a:pPr>
             <a:r>
@@ -17472,6 +18213,13 @@
             <a:prstDash val="solid"/>
           </a:ln>
         </p:spPr>
+        <p:txBody>
+          <a:bodyPr/>
+          <a:lstStyle/>
+          <a:p>
+            <a:endParaRPr lang="fr-FR"/>
+          </a:p>
+        </p:txBody>
       </p:sp>
       <p:sp>
         <p:nvSpPr>
@@ -17494,7 +18242,7 @@
           <a:bodyPr wrap="square" rtlCol="0" anchor="ctr"/>
           <a:lstStyle/>
           <a:p>
-            <a:pPr algn="ctr" indent="0" marL="0">
+            <a:pPr marL="0" indent="0" algn="ctr">
               <a:buNone/>
             </a:pPr>
             <a:r>
@@ -17511,7 +18259,7 @@
             <a:endParaRPr lang="en-US" sz="1000" dirty="0"/>
           </a:p>
           <a:p>
-            <a:pPr algn="ctr" indent="0" marL="0">
+            <a:pPr marL="0" indent="0" algn="ctr">
               <a:buNone/>
             </a:pPr>
             <a:r>
@@ -17550,7 +18298,7 @@
           <a:bodyPr wrap="square" rtlCol="0" anchor="ctr"/>
           <a:lstStyle/>
           <a:p>
-            <a:pPr algn="ctr" indent="0" marL="0">
+            <a:pPr marL="0" indent="0" algn="ctr">
               <a:buNone/>
             </a:pPr>
             <a:r>
@@ -17567,7 +18315,7 @@
             <a:endParaRPr lang="en-US" sz="900" dirty="0"/>
           </a:p>
           <a:p>
-            <a:pPr algn="ctr" indent="0" marL="0">
+            <a:pPr marL="0" indent="0" algn="ctr">
               <a:buNone/>
             </a:pPr>
             <a:r>
@@ -17608,6 +18356,13 @@
             <a:tailEnd type="arrow"/>
           </a:ln>
         </p:spPr>
+        <p:txBody>
+          <a:bodyPr/>
+          <a:lstStyle/>
+          <a:p>
+            <a:endParaRPr lang="fr-FR"/>
+          </a:p>
+        </p:txBody>
       </p:sp>
       <p:sp>
         <p:nvSpPr>
@@ -17635,6 +18390,13 @@
             <a:prstDash val="solid"/>
           </a:ln>
         </p:spPr>
+        <p:txBody>
+          <a:bodyPr/>
+          <a:lstStyle/>
+          <a:p>
+            <a:endParaRPr lang="fr-FR"/>
+          </a:p>
+        </p:txBody>
       </p:sp>
       <p:sp>
         <p:nvSpPr>
@@ -17657,7 +18419,7 @@
           <a:bodyPr wrap="square" rtlCol="0" anchor="ctr"/>
           <a:lstStyle/>
           <a:p>
-            <a:pPr algn="ctr" indent="0" marL="0">
+            <a:pPr marL="0" indent="0" algn="ctr">
               <a:buNone/>
             </a:pPr>
             <a:r>
@@ -17674,7 +18436,7 @@
             <a:endParaRPr lang="en-US" sz="1000" dirty="0"/>
           </a:p>
           <a:p>
-            <a:pPr algn="ctr" indent="0" marL="0">
+            <a:pPr marL="0" indent="0" algn="ctr">
               <a:buNone/>
             </a:pPr>
             <a:r>
@@ -17713,7 +18475,7 @@
           <a:bodyPr wrap="square" rtlCol="0" anchor="ctr"/>
           <a:lstStyle/>
           <a:p>
-            <a:pPr algn="ctr" indent="0" marL="0">
+            <a:pPr marL="0" indent="0" algn="ctr">
               <a:buNone/>
             </a:pPr>
             <a:r>
@@ -17730,7 +18492,7 @@
             <a:endParaRPr lang="en-US" sz="900" dirty="0"/>
           </a:p>
           <a:p>
-            <a:pPr algn="ctr" indent="0" marL="0">
+            <a:pPr marL="0" indent="0" algn="ctr">
               <a:buNone/>
             </a:pPr>
             <a:r>
@@ -17771,6 +18533,13 @@
             <a:tailEnd type="arrow"/>
           </a:ln>
         </p:spPr>
+        <p:txBody>
+          <a:bodyPr/>
+          <a:lstStyle/>
+          <a:p>
+            <a:endParaRPr lang="fr-FR"/>
+          </a:p>
+        </p:txBody>
       </p:sp>
       <p:sp>
         <p:nvSpPr>
@@ -17798,6 +18567,13 @@
             <a:prstDash val="solid"/>
           </a:ln>
         </p:spPr>
+        <p:txBody>
+          <a:bodyPr/>
+          <a:lstStyle/>
+          <a:p>
+            <a:endParaRPr lang="fr-FR"/>
+          </a:p>
+        </p:txBody>
       </p:sp>
       <p:sp>
         <p:nvSpPr>
@@ -17820,7 +18596,7 @@
           <a:bodyPr wrap="square" rtlCol="0" anchor="ctr"/>
           <a:lstStyle/>
           <a:p>
-            <a:pPr algn="ctr" indent="0" marL="0">
+            <a:pPr marL="0" indent="0" algn="ctr">
               <a:buNone/>
             </a:pPr>
             <a:r>
@@ -17859,7 +18635,7 @@
           <a:bodyPr wrap="square" rtlCol="0" anchor="ctr"/>
           <a:lstStyle/>
           <a:p>
-            <a:pPr algn="ctr" indent="0" marL="0">
+            <a:pPr marL="0" indent="0" algn="ctr">
               <a:buNone/>
             </a:pPr>
             <a:r>
@@ -17876,7 +18652,7 @@
             <a:endParaRPr lang="en-US" sz="900" dirty="0"/>
           </a:p>
           <a:p>
-            <a:pPr algn="ctr" indent="0" marL="0">
+            <a:pPr marL="0" indent="0" algn="ctr">
               <a:buNone/>
             </a:pPr>
             <a:r>
@@ -17917,6 +18693,13 @@
             <a:tailEnd type="arrow"/>
           </a:ln>
         </p:spPr>
+        <p:txBody>
+          <a:bodyPr/>
+          <a:lstStyle/>
+          <a:p>
+            <a:endParaRPr lang="fr-FR"/>
+          </a:p>
+        </p:txBody>
       </p:sp>
       <p:sp>
         <p:nvSpPr>
@@ -17944,6 +18727,13 @@
             <a:prstDash val="solid"/>
           </a:ln>
         </p:spPr>
+        <p:txBody>
+          <a:bodyPr/>
+          <a:lstStyle/>
+          <a:p>
+            <a:endParaRPr lang="fr-FR"/>
+          </a:p>
+        </p:txBody>
       </p:sp>
       <p:sp>
         <p:nvSpPr>
@@ -17966,7 +18756,7 @@
           <a:bodyPr wrap="square" rtlCol="0" anchor="ctr"/>
           <a:lstStyle/>
           <a:p>
-            <a:pPr algn="ctr" indent="0" marL="0">
+            <a:pPr marL="0" indent="0" algn="ctr">
               <a:buNone/>
             </a:pPr>
             <a:r>
@@ -18005,7 +18795,7 @@
           <a:bodyPr wrap="square" rtlCol="0" anchor="ctr"/>
           <a:lstStyle/>
           <a:p>
-            <a:pPr algn="ctr" indent="0" marL="0">
+            <a:pPr marL="0" indent="0" algn="ctr">
               <a:buNone/>
             </a:pPr>
             <a:r>
@@ -18022,7 +18812,7 @@
             <a:endParaRPr lang="en-US" sz="900" dirty="0"/>
           </a:p>
           <a:p>
-            <a:pPr algn="ctr" indent="0" marL="0">
+            <a:pPr marL="0" indent="0" algn="ctr">
               <a:buNone/>
             </a:pPr>
             <a:r>
@@ -18063,6 +18853,13 @@
             <a:tailEnd type="arrow"/>
           </a:ln>
         </p:spPr>
+        <p:txBody>
+          <a:bodyPr/>
+          <a:lstStyle/>
+          <a:p>
+            <a:endParaRPr lang="fr-FR"/>
+          </a:p>
+        </p:txBody>
       </p:sp>
       <p:sp>
         <p:nvSpPr>
@@ -18090,6 +18887,13 @@
             <a:prstDash val="solid"/>
           </a:ln>
         </p:spPr>
+        <p:txBody>
+          <a:bodyPr/>
+          <a:lstStyle/>
+          <a:p>
+            <a:endParaRPr lang="fr-FR"/>
+          </a:p>
+        </p:txBody>
       </p:sp>
       <p:sp>
         <p:nvSpPr>
@@ -18112,7 +18916,7 @@
           <a:bodyPr wrap="square" rtlCol="0" anchor="ctr"/>
           <a:lstStyle/>
           <a:p>
-            <a:pPr algn="ctr" indent="0" marL="0">
+            <a:pPr marL="0" indent="0" algn="ctr">
               <a:buNone/>
             </a:pPr>
             <a:r>
@@ -18151,7 +18955,7 @@
           <a:bodyPr wrap="square" rtlCol="0" anchor="ctr"/>
           <a:lstStyle/>
           <a:p>
-            <a:pPr algn="ctr" indent="0" marL="0">
+            <a:pPr marL="0" indent="0" algn="ctr">
               <a:buNone/>
             </a:pPr>
             <a:r>
@@ -18168,7 +18972,7 @@
             <a:endParaRPr lang="en-US" sz="900" dirty="0"/>
           </a:p>
           <a:p>
-            <a:pPr algn="ctr" indent="0" marL="0">
+            <a:pPr marL="0" indent="0" algn="ctr">
               <a:buNone/>
             </a:pPr>
             <a:r>
@@ -18202,6 +19006,7 @@
         <a:solidFill>
           <a:srgbClr val="0F1117"/>
         </a:solidFill>
+        <a:effectLst/>
       </p:bgPr>
     </p:bg>
     <p:spTree>
@@ -18242,6 +19047,13 @@
             <a:prstDash val="solid"/>
           </a:ln>
         </p:spPr>
+        <p:txBody>
+          <a:bodyPr/>
+          <a:lstStyle/>
+          <a:p>
+            <a:endParaRPr lang="fr-FR"/>
+          </a:p>
+        </p:txBody>
       </p:sp>
       <p:sp>
         <p:nvSpPr>
@@ -18269,6 +19081,13 @@
             <a:prstDash val="solid"/>
           </a:ln>
         </p:spPr>
+        <p:txBody>
+          <a:bodyPr/>
+          <a:lstStyle/>
+          <a:p>
+            <a:endParaRPr lang="fr-FR"/>
+          </a:p>
+        </p:txBody>
       </p:sp>
       <p:sp>
         <p:nvSpPr>
@@ -18291,7 +19110,7 @@
           <a:bodyPr wrap="square" lIns="0" tIns="0" rIns="0" bIns="0" rtlCol="0" anchor="ctr"/>
           <a:lstStyle/>
           <a:p>
-            <a:pPr algn="ctr" indent="0" marL="0">
+            <a:pPr marL="0" indent="0" algn="ctr">
               <a:buNone/>
             </a:pPr>
             <a:r>
@@ -18327,7 +19146,7 @@
           <a:bodyPr wrap="square" rtlCol="0" anchor="ctr"/>
           <a:lstStyle/>
           <a:p>
-            <a:pPr indent="0" marL="0">
+            <a:pPr marL="0" indent="0">
               <a:buNone/>
             </a:pPr>
             <a:r>
@@ -18366,7 +19185,7 @@
           <a:bodyPr wrap="square" rtlCol="0" anchor="ctr"/>
           <a:lstStyle/>
           <a:p>
-            <a:pPr indent="0" marL="0">
+            <a:pPr marL="0" indent="0">
               <a:buNone/>
             </a:pPr>
             <a:r>
@@ -18400,16 +19219,34 @@
         </p:nvGraphicFramePr>
         <p:xfrm>
           <a:off x="320040" y="1042416"/>
-          <a:ext cx="4206240" cy="1737360"/>
+          <a:ext cx="4206240" cy="1761744"/>
         </p:xfrm>
         <a:graphic>
           <a:graphicData uri="http://schemas.openxmlformats.org/drawingml/2006/table">
             <a:tbl>
               <a:tblPr/>
               <a:tblGrid>
-                <a:gridCol w="1188720"/>
-                <a:gridCol w="1645920"/>
-                <a:gridCol w="1371600"/>
+                <a:gridCol w="1188720">
+                  <a:extLst>
+                    <a:ext uri="{9D8B030D-6E8A-4147-A177-3AD203B41FA5}">
+                      <a16:colId xmlns:a16="http://schemas.microsoft.com/office/drawing/2014/main" val="20000"/>
+                    </a:ext>
+                  </a:extLst>
+                </a:gridCol>
+                <a:gridCol w="1645920">
+                  <a:extLst>
+                    <a:ext uri="{9D8B030D-6E8A-4147-A177-3AD203B41FA5}">
+                      <a16:colId xmlns:a16="http://schemas.microsoft.com/office/drawing/2014/main" val="20001"/>
+                    </a:ext>
+                  </a:extLst>
+                </a:gridCol>
+                <a:gridCol w="1371600">
+                  <a:extLst>
+                    <a:ext uri="{9D8B030D-6E8A-4147-A177-3AD203B41FA5}">
+                      <a16:colId xmlns:a16="http://schemas.microsoft.com/office/drawing/2014/main" val="20002"/>
+                    </a:ext>
+                  </a:extLst>
+                </a:gridCol>
               </a:tblGrid>
               <a:tr h="237744">
                 <a:tc>
@@ -18417,7 +19254,7 @@
                     <a:bodyPr/>
                     <a:lstStyle/>
                     <a:p>
-                      <a:pPr algn="l" indent="0" marL="0">
+                      <a:pPr marL="0" indent="0" algn="l">
                         <a:buNone/>
                       </a:pPr>
                       <a:r>
@@ -18438,7 +19275,7 @@
                       </a:endParaRPr>
                     </a:p>
                   </a:txBody>
-                  <a:tcPr marL="91440" marR="91440" marT="45720" marB="45720" anchor="ctr">
+                  <a:tcPr anchor="ctr">
                     <a:lnL w="6350" cap="flat" cmpd="sng" algn="ctr">
                       <a:solidFill>
                         <a:srgbClr val="2E3250"/>
@@ -18485,7 +19322,7 @@
                     <a:bodyPr/>
                     <a:lstStyle/>
                     <a:p>
-                      <a:pPr algn="l" indent="0" marL="0">
+                      <a:pPr marL="0" indent="0" algn="l">
                         <a:buNone/>
                       </a:pPr>
                       <a:r>
@@ -18506,7 +19343,7 @@
                       </a:endParaRPr>
                     </a:p>
                   </a:txBody>
-                  <a:tcPr marL="91440" marR="91440" marT="45720" marB="45720" anchor="ctr">
+                  <a:tcPr anchor="ctr">
                     <a:lnL w="6350" cap="flat" cmpd="sng" algn="ctr">
                       <a:solidFill>
                         <a:srgbClr val="2E3250"/>
@@ -18553,7 +19390,7 @@
                     <a:bodyPr/>
                     <a:lstStyle/>
                     <a:p>
-                      <a:pPr algn="l" indent="0" marL="0">
+                      <a:pPr marL="0" indent="0" algn="l">
                         <a:buNone/>
                       </a:pPr>
                       <a:r>
@@ -18574,7 +19411,7 @@
                       </a:endParaRPr>
                     </a:p>
                   </a:txBody>
-                  <a:tcPr marL="91440" marR="91440" marT="45720" marB="45720" anchor="ctr">
+                  <a:tcPr anchor="ctr">
                     <a:lnL w="6350" cap="flat" cmpd="sng" algn="ctr">
                       <a:solidFill>
                         <a:srgbClr val="2E3250"/>
@@ -18616,6 +19453,11 @@
                     </a:solidFill>
                   </a:tcPr>
                 </a:tc>
+                <a:extLst>
+                  <a:ext uri="{0D108BD9-81ED-4DB2-BD59-A6C34878D82A}">
+                    <a16:rowId xmlns:a16="http://schemas.microsoft.com/office/drawing/2014/main" val="10000"/>
+                  </a:ext>
+                </a:extLst>
               </a:tr>
               <a:tr h="237744">
                 <a:tc>
@@ -18623,7 +19465,7 @@
                     <a:bodyPr/>
                     <a:lstStyle/>
                     <a:p>
-                      <a:pPr algn="l" indent="0" marL="0">
+                      <a:pPr marL="0" indent="0" algn="l">
                         <a:buNone/>
                       </a:pPr>
                       <a:r>
@@ -18644,7 +19486,7 @@
                       </a:endParaRPr>
                     </a:p>
                   </a:txBody>
-                  <a:tcPr marL="91440" marR="91440" marT="45720" marB="45720" anchor="ctr">
+                  <a:tcPr anchor="ctr">
                     <a:lnL w="6350" cap="flat" cmpd="sng" algn="ctr">
                       <a:solidFill>
                         <a:srgbClr val="2E3250"/>
@@ -18691,7 +19533,7 @@
                     <a:bodyPr/>
                     <a:lstStyle/>
                     <a:p>
-                      <a:pPr algn="l" indent="0" marL="0">
+                      <a:pPr marL="0" indent="0" algn="l">
                         <a:buNone/>
                       </a:pPr>
                       <a:r>
@@ -18712,7 +19554,7 @@
                       </a:endParaRPr>
                     </a:p>
                   </a:txBody>
-                  <a:tcPr marL="91440" marR="91440" marT="45720" marB="45720" anchor="ctr">
+                  <a:tcPr anchor="ctr">
                     <a:lnL w="6350" cap="flat" cmpd="sng" algn="ctr">
                       <a:solidFill>
                         <a:srgbClr val="2E3250"/>
@@ -18759,7 +19601,7 @@
                     <a:bodyPr/>
                     <a:lstStyle/>
                     <a:p>
-                      <a:pPr algn="l" indent="0" marL="0">
+                      <a:pPr marL="0" indent="0" algn="l">
                         <a:buNone/>
                       </a:pPr>
                       <a:r>
@@ -18780,7 +19622,7 @@
                       </a:endParaRPr>
                     </a:p>
                   </a:txBody>
-                  <a:tcPr marL="91440" marR="91440" marT="45720" marB="45720" anchor="ctr">
+                  <a:tcPr anchor="ctr">
                     <a:lnL w="6350" cap="flat" cmpd="sng" algn="ctr">
                       <a:solidFill>
                         <a:srgbClr val="2E3250"/>
@@ -18822,6 +19664,11 @@
                     </a:solidFill>
                   </a:tcPr>
                 </a:tc>
+                <a:extLst>
+                  <a:ext uri="{0D108BD9-81ED-4DB2-BD59-A6C34878D82A}">
+                    <a16:rowId xmlns:a16="http://schemas.microsoft.com/office/drawing/2014/main" val="10001"/>
+                  </a:ext>
+                </a:extLst>
               </a:tr>
               <a:tr h="237744">
                 <a:tc>
@@ -18829,7 +19676,7 @@
                     <a:bodyPr/>
                     <a:lstStyle/>
                     <a:p>
-                      <a:pPr algn="l" indent="0" marL="0">
+                      <a:pPr marL="0" indent="0" algn="l">
                         <a:buNone/>
                       </a:pPr>
                       <a:r>
@@ -18850,7 +19697,7 @@
                       </a:endParaRPr>
                     </a:p>
                   </a:txBody>
-                  <a:tcPr marL="91440" marR="91440" marT="45720" marB="45720" anchor="ctr">
+                  <a:tcPr anchor="ctr">
                     <a:lnL w="6350" cap="flat" cmpd="sng" algn="ctr">
                       <a:solidFill>
                         <a:srgbClr val="2E3250"/>
@@ -18897,7 +19744,7 @@
                     <a:bodyPr/>
                     <a:lstStyle/>
                     <a:p>
-                      <a:pPr algn="l" indent="0" marL="0">
+                      <a:pPr marL="0" indent="0" algn="l">
                         <a:buNone/>
                       </a:pPr>
                       <a:r>
@@ -18918,7 +19765,7 @@
                       </a:endParaRPr>
                     </a:p>
                   </a:txBody>
-                  <a:tcPr marL="91440" marR="91440" marT="45720" marB="45720" anchor="ctr">
+                  <a:tcPr anchor="ctr">
                     <a:lnL w="6350" cap="flat" cmpd="sng" algn="ctr">
                       <a:solidFill>
                         <a:srgbClr val="2E3250"/>
@@ -18965,7 +19812,7 @@
                     <a:bodyPr/>
                     <a:lstStyle/>
                     <a:p>
-                      <a:pPr algn="l" indent="0" marL="0">
+                      <a:pPr marL="0" indent="0" algn="l">
                         <a:buNone/>
                       </a:pPr>
                       <a:r>
@@ -18986,7 +19833,7 @@
                       </a:endParaRPr>
                     </a:p>
                   </a:txBody>
-                  <a:tcPr marL="91440" marR="91440" marT="45720" marB="45720" anchor="ctr">
+                  <a:tcPr anchor="ctr">
                     <a:lnL w="6350" cap="flat" cmpd="sng" algn="ctr">
                       <a:solidFill>
                         <a:srgbClr val="2E3250"/>
@@ -19028,6 +19875,11 @@
                     </a:solidFill>
                   </a:tcPr>
                 </a:tc>
+                <a:extLst>
+                  <a:ext uri="{0D108BD9-81ED-4DB2-BD59-A6C34878D82A}">
+                    <a16:rowId xmlns:a16="http://schemas.microsoft.com/office/drawing/2014/main" val="10002"/>
+                  </a:ext>
+                </a:extLst>
               </a:tr>
               <a:tr h="237744">
                 <a:tc>
@@ -19035,7 +19887,7 @@
                     <a:bodyPr/>
                     <a:lstStyle/>
                     <a:p>
-                      <a:pPr algn="l" indent="0" marL="0">
+                      <a:pPr marL="0" indent="0" algn="l">
                         <a:buNone/>
                       </a:pPr>
                       <a:r>
@@ -19056,7 +19908,7 @@
                       </a:endParaRPr>
                     </a:p>
                   </a:txBody>
-                  <a:tcPr marL="91440" marR="91440" marT="45720" marB="45720" anchor="ctr">
+                  <a:tcPr anchor="ctr">
                     <a:lnL w="6350" cap="flat" cmpd="sng" algn="ctr">
                       <a:solidFill>
                         <a:srgbClr val="2E3250"/>
@@ -19103,7 +19955,7 @@
                     <a:bodyPr/>
                     <a:lstStyle/>
                     <a:p>
-                      <a:pPr algn="l" indent="0" marL="0">
+                      <a:pPr marL="0" indent="0" algn="l">
                         <a:buNone/>
                       </a:pPr>
                       <a:r>
@@ -19124,7 +19976,7 @@
                       </a:endParaRPr>
                     </a:p>
                   </a:txBody>
-                  <a:tcPr marL="91440" marR="91440" marT="45720" marB="45720" anchor="ctr">
+                  <a:tcPr anchor="ctr">
                     <a:lnL w="6350" cap="flat" cmpd="sng" algn="ctr">
                       <a:solidFill>
                         <a:srgbClr val="2E3250"/>
@@ -19171,7 +20023,7 @@
                     <a:bodyPr/>
                     <a:lstStyle/>
                     <a:p>
-                      <a:pPr algn="l" indent="0" marL="0">
+                      <a:pPr marL="0" indent="0" algn="l">
                         <a:buNone/>
                       </a:pPr>
                       <a:r>
@@ -19192,7 +20044,7 @@
                       </a:endParaRPr>
                     </a:p>
                   </a:txBody>
-                  <a:tcPr marL="91440" marR="91440" marT="45720" marB="45720" anchor="ctr">
+                  <a:tcPr anchor="ctr">
                     <a:lnL w="6350" cap="flat" cmpd="sng" algn="ctr">
                       <a:solidFill>
                         <a:srgbClr val="2E3250"/>
@@ -19234,6 +20086,11 @@
                     </a:solidFill>
                   </a:tcPr>
                 </a:tc>
+                <a:extLst>
+                  <a:ext uri="{0D108BD9-81ED-4DB2-BD59-A6C34878D82A}">
+                    <a16:rowId xmlns:a16="http://schemas.microsoft.com/office/drawing/2014/main" val="10003"/>
+                  </a:ext>
+                </a:extLst>
               </a:tr>
               <a:tr h="237744">
                 <a:tc>
@@ -19241,7 +20098,7 @@
                     <a:bodyPr/>
                     <a:lstStyle/>
                     <a:p>
-                      <a:pPr algn="l" indent="0" marL="0">
+                      <a:pPr marL="0" indent="0" algn="l">
                         <a:buNone/>
                       </a:pPr>
                       <a:r>
@@ -19262,7 +20119,7 @@
                       </a:endParaRPr>
                     </a:p>
                   </a:txBody>
-                  <a:tcPr marL="91440" marR="91440" marT="45720" marB="45720" anchor="ctr">
+                  <a:tcPr anchor="ctr">
                     <a:lnL w="6350" cap="flat" cmpd="sng" algn="ctr">
                       <a:solidFill>
                         <a:srgbClr val="2E3250"/>
@@ -19309,7 +20166,7 @@
                     <a:bodyPr/>
                     <a:lstStyle/>
                     <a:p>
-                      <a:pPr algn="l" indent="0" marL="0">
+                      <a:pPr marL="0" indent="0" algn="l">
                         <a:buNone/>
                       </a:pPr>
                       <a:r>
@@ -19330,7 +20187,7 @@
                       </a:endParaRPr>
                     </a:p>
                   </a:txBody>
-                  <a:tcPr marL="91440" marR="91440" marT="45720" marB="45720" anchor="ctr">
+                  <a:tcPr anchor="ctr">
                     <a:lnL w="6350" cap="flat" cmpd="sng" algn="ctr">
                       <a:solidFill>
                         <a:srgbClr val="2E3250"/>
@@ -19377,7 +20234,7 @@
                     <a:bodyPr/>
                     <a:lstStyle/>
                     <a:p>
-                      <a:pPr algn="l" indent="0" marL="0">
+                      <a:pPr marL="0" indent="0" algn="l">
                         <a:buNone/>
                       </a:pPr>
                       <a:r>
@@ -19398,7 +20255,7 @@
                       </a:endParaRPr>
                     </a:p>
                   </a:txBody>
-                  <a:tcPr marL="91440" marR="91440" marT="45720" marB="45720" anchor="ctr">
+                  <a:tcPr anchor="ctr">
                     <a:lnL w="6350" cap="flat" cmpd="sng" algn="ctr">
                       <a:solidFill>
                         <a:srgbClr val="2E3250"/>
@@ -19440,6 +20297,11 @@
                     </a:solidFill>
                   </a:tcPr>
                 </a:tc>
+                <a:extLst>
+                  <a:ext uri="{0D108BD9-81ED-4DB2-BD59-A6C34878D82A}">
+                    <a16:rowId xmlns:a16="http://schemas.microsoft.com/office/drawing/2014/main" val="10004"/>
+                  </a:ext>
+                </a:extLst>
               </a:tr>
             </a:tbl>
           </a:graphicData>
@@ -19471,6 +20333,13 @@
             <a:prstDash val="solid"/>
           </a:ln>
         </p:spPr>
+        <p:txBody>
+          <a:bodyPr/>
+          <a:lstStyle/>
+          <a:p>
+            <a:endParaRPr lang="fr-FR"/>
+          </a:p>
+        </p:txBody>
       </p:sp>
       <p:sp>
         <p:nvSpPr>
@@ -19493,7 +20362,7 @@
           <a:bodyPr wrap="square" rtlCol="0" anchor="ctr"/>
           <a:lstStyle/>
           <a:p>
-            <a:pPr indent="0" marL="0">
+            <a:pPr marL="0" indent="0">
               <a:buNone/>
             </a:pPr>
             <a:r>
@@ -19532,7 +20401,7 @@
           <a:bodyPr wrap="square" rtlCol="0" anchor="ctr"/>
           <a:lstStyle/>
           <a:p>
-            <a:pPr indent="0" marL="0">
+            <a:pPr marL="0" indent="0">
               <a:buNone/>
             </a:pPr>
             <a:r>
@@ -19576,6 +20445,13 @@
             <a:prstDash val="solid"/>
           </a:ln>
         </p:spPr>
+        <p:txBody>
+          <a:bodyPr/>
+          <a:lstStyle/>
+          <a:p>
+            <a:endParaRPr lang="fr-FR"/>
+          </a:p>
+        </p:txBody>
       </p:sp>
       <p:sp>
         <p:nvSpPr>
@@ -19598,7 +20474,7 @@
           <a:bodyPr wrap="square" rtlCol="0" anchor="ctr"/>
           <a:lstStyle/>
           <a:p>
-            <a:pPr indent="0" marL="0">
+            <a:pPr marL="0" indent="0">
               <a:buNone/>
             </a:pPr>
             <a:r>
@@ -19637,7 +20513,7 @@
           <a:bodyPr wrap="square" rtlCol="0" anchor="ctr"/>
           <a:lstStyle/>
           <a:p>
-            <a:pPr indent="0" marL="0">
+            <a:pPr marL="0" indent="0">
               <a:buNone/>
             </a:pPr>
             <a:r>
@@ -19676,7 +20552,7 @@
           <a:bodyPr wrap="square" rtlCol="0" anchor="ctr"/>
           <a:lstStyle/>
           <a:p>
-            <a:pPr indent="0" marL="0">
+            <a:pPr marL="0" indent="0">
               <a:buNone/>
             </a:pPr>
             <a:r>
@@ -19720,6 +20596,13 @@
             <a:prstDash val="solid"/>
           </a:ln>
         </p:spPr>
+        <p:txBody>
+          <a:bodyPr/>
+          <a:lstStyle/>
+          <a:p>
+            <a:endParaRPr lang="fr-FR"/>
+          </a:p>
+        </p:txBody>
       </p:sp>
       <p:sp>
         <p:nvSpPr>
@@ -19742,7 +20625,7 @@
           <a:bodyPr wrap="square" rtlCol="0" anchor="ctr"/>
           <a:lstStyle/>
           <a:p>
-            <a:pPr algn="ctr" indent="0" marL="0">
+            <a:pPr marL="0" indent="0" algn="ctr">
               <a:buNone/>
             </a:pPr>
             <a:r>
@@ -19759,7 +20642,7 @@
             <a:endParaRPr lang="en-US" sz="850" dirty="0"/>
           </a:p>
           <a:p>
-            <a:pPr algn="ctr" indent="0" marL="0">
+            <a:pPr marL="0" indent="0" algn="ctr">
               <a:buNone/>
             </a:pPr>
             <a:r>
@@ -19800,6 +20683,13 @@
             <a:tailEnd type="arrow"/>
           </a:ln>
         </p:spPr>
+        <p:txBody>
+          <a:bodyPr/>
+          <a:lstStyle/>
+          <a:p>
+            <a:endParaRPr lang="fr-FR"/>
+          </a:p>
+        </p:txBody>
       </p:sp>
       <p:sp>
         <p:nvSpPr>
@@ -19827,6 +20717,13 @@
             <a:prstDash val="solid"/>
           </a:ln>
         </p:spPr>
+        <p:txBody>
+          <a:bodyPr/>
+          <a:lstStyle/>
+          <a:p>
+            <a:endParaRPr lang="fr-FR"/>
+          </a:p>
+        </p:txBody>
       </p:sp>
       <p:sp>
         <p:nvSpPr>
@@ -19849,7 +20746,7 @@
           <a:bodyPr wrap="square" rtlCol="0" anchor="ctr"/>
           <a:lstStyle/>
           <a:p>
-            <a:pPr algn="ctr" indent="0" marL="0">
+            <a:pPr marL="0" indent="0" algn="ctr">
               <a:buNone/>
             </a:pPr>
             <a:r>
@@ -19866,7 +20763,7 @@
             <a:endParaRPr lang="en-US" sz="850" dirty="0"/>
           </a:p>
           <a:p>
-            <a:pPr algn="ctr" indent="0" marL="0">
+            <a:pPr marL="0" indent="0" algn="ctr">
               <a:buNone/>
             </a:pPr>
             <a:r>
@@ -19907,6 +20804,13 @@
             <a:tailEnd type="arrow"/>
           </a:ln>
         </p:spPr>
+        <p:txBody>
+          <a:bodyPr/>
+          <a:lstStyle/>
+          <a:p>
+            <a:endParaRPr lang="fr-FR"/>
+          </a:p>
+        </p:txBody>
       </p:sp>
       <p:sp>
         <p:nvSpPr>
@@ -19934,6 +20838,13 @@
             <a:prstDash val="solid"/>
           </a:ln>
         </p:spPr>
+        <p:txBody>
+          <a:bodyPr/>
+          <a:lstStyle/>
+          <a:p>
+            <a:endParaRPr lang="fr-FR"/>
+          </a:p>
+        </p:txBody>
       </p:sp>
       <p:sp>
         <p:nvSpPr>
@@ -19956,7 +20867,7 @@
           <a:bodyPr wrap="square" rtlCol="0" anchor="ctr"/>
           <a:lstStyle/>
           <a:p>
-            <a:pPr algn="ctr" indent="0" marL="0">
+            <a:pPr marL="0" indent="0" algn="ctr">
               <a:buNone/>
             </a:pPr>
             <a:r>
@@ -19973,7 +20884,7 @@
             <a:endParaRPr lang="en-US" sz="850" dirty="0"/>
           </a:p>
           <a:p>
-            <a:pPr algn="ctr" indent="0" marL="0">
+            <a:pPr marL="0" indent="0" algn="ctr">
               <a:buNone/>
             </a:pPr>
             <a:r>
@@ -20014,6 +20925,13 @@
             <a:tailEnd type="arrow"/>
           </a:ln>
         </p:spPr>
+        <p:txBody>
+          <a:bodyPr/>
+          <a:lstStyle/>
+          <a:p>
+            <a:endParaRPr lang="fr-FR"/>
+          </a:p>
+        </p:txBody>
       </p:sp>
       <p:sp>
         <p:nvSpPr>
@@ -20041,6 +20959,13 @@
             <a:prstDash val="solid"/>
           </a:ln>
         </p:spPr>
+        <p:txBody>
+          <a:bodyPr/>
+          <a:lstStyle/>
+          <a:p>
+            <a:endParaRPr lang="fr-FR"/>
+          </a:p>
+        </p:txBody>
       </p:sp>
       <p:sp>
         <p:nvSpPr>
@@ -20063,7 +20988,7 @@
           <a:bodyPr wrap="square" rtlCol="0" anchor="ctr"/>
           <a:lstStyle/>
           <a:p>
-            <a:pPr algn="ctr" indent="0" marL="0">
+            <a:pPr marL="0" indent="0" algn="ctr">
               <a:buNone/>
             </a:pPr>
             <a:r>
@@ -20080,7 +21005,7 @@
             <a:endParaRPr lang="en-US" sz="850" dirty="0"/>
           </a:p>
           <a:p>
-            <a:pPr algn="ctr" indent="0" marL="0">
+            <a:pPr marL="0" indent="0" algn="ctr">
               <a:buNone/>
             </a:pPr>
             <a:r>
@@ -20121,6 +21046,13 @@
             <a:tailEnd type="arrow"/>
           </a:ln>
         </p:spPr>
+        <p:txBody>
+          <a:bodyPr/>
+          <a:lstStyle/>
+          <a:p>
+            <a:endParaRPr lang="fr-FR"/>
+          </a:p>
+        </p:txBody>
       </p:sp>
       <p:sp>
         <p:nvSpPr>
@@ -20148,6 +21080,13 @@
             <a:prstDash val="solid"/>
           </a:ln>
         </p:spPr>
+        <p:txBody>
+          <a:bodyPr/>
+          <a:lstStyle/>
+          <a:p>
+            <a:endParaRPr lang="fr-FR"/>
+          </a:p>
+        </p:txBody>
       </p:sp>
       <p:sp>
         <p:nvSpPr>
@@ -20170,7 +21109,7 @@
           <a:bodyPr wrap="square" rtlCol="0" anchor="ctr"/>
           <a:lstStyle/>
           <a:p>
-            <a:pPr algn="ctr" indent="0" marL="0">
+            <a:pPr marL="0" indent="0" algn="ctr">
               <a:buNone/>
             </a:pPr>
             <a:r>
@@ -20187,7 +21126,7 @@
             <a:endParaRPr lang="en-US" sz="850" dirty="0"/>
           </a:p>
           <a:p>
-            <a:pPr algn="ctr" indent="0" marL="0">
+            <a:pPr marL="0" indent="0" algn="ctr">
               <a:buNone/>
             </a:pPr>
             <a:r>
@@ -20231,6 +21170,13 @@
             <a:prstDash val="solid"/>
           </a:ln>
         </p:spPr>
+        <p:txBody>
+          <a:bodyPr/>
+          <a:lstStyle/>
+          <a:p>
+            <a:endParaRPr lang="fr-FR"/>
+          </a:p>
+        </p:txBody>
       </p:sp>
       <p:sp>
         <p:nvSpPr>
@@ -20253,7 +21199,7 @@
           <a:bodyPr wrap="square" rtlCol="0" anchor="ctr"/>
           <a:lstStyle/>
           <a:p>
-            <a:pPr indent="0" marL="0">
+            <a:pPr marL="0" indent="0">
               <a:buNone/>
             </a:pPr>
             <a:r>
@@ -20292,7 +21238,7 @@
           <a:bodyPr wrap="square" rtlCol="0" anchor="ctr"/>
           <a:lstStyle/>
           <a:p>
-            <a:pPr indent="0" marL="0">
+            <a:pPr marL="0" indent="0">
               <a:buNone/>
             </a:pPr>
             <a:r>
@@ -20336,6 +21282,13 @@
             <a:prstDash val="solid"/>
           </a:ln>
         </p:spPr>
+        <p:txBody>
+          <a:bodyPr/>
+          <a:lstStyle/>
+          <a:p>
+            <a:endParaRPr lang="fr-FR"/>
+          </a:p>
+        </p:txBody>
       </p:sp>
       <p:sp>
         <p:nvSpPr>
@@ -20358,7 +21311,7 @@
           <a:bodyPr wrap="square" rtlCol="0" anchor="ctr"/>
           <a:lstStyle/>
           <a:p>
-            <a:pPr indent="0" marL="0">
+            <a:pPr marL="0" indent="0">
               <a:buNone/>
             </a:pPr>
             <a:r>
@@ -20397,7 +21350,7 @@
           <a:bodyPr wrap="square" rtlCol="0" anchor="ctr"/>
           <a:lstStyle/>
           <a:p>
-            <a:pPr indent="0" marL="0">
+            <a:pPr marL="0" indent="0">
               <a:buNone/>
             </a:pPr>
             <a:r>
@@ -20441,6 +21394,13 @@
             <a:prstDash val="solid"/>
           </a:ln>
         </p:spPr>
+        <p:txBody>
+          <a:bodyPr/>
+          <a:lstStyle/>
+          <a:p>
+            <a:endParaRPr lang="fr-FR"/>
+          </a:p>
+        </p:txBody>
       </p:sp>
       <p:sp>
         <p:nvSpPr>
@@ -20463,7 +21423,7 @@
           <a:bodyPr wrap="square" rtlCol="0" anchor="ctr"/>
           <a:lstStyle/>
           <a:p>
-            <a:pPr indent="0" marL="0">
+            <a:pPr marL="0" indent="0">
               <a:buNone/>
             </a:pPr>
             <a:r>
@@ -20502,7 +21462,7 @@
           <a:bodyPr wrap="square" rtlCol="0" anchor="ctr"/>
           <a:lstStyle/>
           <a:p>
-            <a:pPr indent="0" marL="0">
+            <a:pPr marL="0" indent="0">
               <a:buNone/>
             </a:pPr>
             <a:r>
@@ -20546,6 +21506,13 @@
             <a:prstDash val="solid"/>
           </a:ln>
         </p:spPr>
+        <p:txBody>
+          <a:bodyPr/>
+          <a:lstStyle/>
+          <a:p>
+            <a:endParaRPr lang="fr-FR"/>
+          </a:p>
+        </p:txBody>
       </p:sp>
       <p:sp>
         <p:nvSpPr>
@@ -20568,7 +21535,7 @@
           <a:bodyPr wrap="square" rtlCol="0" anchor="ctr"/>
           <a:lstStyle/>
           <a:p>
-            <a:pPr indent="0" marL="0">
+            <a:pPr marL="0" indent="0">
               <a:buNone/>
             </a:pPr>
             <a:r>
@@ -20607,7 +21574,7 @@
           <a:bodyPr wrap="square" rtlCol="0" anchor="ctr"/>
           <a:lstStyle/>
           <a:p>
-            <a:pPr indent="0" marL="0">
+            <a:pPr marL="0" indent="0">
               <a:buNone/>
             </a:pPr>
             <a:r>
@@ -20651,6 +21618,13 @@
             <a:prstDash val="solid"/>
           </a:ln>
         </p:spPr>
+        <p:txBody>
+          <a:bodyPr/>
+          <a:lstStyle/>
+          <a:p>
+            <a:endParaRPr lang="fr-FR"/>
+          </a:p>
+        </p:txBody>
       </p:sp>
       <p:sp>
         <p:nvSpPr>
@@ -20673,7 +21647,7 @@
           <a:bodyPr wrap="square" rtlCol="0" anchor="ctr"/>
           <a:lstStyle/>
           <a:p>
-            <a:pPr indent="0" marL="0">
+            <a:pPr marL="0" indent="0">
               <a:buNone/>
             </a:pPr>
             <a:r>
@@ -20712,7 +21686,7 @@
           <a:bodyPr wrap="square" rtlCol="0" anchor="ctr"/>
           <a:lstStyle/>
           <a:p>
-            <a:pPr indent="0" marL="0">
+            <a:pPr marL="0" indent="0">
               <a:buNone/>
             </a:pPr>
             <a:r>
@@ -20756,6 +21730,13 @@
             <a:prstDash val="solid"/>
           </a:ln>
         </p:spPr>
+        <p:txBody>
+          <a:bodyPr/>
+          <a:lstStyle/>
+          <a:p>
+            <a:endParaRPr lang="fr-FR"/>
+          </a:p>
+        </p:txBody>
       </p:sp>
       <p:sp>
         <p:nvSpPr>
@@ -20778,7 +21759,7 @@
           <a:bodyPr wrap="square" rtlCol="0" anchor="ctr"/>
           <a:lstStyle/>
           <a:p>
-            <a:pPr indent="0" marL="0">
+            <a:pPr marL="0" indent="0">
               <a:buNone/>
             </a:pPr>
             <a:r>
@@ -20817,7 +21798,7 @@
           <a:bodyPr wrap="square" rtlCol="0" anchor="ctr"/>
           <a:lstStyle/>
           <a:p>
-            <a:pPr indent="0" marL="0">
+            <a:pPr marL="0" indent="0">
               <a:buNone/>
             </a:pPr>
             <a:r>
@@ -20851,6 +21832,7 @@
         <a:solidFill>
           <a:srgbClr val="0F1117"/>
         </a:solidFill>
+        <a:effectLst/>
       </p:bgPr>
     </p:bg>
     <p:spTree>
@@ -20891,6 +21873,13 @@
             <a:prstDash val="solid"/>
           </a:ln>
         </p:spPr>
+        <p:txBody>
+          <a:bodyPr/>
+          <a:lstStyle/>
+          <a:p>
+            <a:endParaRPr lang="fr-FR"/>
+          </a:p>
+        </p:txBody>
       </p:sp>
       <p:sp>
         <p:nvSpPr>
@@ -20918,6 +21907,13 @@
             <a:prstDash val="solid"/>
           </a:ln>
         </p:spPr>
+        <p:txBody>
+          <a:bodyPr/>
+          <a:lstStyle/>
+          <a:p>
+            <a:endParaRPr lang="fr-FR"/>
+          </a:p>
+        </p:txBody>
       </p:sp>
       <p:sp>
         <p:nvSpPr>
@@ -20940,7 +21936,7 @@
           <a:bodyPr wrap="square" lIns="0" tIns="0" rIns="0" bIns="0" rtlCol="0" anchor="ctr"/>
           <a:lstStyle/>
           <a:p>
-            <a:pPr algn="ctr" indent="0" marL="0">
+            <a:pPr marL="0" indent="0" algn="ctr">
               <a:buNone/>
             </a:pPr>
             <a:r>
@@ -20976,7 +21972,7 @@
           <a:bodyPr wrap="square" rtlCol="0" anchor="ctr"/>
           <a:lstStyle/>
           <a:p>
-            <a:pPr indent="0" marL="0">
+            <a:pPr marL="0" indent="0">
               <a:buNone/>
             </a:pPr>
             <a:r>
@@ -21015,7 +22011,7 @@
           <a:bodyPr wrap="square" rtlCol="0" anchor="ctr"/>
           <a:lstStyle/>
           <a:p>
-            <a:pPr indent="0" marL="0">
+            <a:pPr marL="0" indent="0">
               <a:buNone/>
             </a:pPr>
             <a:r>
@@ -21049,16 +22045,34 @@
         </p:nvGraphicFramePr>
         <p:xfrm>
           <a:off x="320040" y="1042416"/>
-          <a:ext cx="8503920" cy="1691640"/>
+          <a:ext cx="8503920" cy="1569720"/>
         </p:xfrm>
         <a:graphic>
           <a:graphicData uri="http://schemas.openxmlformats.org/drawingml/2006/table">
             <a:tbl>
               <a:tblPr/>
               <a:tblGrid>
-                <a:gridCol w="1828800"/>
-                <a:gridCol w="2286000"/>
-                <a:gridCol w="4389120"/>
+                <a:gridCol w="1828800">
+                  <a:extLst>
+                    <a:ext uri="{9D8B030D-6E8A-4147-A177-3AD203B41FA5}">
+                      <a16:colId xmlns:a16="http://schemas.microsoft.com/office/drawing/2014/main" val="20000"/>
+                    </a:ext>
+                  </a:extLst>
+                </a:gridCol>
+                <a:gridCol w="2286000">
+                  <a:extLst>
+                    <a:ext uri="{9D8B030D-6E8A-4147-A177-3AD203B41FA5}">
+                      <a16:colId xmlns:a16="http://schemas.microsoft.com/office/drawing/2014/main" val="20001"/>
+                    </a:ext>
+                  </a:extLst>
+                </a:gridCol>
+                <a:gridCol w="4389120">
+                  <a:extLst>
+                    <a:ext uri="{9D8B030D-6E8A-4147-A177-3AD203B41FA5}">
+                      <a16:colId xmlns:a16="http://schemas.microsoft.com/office/drawing/2014/main" val="20002"/>
+                    </a:ext>
+                  </a:extLst>
+                </a:gridCol>
               </a:tblGrid>
               <a:tr h="237744">
                 <a:tc>
@@ -21066,7 +22080,7 @@
                     <a:bodyPr/>
                     <a:lstStyle/>
                     <a:p>
-                      <a:pPr algn="l" indent="0" marL="0">
+                      <a:pPr marL="0" indent="0" algn="l">
                         <a:buNone/>
                       </a:pPr>
                       <a:r>
@@ -21087,7 +22101,7 @@
                       </a:endParaRPr>
                     </a:p>
                   </a:txBody>
-                  <a:tcPr marL="91440" marR="91440" marT="45720" marB="45720" anchor="ctr">
+                  <a:tcPr anchor="ctr">
                     <a:lnL w="6350" cap="flat" cmpd="sng" algn="ctr">
                       <a:solidFill>
                         <a:srgbClr val="2E3250"/>
@@ -21134,7 +22148,7 @@
                     <a:bodyPr/>
                     <a:lstStyle/>
                     <a:p>
-                      <a:pPr algn="l" indent="0" marL="0">
+                      <a:pPr marL="0" indent="0" algn="l">
                         <a:buNone/>
                       </a:pPr>
                       <a:r>
@@ -21155,7 +22169,7 @@
                       </a:endParaRPr>
                     </a:p>
                   </a:txBody>
-                  <a:tcPr marL="91440" marR="91440" marT="45720" marB="45720" anchor="ctr">
+                  <a:tcPr anchor="ctr">
                     <a:lnL w="6350" cap="flat" cmpd="sng" algn="ctr">
                       <a:solidFill>
                         <a:srgbClr val="2E3250"/>
@@ -21202,7 +22216,7 @@
                     <a:bodyPr/>
                     <a:lstStyle/>
                     <a:p>
-                      <a:pPr algn="l" indent="0" marL="0">
+                      <a:pPr marL="0" indent="0" algn="l">
                         <a:buNone/>
                       </a:pPr>
                       <a:r>
@@ -21223,7 +22237,7 @@
                       </a:endParaRPr>
                     </a:p>
                   </a:txBody>
-                  <a:tcPr marL="91440" marR="91440" marT="45720" marB="45720" anchor="ctr">
+                  <a:tcPr anchor="ctr">
                     <a:lnL w="6350" cap="flat" cmpd="sng" algn="ctr">
                       <a:solidFill>
                         <a:srgbClr val="2E3250"/>
@@ -21265,6 +22279,11 @@
                     </a:solidFill>
                   </a:tcPr>
                 </a:tc>
+                <a:extLst>
+                  <a:ext uri="{0D108BD9-81ED-4DB2-BD59-A6C34878D82A}">
+                    <a16:rowId xmlns:a16="http://schemas.microsoft.com/office/drawing/2014/main" val="10000"/>
+                  </a:ext>
+                </a:extLst>
               </a:tr>
               <a:tr h="237744">
                 <a:tc>
@@ -21272,7 +22291,7 @@
                     <a:bodyPr/>
                     <a:lstStyle/>
                     <a:p>
-                      <a:pPr algn="l" indent="0" marL="0">
+                      <a:pPr marL="0" indent="0" algn="l">
                         <a:buNone/>
                       </a:pPr>
                       <a:r>
@@ -21293,7 +22312,7 @@
                       </a:endParaRPr>
                     </a:p>
                   </a:txBody>
-                  <a:tcPr marL="91440" marR="91440" marT="45720" marB="45720" anchor="ctr">
+                  <a:tcPr anchor="ctr">
                     <a:lnL w="6350" cap="flat" cmpd="sng" algn="ctr">
                       <a:solidFill>
                         <a:srgbClr val="2E3250"/>
@@ -21340,7 +22359,7 @@
                     <a:bodyPr/>
                     <a:lstStyle/>
                     <a:p>
-                      <a:pPr algn="l" indent="0" marL="0">
+                      <a:pPr marL="0" indent="0" algn="l">
                         <a:buNone/>
                       </a:pPr>
                       <a:r>
@@ -21361,7 +22380,7 @@
                       </a:endParaRPr>
                     </a:p>
                   </a:txBody>
-                  <a:tcPr marL="91440" marR="91440" marT="45720" marB="45720" anchor="ctr">
+                  <a:tcPr anchor="ctr">
                     <a:lnL w="6350" cap="flat" cmpd="sng" algn="ctr">
                       <a:solidFill>
                         <a:srgbClr val="2E3250"/>
@@ -21408,7 +22427,7 @@
                     <a:bodyPr/>
                     <a:lstStyle/>
                     <a:p>
-                      <a:pPr algn="l" indent="0" marL="0">
+                      <a:pPr marL="0" indent="0" algn="l">
                         <a:buNone/>
                       </a:pPr>
                       <a:r>
@@ -21429,7 +22448,7 @@
                       </a:endParaRPr>
                     </a:p>
                   </a:txBody>
-                  <a:tcPr marL="91440" marR="91440" marT="45720" marB="45720" anchor="ctr">
+                  <a:tcPr anchor="ctr">
                     <a:lnL w="6350" cap="flat" cmpd="sng" algn="ctr">
                       <a:solidFill>
                         <a:srgbClr val="2E3250"/>
@@ -21471,6 +22490,11 @@
                     </a:solidFill>
                   </a:tcPr>
                 </a:tc>
+                <a:extLst>
+                  <a:ext uri="{0D108BD9-81ED-4DB2-BD59-A6C34878D82A}">
+                    <a16:rowId xmlns:a16="http://schemas.microsoft.com/office/drawing/2014/main" val="10001"/>
+                  </a:ext>
+                </a:extLst>
               </a:tr>
               <a:tr h="237744">
                 <a:tc>
@@ -21478,7 +22502,7 @@
                     <a:bodyPr/>
                     <a:lstStyle/>
                     <a:p>
-                      <a:pPr algn="l" indent="0" marL="0">
+                      <a:pPr marL="0" indent="0" algn="l">
                         <a:buNone/>
                       </a:pPr>
                       <a:r>
@@ -21499,7 +22523,7 @@
                       </a:endParaRPr>
                     </a:p>
                   </a:txBody>
-                  <a:tcPr marL="91440" marR="91440" marT="45720" marB="45720" anchor="ctr">
+                  <a:tcPr anchor="ctr">
                     <a:lnL w="6350" cap="flat" cmpd="sng" algn="ctr">
                       <a:solidFill>
                         <a:srgbClr val="2E3250"/>
@@ -21546,7 +22570,7 @@
                     <a:bodyPr/>
                     <a:lstStyle/>
                     <a:p>
-                      <a:pPr algn="l" indent="0" marL="0">
+                      <a:pPr marL="0" indent="0" algn="l">
                         <a:buNone/>
                       </a:pPr>
                       <a:r>
@@ -21567,7 +22591,7 @@
                       </a:endParaRPr>
                     </a:p>
                   </a:txBody>
-                  <a:tcPr marL="91440" marR="91440" marT="45720" marB="45720" anchor="ctr">
+                  <a:tcPr anchor="ctr">
                     <a:lnL w="6350" cap="flat" cmpd="sng" algn="ctr">
                       <a:solidFill>
                         <a:srgbClr val="2E3250"/>
@@ -21614,7 +22638,7 @@
                     <a:bodyPr/>
                     <a:lstStyle/>
                     <a:p>
-                      <a:pPr algn="l" indent="0" marL="0">
+                      <a:pPr marL="0" indent="0" algn="l">
                         <a:buNone/>
                       </a:pPr>
                       <a:r>
@@ -21635,7 +22659,7 @@
                       </a:endParaRPr>
                     </a:p>
                   </a:txBody>
-                  <a:tcPr marL="91440" marR="91440" marT="45720" marB="45720" anchor="ctr">
+                  <a:tcPr anchor="ctr">
                     <a:lnL w="6350" cap="flat" cmpd="sng" algn="ctr">
                       <a:solidFill>
                         <a:srgbClr val="2E3250"/>
@@ -21677,6 +22701,11 @@
                     </a:solidFill>
                   </a:tcPr>
                 </a:tc>
+                <a:extLst>
+                  <a:ext uri="{0D108BD9-81ED-4DB2-BD59-A6C34878D82A}">
+                    <a16:rowId xmlns:a16="http://schemas.microsoft.com/office/drawing/2014/main" val="10002"/>
+                  </a:ext>
+                </a:extLst>
               </a:tr>
               <a:tr h="237744">
                 <a:tc>
@@ -21684,7 +22713,7 @@
                     <a:bodyPr/>
                     <a:lstStyle/>
                     <a:p>
-                      <a:pPr algn="l" indent="0" marL="0">
+                      <a:pPr marL="0" indent="0" algn="l">
                         <a:buNone/>
                       </a:pPr>
                       <a:r>
@@ -21705,7 +22734,7 @@
                       </a:endParaRPr>
                     </a:p>
                   </a:txBody>
-                  <a:tcPr marL="91440" marR="91440" marT="45720" marB="45720" anchor="ctr">
+                  <a:tcPr anchor="ctr">
                     <a:lnL w="6350" cap="flat" cmpd="sng" algn="ctr">
                       <a:solidFill>
                         <a:srgbClr val="2E3250"/>
@@ -21752,7 +22781,7 @@
                     <a:bodyPr/>
                     <a:lstStyle/>
                     <a:p>
-                      <a:pPr algn="l" indent="0" marL="0">
+                      <a:pPr marL="0" indent="0" algn="l">
                         <a:buNone/>
                       </a:pPr>
                       <a:r>
@@ -21773,7 +22802,7 @@
                       </a:endParaRPr>
                     </a:p>
                   </a:txBody>
-                  <a:tcPr marL="91440" marR="91440" marT="45720" marB="45720" anchor="ctr">
+                  <a:tcPr anchor="ctr">
                     <a:lnL w="6350" cap="flat" cmpd="sng" algn="ctr">
                       <a:solidFill>
                         <a:srgbClr val="2E3250"/>
@@ -21820,7 +22849,7 @@
                     <a:bodyPr/>
                     <a:lstStyle/>
                     <a:p>
-                      <a:pPr algn="l" indent="0" marL="0">
+                      <a:pPr marL="0" indent="0" algn="l">
                         <a:buNone/>
                       </a:pPr>
                       <a:r>
@@ -21841,7 +22870,7 @@
                       </a:endParaRPr>
                     </a:p>
                   </a:txBody>
-                  <a:tcPr marL="91440" marR="91440" marT="45720" marB="45720" anchor="ctr">
+                  <a:tcPr anchor="ctr">
                     <a:lnL w="6350" cap="flat" cmpd="sng" algn="ctr">
                       <a:solidFill>
                         <a:srgbClr val="2E3250"/>
@@ -21883,6 +22912,11 @@
                     </a:solidFill>
                   </a:tcPr>
                 </a:tc>
+                <a:extLst>
+                  <a:ext uri="{0D108BD9-81ED-4DB2-BD59-A6C34878D82A}">
+                    <a16:rowId xmlns:a16="http://schemas.microsoft.com/office/drawing/2014/main" val="10003"/>
+                  </a:ext>
+                </a:extLst>
               </a:tr>
               <a:tr h="237744">
                 <a:tc>
@@ -21890,7 +22924,7 @@
                     <a:bodyPr/>
                     <a:lstStyle/>
                     <a:p>
-                      <a:pPr algn="l" indent="0" marL="0">
+                      <a:pPr marL="0" indent="0" algn="l">
                         <a:buNone/>
                       </a:pPr>
                       <a:r>
@@ -21911,7 +22945,7 @@
                       </a:endParaRPr>
                     </a:p>
                   </a:txBody>
-                  <a:tcPr marL="91440" marR="91440" marT="45720" marB="45720" anchor="ctr">
+                  <a:tcPr anchor="ctr">
                     <a:lnL w="6350" cap="flat" cmpd="sng" algn="ctr">
                       <a:solidFill>
                         <a:srgbClr val="2E3250"/>
@@ -21958,7 +22992,7 @@
                     <a:bodyPr/>
                     <a:lstStyle/>
                     <a:p>
-                      <a:pPr algn="l" indent="0" marL="0">
+                      <a:pPr marL="0" indent="0" algn="l">
                         <a:buNone/>
                       </a:pPr>
                       <a:r>
@@ -21979,7 +23013,7 @@
                       </a:endParaRPr>
                     </a:p>
                   </a:txBody>
-                  <a:tcPr marL="91440" marR="91440" marT="45720" marB="45720" anchor="ctr">
+                  <a:tcPr anchor="ctr">
                     <a:lnL w="6350" cap="flat" cmpd="sng" algn="ctr">
                       <a:solidFill>
                         <a:srgbClr val="2E3250"/>
@@ -22026,7 +23060,7 @@
                     <a:bodyPr/>
                     <a:lstStyle/>
                     <a:p>
-                      <a:pPr algn="l" indent="0" marL="0">
+                      <a:pPr marL="0" indent="0" algn="l">
                         <a:buNone/>
                       </a:pPr>
                       <a:r>
@@ -22047,7 +23081,7 @@
                       </a:endParaRPr>
                     </a:p>
                   </a:txBody>
-                  <a:tcPr marL="91440" marR="91440" marT="45720" marB="45720" anchor="ctr">
+                  <a:tcPr anchor="ctr">
                     <a:lnL w="6350" cap="flat" cmpd="sng" algn="ctr">
                       <a:solidFill>
                         <a:srgbClr val="2E3250"/>
@@ -22089,6 +23123,11 @@
                     </a:solidFill>
                   </a:tcPr>
                 </a:tc>
+                <a:extLst>
+                  <a:ext uri="{0D108BD9-81ED-4DB2-BD59-A6C34878D82A}">
+                    <a16:rowId xmlns:a16="http://schemas.microsoft.com/office/drawing/2014/main" val="10004"/>
+                  </a:ext>
+                </a:extLst>
               </a:tr>
               <a:tr h="237744">
                 <a:tc>
@@ -22096,7 +23135,7 @@
                     <a:bodyPr/>
                     <a:lstStyle/>
                     <a:p>
-                      <a:pPr algn="l" indent="0" marL="0">
+                      <a:pPr marL="0" indent="0" algn="l">
                         <a:buNone/>
                       </a:pPr>
                       <a:r>
@@ -22117,7 +23156,7 @@
                       </a:endParaRPr>
                     </a:p>
                   </a:txBody>
-                  <a:tcPr marL="91440" marR="91440" marT="45720" marB="45720" anchor="ctr">
+                  <a:tcPr anchor="ctr">
                     <a:lnL w="6350" cap="flat" cmpd="sng" algn="ctr">
                       <a:solidFill>
                         <a:srgbClr val="2E3250"/>
@@ -22164,7 +23203,7 @@
                     <a:bodyPr/>
                     <a:lstStyle/>
                     <a:p>
-                      <a:pPr algn="l" indent="0" marL="0">
+                      <a:pPr marL="0" indent="0" algn="l">
                         <a:buNone/>
                       </a:pPr>
                       <a:r>
@@ -22185,7 +23224,7 @@
                       </a:endParaRPr>
                     </a:p>
                   </a:txBody>
-                  <a:tcPr marL="91440" marR="91440" marT="45720" marB="45720" anchor="ctr">
+                  <a:tcPr anchor="ctr">
                     <a:lnL w="6350" cap="flat" cmpd="sng" algn="ctr">
                       <a:solidFill>
                         <a:srgbClr val="2E3250"/>
@@ -22232,7 +23271,7 @@
                     <a:bodyPr/>
                     <a:lstStyle/>
                     <a:p>
-                      <a:pPr algn="l" indent="0" marL="0">
+                      <a:pPr marL="0" indent="0" algn="l">
                         <a:buNone/>
                       </a:pPr>
                       <a:r>
@@ -22253,7 +23292,7 @@
                       </a:endParaRPr>
                     </a:p>
                   </a:txBody>
-                  <a:tcPr marL="91440" marR="91440" marT="45720" marB="45720" anchor="ctr">
+                  <a:tcPr anchor="ctr">
                     <a:lnL w="6350" cap="flat" cmpd="sng" algn="ctr">
                       <a:solidFill>
                         <a:srgbClr val="2E3250"/>
@@ -22295,6 +23334,11 @@
                     </a:solidFill>
                   </a:tcPr>
                 </a:tc>
+                <a:extLst>
+                  <a:ext uri="{0D108BD9-81ED-4DB2-BD59-A6C34878D82A}">
+                    <a16:rowId xmlns:a16="http://schemas.microsoft.com/office/drawing/2014/main" val="10005"/>
+                  </a:ext>
+                </a:extLst>
               </a:tr>
             </a:tbl>
           </a:graphicData>
@@ -22302,7 +23346,7 @@
       </p:graphicFrame>
       <p:sp>
         <p:nvSpPr>
-          <p:cNvPr id="8" name="Shape 5"/>
+          <p:cNvPr id="7" name="Shape 5"/>
           <p:cNvSpPr/>
           <p:nvPr/>
         </p:nvSpPr>
@@ -22326,6 +23370,13 @@
             <a:prstDash val="solid"/>
           </a:ln>
         </p:spPr>
+        <p:txBody>
+          <a:bodyPr/>
+          <a:lstStyle/>
+          <a:p>
+            <a:endParaRPr lang="fr-FR"/>
+          </a:p>
+        </p:txBody>
       </p:sp>
       <p:sp>
         <p:nvSpPr>
@@ -22348,7 +23399,7 @@
           <a:bodyPr wrap="square" rtlCol="0" anchor="ctr"/>
           <a:lstStyle/>
           <a:p>
-            <a:pPr indent="0" marL="0">
+            <a:pPr marL="0" indent="0">
               <a:buNone/>
             </a:pPr>
             <a:r>
@@ -22387,7 +23438,7 @@
           <a:bodyPr wrap="square" rtlCol="0" anchor="ctr"/>
           <a:lstStyle/>
           <a:p>
-            <a:pPr indent="0" marL="0">
+            <a:pPr marL="0" indent="0">
               <a:buNone/>
             </a:pPr>
             <a:r>
@@ -22426,11 +23477,11 @@
           <a:bodyPr wrap="square" rtlCol="0" anchor="ctr"/>
           <a:lstStyle/>
           <a:p>
-            <a:pPr indent="0" marL="0">
+            <a:pPr marL="0" indent="0">
               <a:buNone/>
             </a:pPr>
             <a:r>
-              <a:rPr lang="en-US" sz="800" b="1" spc="100" kern="0" dirty="0">
+              <a:rPr lang="en-US" sz="800" b="1" kern="0" spc="100" dirty="0">
                 <a:solidFill>
                   <a:srgbClr val="64748B"/>
                 </a:solidFill>
@@ -22470,6 +23521,13 @@
             <a:prstDash val="solid"/>
           </a:ln>
         </p:spPr>
+        <p:txBody>
+          <a:bodyPr/>
+          <a:lstStyle/>
+          <a:p>
+            <a:endParaRPr lang="fr-FR"/>
+          </a:p>
+        </p:txBody>
       </p:sp>
       <p:sp>
         <p:nvSpPr>
@@ -22492,7 +23550,7 @@
           <a:bodyPr wrap="square" rtlCol="0" anchor="ctr"/>
           <a:lstStyle/>
           <a:p>
-            <a:pPr indent="0" marL="0">
+            <a:pPr marL="0" indent="0">
               <a:buNone/>
             </a:pPr>
             <a:r>
@@ -22531,7 +23589,7 @@
           <a:bodyPr wrap="square" rtlCol="0" anchor="ctr"/>
           <a:lstStyle/>
           <a:p>
-            <a:pPr indent="0" marL="0">
+            <a:pPr marL="0" indent="0">
               <a:buNone/>
             </a:pPr>
             <a:r>
@@ -22575,6 +23633,13 @@
             <a:prstDash val="solid"/>
           </a:ln>
         </p:spPr>
+        <p:txBody>
+          <a:bodyPr/>
+          <a:lstStyle/>
+          <a:p>
+            <a:endParaRPr lang="fr-FR"/>
+          </a:p>
+        </p:txBody>
       </p:sp>
       <p:sp>
         <p:nvSpPr>
@@ -22597,7 +23662,7 @@
           <a:bodyPr wrap="square" rtlCol="0" anchor="ctr"/>
           <a:lstStyle/>
           <a:p>
-            <a:pPr indent="0" marL="0">
+            <a:pPr marL="0" indent="0">
               <a:buNone/>
             </a:pPr>
             <a:r>
@@ -22636,7 +23701,7 @@
           <a:bodyPr wrap="square" rtlCol="0" anchor="ctr"/>
           <a:lstStyle/>
           <a:p>
-            <a:pPr indent="0" marL="0">
+            <a:pPr marL="0" indent="0">
               <a:buNone/>
             </a:pPr>
             <a:r>
@@ -22680,6 +23745,13 @@
             <a:prstDash val="solid"/>
           </a:ln>
         </p:spPr>
+        <p:txBody>
+          <a:bodyPr/>
+          <a:lstStyle/>
+          <a:p>
+            <a:endParaRPr lang="fr-FR"/>
+          </a:p>
+        </p:txBody>
       </p:sp>
       <p:sp>
         <p:nvSpPr>
@@ -22702,7 +23774,7 @@
           <a:bodyPr wrap="square" rtlCol="0" anchor="ctr"/>
           <a:lstStyle/>
           <a:p>
-            <a:pPr indent="0" marL="0">
+            <a:pPr marL="0" indent="0">
               <a:buNone/>
             </a:pPr>
             <a:r>
@@ -22741,7 +23813,7 @@
           <a:bodyPr wrap="square" rtlCol="0" anchor="ctr"/>
           <a:lstStyle/>
           <a:p>
-            <a:pPr indent="0" marL="0">
+            <a:pPr marL="0" indent="0">
               <a:buNone/>
             </a:pPr>
             <a:r>
@@ -22785,6 +23857,13 @@
             <a:prstDash val="solid"/>
           </a:ln>
         </p:spPr>
+        <p:txBody>
+          <a:bodyPr/>
+          <a:lstStyle/>
+          <a:p>
+            <a:endParaRPr lang="fr-FR"/>
+          </a:p>
+        </p:txBody>
       </p:sp>
       <p:sp>
         <p:nvSpPr>
@@ -22807,7 +23886,7 @@
           <a:bodyPr wrap="square" rtlCol="0" anchor="ctr"/>
           <a:lstStyle/>
           <a:p>
-            <a:pPr indent="0" marL="0">
+            <a:pPr marL="0" indent="0">
               <a:buNone/>
             </a:pPr>
             <a:r>
@@ -22846,7 +23925,7 @@
           <a:bodyPr wrap="square" rtlCol="0" anchor="ctr"/>
           <a:lstStyle/>
           <a:p>
-            <a:pPr indent="0" marL="0">
+            <a:pPr marL="0" indent="0">
               <a:buNone/>
             </a:pPr>
             <a:r>
@@ -22890,6 +23969,13 @@
             <a:prstDash val="solid"/>
           </a:ln>
         </p:spPr>
+        <p:txBody>
+          <a:bodyPr/>
+          <a:lstStyle/>
+          <a:p>
+            <a:endParaRPr lang="fr-FR"/>
+          </a:p>
+        </p:txBody>
       </p:sp>
       <p:sp>
         <p:nvSpPr>
@@ -22912,7 +23998,7 @@
           <a:bodyPr wrap="square" rtlCol="0" anchor="ctr"/>
           <a:lstStyle/>
           <a:p>
-            <a:pPr indent="0" marL="0">
+            <a:pPr marL="0" indent="0">
               <a:buNone/>
             </a:pPr>
             <a:r>
@@ -22951,7 +24037,7 @@
           <a:bodyPr wrap="square" rtlCol="0" anchor="ctr"/>
           <a:lstStyle/>
           <a:p>
-            <a:pPr indent="0" marL="0">
+            <a:pPr marL="0" indent="0">
               <a:buNone/>
             </a:pPr>
             <a:r>
@@ -22995,6 +24081,13 @@
             <a:prstDash val="solid"/>
           </a:ln>
         </p:spPr>
+        <p:txBody>
+          <a:bodyPr/>
+          <a:lstStyle/>
+          <a:p>
+            <a:endParaRPr lang="fr-FR"/>
+          </a:p>
+        </p:txBody>
       </p:sp>
       <p:sp>
         <p:nvSpPr>
@@ -23017,7 +24110,7 @@
           <a:bodyPr wrap="square" rtlCol="0" anchor="ctr"/>
           <a:lstStyle/>
           <a:p>
-            <a:pPr indent="0" marL="0">
+            <a:pPr marL="0" indent="0">
               <a:buNone/>
             </a:pPr>
             <a:r>
@@ -23056,7 +24149,7 @@
           <a:bodyPr wrap="square" rtlCol="0" anchor="ctr"/>
           <a:lstStyle/>
           <a:p>
-            <a:pPr indent="0" marL="0">
+            <a:pPr marL="0" indent="0">
               <a:buNone/>
             </a:pPr>
             <a:r>
@@ -23100,6 +24193,13 @@
             <a:prstDash val="solid"/>
           </a:ln>
         </p:spPr>
+        <p:txBody>
+          <a:bodyPr/>
+          <a:lstStyle/>
+          <a:p>
+            <a:endParaRPr lang="fr-FR"/>
+          </a:p>
+        </p:txBody>
       </p:sp>
       <p:sp>
         <p:nvSpPr>
@@ -23122,7 +24222,7 @@
           <a:bodyPr wrap="square" rtlCol="0" anchor="ctr"/>
           <a:lstStyle/>
           <a:p>
-            <a:pPr indent="0" marL="0">
+            <a:pPr marL="0" indent="0">
               <a:buNone/>
             </a:pPr>
             <a:r>
@@ -23161,7 +24261,7 @@
           <a:bodyPr wrap="square" rtlCol="0" anchor="ctr"/>
           <a:lstStyle/>
           <a:p>
-            <a:pPr indent="0" marL="0">
+            <a:pPr marL="0" indent="0">
               <a:buNone/>
             </a:pPr>
             <a:r>
@@ -23205,6 +24305,13 @@
             <a:prstDash val="solid"/>
           </a:ln>
         </p:spPr>
+        <p:txBody>
+          <a:bodyPr/>
+          <a:lstStyle/>
+          <a:p>
+            <a:endParaRPr lang="fr-FR"/>
+          </a:p>
+        </p:txBody>
       </p:sp>
       <p:sp>
         <p:nvSpPr>
@@ -23227,7 +24334,7 @@
           <a:bodyPr wrap="square" rtlCol="0" anchor="ctr"/>
           <a:lstStyle/>
           <a:p>
-            <a:pPr indent="0" marL="0">
+            <a:pPr marL="0" indent="0">
               <a:buNone/>
             </a:pPr>
             <a:r>
@@ -23266,7 +24373,7 @@
           <a:bodyPr wrap="square" rtlCol="0" anchor="ctr"/>
           <a:lstStyle/>
           <a:p>
-            <a:pPr indent="0" marL="0">
+            <a:pPr marL="0" indent="0">
               <a:buNone/>
             </a:pPr>
             <a:r>
@@ -23305,7 +24412,7 @@
           <a:bodyPr wrap="square" rtlCol="0" anchor="ctr"/>
           <a:lstStyle/>
           <a:p>
-            <a:pPr indent="0" marL="0">
+            <a:pPr marL="0" indent="0">
               <a:buNone/>
             </a:pPr>
             <a:r>
@@ -23339,6 +24446,7 @@
         <a:solidFill>
           <a:srgbClr val="0F1117"/>
         </a:solidFill>
+        <a:effectLst/>
       </p:bgPr>
     </p:bg>
     <p:spTree>
@@ -23379,6 +24487,13 @@
             <a:prstDash val="solid"/>
           </a:ln>
         </p:spPr>
+        <p:txBody>
+          <a:bodyPr/>
+          <a:lstStyle/>
+          <a:p>
+            <a:endParaRPr lang="fr-FR"/>
+          </a:p>
+        </p:txBody>
       </p:sp>
       <p:sp>
         <p:nvSpPr>
@@ -23406,6 +24521,13 @@
             <a:prstDash val="solid"/>
           </a:ln>
         </p:spPr>
+        <p:txBody>
+          <a:bodyPr/>
+          <a:lstStyle/>
+          <a:p>
+            <a:endParaRPr lang="fr-FR"/>
+          </a:p>
+        </p:txBody>
       </p:sp>
       <p:sp>
         <p:nvSpPr>
@@ -23428,7 +24550,7 @@
           <a:bodyPr wrap="square" lIns="0" tIns="0" rIns="0" bIns="0" rtlCol="0" anchor="ctr"/>
           <a:lstStyle/>
           <a:p>
-            <a:pPr algn="ctr" indent="0" marL="0">
+            <a:pPr marL="0" indent="0" algn="ctr">
               <a:buNone/>
             </a:pPr>
             <a:r>
@@ -23464,7 +24586,7 @@
           <a:bodyPr wrap="square" rtlCol="0" anchor="ctr"/>
           <a:lstStyle/>
           <a:p>
-            <a:pPr indent="0" marL="0">
+            <a:pPr marL="0" indent="0">
               <a:buNone/>
             </a:pPr>
             <a:r>
@@ -23508,6 +24630,13 @@
             <a:prstDash val="solid"/>
           </a:ln>
         </p:spPr>
+        <p:txBody>
+          <a:bodyPr/>
+          <a:lstStyle/>
+          <a:p>
+            <a:endParaRPr lang="fr-FR"/>
+          </a:p>
+        </p:txBody>
       </p:sp>
       <p:sp>
         <p:nvSpPr>
@@ -23530,7 +24659,7 @@
           <a:bodyPr wrap="square" rtlCol="0" anchor="ctr"/>
           <a:lstStyle/>
           <a:p>
-            <a:pPr indent="0" marL="0">
+            <a:pPr marL="0" indent="0">
               <a:buNone/>
             </a:pPr>
             <a:r>
@@ -23569,7 +24698,7 @@
           <a:bodyPr wrap="square" rtlCol="0" anchor="ctr"/>
           <a:lstStyle/>
           <a:p>
-            <a:pPr indent="0" marL="0">
+            <a:pPr marL="0" indent="0">
               <a:buNone/>
             </a:pPr>
             <a:r>
@@ -23608,7 +24737,7 @@
           <a:bodyPr wrap="square" rtlCol="0" anchor="ctr"/>
           <a:lstStyle/>
           <a:p>
-            <a:pPr indent="0" marL="0">
+            <a:pPr marL="0" indent="0">
               <a:buNone/>
             </a:pPr>
             <a:r>
@@ -23652,6 +24781,13 @@
             <a:prstDash val="solid"/>
           </a:ln>
         </p:spPr>
+        <p:txBody>
+          <a:bodyPr/>
+          <a:lstStyle/>
+          <a:p>
+            <a:endParaRPr lang="fr-FR"/>
+          </a:p>
+        </p:txBody>
       </p:sp>
       <p:sp>
         <p:nvSpPr>
@@ -23674,7 +24810,7 @@
           <a:bodyPr wrap="square" rtlCol="0" anchor="ctr"/>
           <a:lstStyle/>
           <a:p>
-            <a:pPr algn="ctr" indent="0" marL="0">
+            <a:pPr marL="0" indent="0" algn="ctr">
               <a:buNone/>
             </a:pPr>
             <a:r>
@@ -23691,7 +24827,7 @@
             <a:endParaRPr lang="en-US" sz="900" dirty="0"/>
           </a:p>
           <a:p>
-            <a:pPr algn="ctr" indent="0" marL="0">
+            <a:pPr marL="0" indent="0" algn="ctr">
               <a:buNone/>
             </a:pPr>
             <a:r>
@@ -23735,6 +24871,13 @@
             <a:prstDash val="solid"/>
           </a:ln>
         </p:spPr>
+        <p:txBody>
+          <a:bodyPr/>
+          <a:lstStyle/>
+          <a:p>
+            <a:endParaRPr lang="fr-FR"/>
+          </a:p>
+        </p:txBody>
       </p:sp>
       <p:sp>
         <p:nvSpPr>
@@ -23757,7 +24900,7 @@
           <a:bodyPr wrap="square" rtlCol="0" anchor="ctr"/>
           <a:lstStyle/>
           <a:p>
-            <a:pPr algn="ctr" indent="0" marL="0">
+            <a:pPr marL="0" indent="0" algn="ctr">
               <a:buNone/>
             </a:pPr>
             <a:r>
@@ -23774,7 +24917,7 @@
             <a:endParaRPr lang="en-US" sz="900" dirty="0"/>
           </a:p>
           <a:p>
-            <a:pPr algn="ctr" indent="0" marL="0">
+            <a:pPr marL="0" indent="0" algn="ctr">
               <a:buNone/>
             </a:pPr>
             <a:r>
@@ -23818,6 +24961,13 @@
             <a:prstDash val="solid"/>
           </a:ln>
         </p:spPr>
+        <p:txBody>
+          <a:bodyPr/>
+          <a:lstStyle/>
+          <a:p>
+            <a:endParaRPr lang="fr-FR"/>
+          </a:p>
+        </p:txBody>
       </p:sp>
       <p:sp>
         <p:nvSpPr>
@@ -23840,7 +24990,7 @@
           <a:bodyPr wrap="square" rtlCol="0" anchor="ctr"/>
           <a:lstStyle/>
           <a:p>
-            <a:pPr algn="ctr" indent="0" marL="0">
+            <a:pPr marL="0" indent="0" algn="ctr">
               <a:buNone/>
             </a:pPr>
             <a:r>
@@ -23857,7 +25007,7 @@
             <a:endParaRPr lang="en-US" sz="900" dirty="0"/>
           </a:p>
           <a:p>
-            <a:pPr algn="ctr" indent="0" marL="0">
+            <a:pPr marL="0" indent="0" algn="ctr">
               <a:buNone/>
             </a:pPr>
             <a:r>
@@ -23901,6 +25051,13 @@
             <a:prstDash val="solid"/>
           </a:ln>
         </p:spPr>
+        <p:txBody>
+          <a:bodyPr/>
+          <a:lstStyle/>
+          <a:p>
+            <a:endParaRPr lang="fr-FR"/>
+          </a:p>
+        </p:txBody>
       </p:sp>
       <p:sp>
         <p:nvSpPr>
@@ -23923,7 +25080,7 @@
           <a:bodyPr wrap="square" rtlCol="0" anchor="ctr"/>
           <a:lstStyle/>
           <a:p>
-            <a:pPr indent="0" marL="0">
+            <a:pPr marL="0" indent="0">
               <a:buNone/>
             </a:pPr>
             <a:r>
@@ -23967,6 +25124,13 @@
             <a:prstDash val="solid"/>
           </a:ln>
         </p:spPr>
+        <p:txBody>
+          <a:bodyPr/>
+          <a:lstStyle/>
+          <a:p>
+            <a:endParaRPr lang="fr-FR"/>
+          </a:p>
+        </p:txBody>
       </p:sp>
       <p:sp>
         <p:nvSpPr>
@@ -23989,7 +25153,7 @@
           <a:bodyPr wrap="square" rtlCol="0" anchor="ctr"/>
           <a:lstStyle/>
           <a:p>
-            <a:pPr algn="ctr" indent="0" marL="0">
+            <a:pPr marL="0" indent="0" algn="ctr">
               <a:buNone/>
             </a:pPr>
             <a:r>
@@ -24006,7 +25170,7 @@
             <a:endParaRPr lang="en-US" sz="900" dirty="0"/>
           </a:p>
           <a:p>
-            <a:pPr algn="ctr" indent="0" marL="0">
+            <a:pPr marL="0" indent="0" algn="ctr">
               <a:buNone/>
             </a:pPr>
             <a:r>
@@ -24050,6 +25214,13 @@
             <a:prstDash val="solid"/>
           </a:ln>
         </p:spPr>
+        <p:txBody>
+          <a:bodyPr/>
+          <a:lstStyle/>
+          <a:p>
+            <a:endParaRPr lang="fr-FR"/>
+          </a:p>
+        </p:txBody>
       </p:sp>
       <p:sp>
         <p:nvSpPr>
@@ -24072,7 +25243,7 @@
           <a:bodyPr wrap="square" rtlCol="0" anchor="ctr"/>
           <a:lstStyle/>
           <a:p>
-            <a:pPr algn="ctr" indent="0" marL="0">
+            <a:pPr marL="0" indent="0" algn="ctr">
               <a:buNone/>
             </a:pPr>
             <a:r>
@@ -24089,7 +25260,7 @@
             <a:endParaRPr lang="en-US" sz="900" dirty="0"/>
           </a:p>
           <a:p>
-            <a:pPr algn="ctr" indent="0" marL="0">
+            <a:pPr marL="0" indent="0" algn="ctr">
               <a:buNone/>
             </a:pPr>
             <a:r>
@@ -24133,6 +25304,13 @@
             <a:prstDash val="solid"/>
           </a:ln>
         </p:spPr>
+        <p:txBody>
+          <a:bodyPr/>
+          <a:lstStyle/>
+          <a:p>
+            <a:endParaRPr lang="fr-FR"/>
+          </a:p>
+        </p:txBody>
       </p:sp>
       <p:sp>
         <p:nvSpPr>
@@ -24155,7 +25333,7 @@
           <a:bodyPr wrap="square" rtlCol="0" anchor="ctr"/>
           <a:lstStyle/>
           <a:p>
-            <a:pPr algn="ctr" indent="0" marL="0">
+            <a:pPr marL="0" indent="0" algn="ctr">
               <a:buNone/>
             </a:pPr>
             <a:r>
@@ -24172,7 +25350,7 @@
             <a:endParaRPr lang="en-US" sz="900" dirty="0"/>
           </a:p>
           <a:p>
-            <a:pPr algn="ctr" indent="0" marL="0">
+            <a:pPr marL="0" indent="0" algn="ctr">
               <a:buNone/>
             </a:pPr>
             <a:r>
@@ -24216,6 +25394,13 @@
             <a:prstDash val="solid"/>
           </a:ln>
         </p:spPr>
+        <p:txBody>
+          <a:bodyPr/>
+          <a:lstStyle/>
+          <a:p>
+            <a:endParaRPr lang="fr-FR"/>
+          </a:p>
+        </p:txBody>
       </p:sp>
       <p:sp>
         <p:nvSpPr>
@@ -24238,7 +25423,7 @@
           <a:bodyPr wrap="square" rtlCol="0" anchor="ctr"/>
           <a:lstStyle/>
           <a:p>
-            <a:pPr algn="ctr" indent="0" marL="0">
+            <a:pPr marL="0" indent="0" algn="ctr">
               <a:buNone/>
             </a:pPr>
             <a:r>
@@ -24255,7 +25440,7 @@
             <a:endParaRPr lang="en-US" sz="900" dirty="0"/>
           </a:p>
           <a:p>
-            <a:pPr algn="ctr" indent="0" marL="0">
+            <a:pPr marL="0" indent="0" algn="ctr">
               <a:buNone/>
             </a:pPr>
             <a:r>
@@ -24299,6 +25484,13 @@
             <a:prstDash val="solid"/>
           </a:ln>
         </p:spPr>
+        <p:txBody>
+          <a:bodyPr/>
+          <a:lstStyle/>
+          <a:p>
+            <a:endParaRPr lang="fr-FR"/>
+          </a:p>
+        </p:txBody>
       </p:sp>
       <p:sp>
         <p:nvSpPr>
@@ -24321,7 +25513,7 @@
           <a:bodyPr wrap="square" rtlCol="0" anchor="ctr"/>
           <a:lstStyle/>
           <a:p>
-            <a:pPr algn="ctr" indent="0" marL="0">
+            <a:pPr marL="0" indent="0" algn="ctr">
               <a:buNone/>
             </a:pPr>
             <a:r>
@@ -24360,7 +25552,7 @@
           <a:bodyPr wrap="square" rtlCol="0" anchor="ctr"/>
           <a:lstStyle/>
           <a:p>
-            <a:pPr algn="ctr" indent="0" marL="0">
+            <a:pPr marL="0" indent="0" algn="ctr">
               <a:buNone/>
             </a:pPr>
             <a:r>
@@ -24399,7 +25591,7 @@
           <a:bodyPr wrap="square" rtlCol="0" anchor="ctr"/>
           <a:lstStyle/>
           <a:p>
-            <a:pPr algn="ctr" indent="0" marL="0">
+            <a:pPr marL="0" indent="0" algn="ctr">
               <a:buNone/>
             </a:pPr>
             <a:r>
@@ -24438,7 +25630,7 @@
           <a:bodyPr wrap="square" rtlCol="0" anchor="ctr"/>
           <a:lstStyle/>
           <a:p>
-            <a:pPr algn="ctr" indent="0" marL="0">
+            <a:pPr marL="0" indent="0" algn="ctr">
               <a:buNone/>
             </a:pPr>
             <a:r>
@@ -24477,7 +25669,7 @@
           <a:bodyPr wrap="square" rtlCol="0" anchor="ctr"/>
           <a:lstStyle/>
           <a:p>
-            <a:pPr algn="ctr" indent="0" marL="0">
+            <a:pPr marL="0" indent="0" algn="ctr">
               <a:buNone/>
             </a:pPr>
             <a:r>
@@ -24516,7 +25708,7 @@
           <a:bodyPr wrap="square" rtlCol="0" anchor="ctr"/>
           <a:lstStyle/>
           <a:p>
-            <a:pPr algn="ctr" indent="0" marL="0">
+            <a:pPr marL="0" indent="0" algn="ctr">
               <a:buNone/>
             </a:pPr>
             <a:r>
@@ -24555,7 +25747,7 @@
           <a:bodyPr wrap="square" rtlCol="0" anchor="ctr"/>
           <a:lstStyle/>
           <a:p>
-            <a:pPr algn="ctr" indent="0" marL="0">
+            <a:pPr marL="0" indent="0" algn="ctr">
               <a:buNone/>
             </a:pPr>
             <a:r>
@@ -24594,7 +25786,7 @@
           <a:bodyPr wrap="square" rtlCol="0" anchor="ctr"/>
           <a:lstStyle/>
           <a:p>
-            <a:pPr indent="0" marL="0">
+            <a:pPr marL="0" indent="0">
               <a:buNone/>
             </a:pPr>
             <a:r>
@@ -24614,7 +25806,7 @@
       </p:sp>
       <p:graphicFrame>
         <p:nvGraphicFramePr>
-          <p:cNvPr id="9" name="Table 0"/>
+          <p:cNvPr id="35" name="Table 0"/>
           <p:cNvGraphicFramePr>
             <a:graphicFrameLocks noGrp="1"/>
           </p:cNvGraphicFramePr>
@@ -24635,9 +25827,27 @@
             <a:tbl>
               <a:tblPr/>
               <a:tblGrid>
-                <a:gridCol w="1371600"/>
-                <a:gridCol w="2286000"/>
-                <a:gridCol w="4846320"/>
+                <a:gridCol w="1371600">
+                  <a:extLst>
+                    <a:ext uri="{9D8B030D-6E8A-4147-A177-3AD203B41FA5}">
+                      <a16:colId xmlns:a16="http://schemas.microsoft.com/office/drawing/2014/main" val="20000"/>
+                    </a:ext>
+                  </a:extLst>
+                </a:gridCol>
+                <a:gridCol w="2286000">
+                  <a:extLst>
+                    <a:ext uri="{9D8B030D-6E8A-4147-A177-3AD203B41FA5}">
+                      <a16:colId xmlns:a16="http://schemas.microsoft.com/office/drawing/2014/main" val="20001"/>
+                    </a:ext>
+                  </a:extLst>
+                </a:gridCol>
+                <a:gridCol w="4846320">
+                  <a:extLst>
+                    <a:ext uri="{9D8B030D-6E8A-4147-A177-3AD203B41FA5}">
+                      <a16:colId xmlns:a16="http://schemas.microsoft.com/office/drawing/2014/main" val="20002"/>
+                    </a:ext>
+                  </a:extLst>
+                </a:gridCol>
               </a:tblGrid>
               <a:tr h="237744">
                 <a:tc>
@@ -24645,7 +25855,7 @@
                     <a:bodyPr/>
                     <a:lstStyle/>
                     <a:p>
-                      <a:pPr algn="l" indent="0" marL="0">
+                      <a:pPr marL="0" indent="0" algn="l">
                         <a:buNone/>
                       </a:pPr>
                       <a:r>
@@ -24666,7 +25876,7 @@
                       </a:endParaRPr>
                     </a:p>
                   </a:txBody>
-                  <a:tcPr marL="91440" marR="91440" marT="45720" marB="45720" anchor="ctr">
+                  <a:tcPr anchor="ctr">
                     <a:lnL w="6350" cap="flat" cmpd="sng" algn="ctr">
                       <a:solidFill>
                         <a:srgbClr val="2E3250"/>
@@ -24713,7 +25923,7 @@
                     <a:bodyPr/>
                     <a:lstStyle/>
                     <a:p>
-                      <a:pPr algn="l" indent="0" marL="0">
+                      <a:pPr marL="0" indent="0" algn="l">
                         <a:buNone/>
                       </a:pPr>
                       <a:r>
@@ -24734,7 +25944,7 @@
                       </a:endParaRPr>
                     </a:p>
                   </a:txBody>
-                  <a:tcPr marL="91440" marR="91440" marT="45720" marB="45720" anchor="ctr">
+                  <a:tcPr anchor="ctr">
                     <a:lnL w="6350" cap="flat" cmpd="sng" algn="ctr">
                       <a:solidFill>
                         <a:srgbClr val="2E3250"/>
@@ -24781,7 +25991,7 @@
                     <a:bodyPr/>
                     <a:lstStyle/>
                     <a:p>
-                      <a:pPr algn="l" indent="0" marL="0">
+                      <a:pPr marL="0" indent="0" algn="l">
                         <a:buNone/>
                       </a:pPr>
                       <a:r>
@@ -24802,7 +26012,7 @@
                       </a:endParaRPr>
                     </a:p>
                   </a:txBody>
-                  <a:tcPr marL="91440" marR="91440" marT="45720" marB="45720" anchor="ctr">
+                  <a:tcPr anchor="ctr">
                     <a:lnL w="6350" cap="flat" cmpd="sng" algn="ctr">
                       <a:solidFill>
                         <a:srgbClr val="2E3250"/>
@@ -24844,6 +26054,11 @@
                     </a:solidFill>
                   </a:tcPr>
                 </a:tc>
+                <a:extLst>
+                  <a:ext uri="{0D108BD9-81ED-4DB2-BD59-A6C34878D82A}">
+                    <a16:rowId xmlns:a16="http://schemas.microsoft.com/office/drawing/2014/main" val="10000"/>
+                  </a:ext>
+                </a:extLst>
               </a:tr>
               <a:tr h="237744">
                 <a:tc>
@@ -24851,7 +26066,7 @@
                     <a:bodyPr/>
                     <a:lstStyle/>
                     <a:p>
-                      <a:pPr algn="l" indent="0" marL="0">
+                      <a:pPr marL="0" indent="0" algn="l">
                         <a:buNone/>
                       </a:pPr>
                       <a:r>
@@ -24872,7 +26087,7 @@
                       </a:endParaRPr>
                     </a:p>
                   </a:txBody>
-                  <a:tcPr marL="91440" marR="91440" marT="45720" marB="45720" anchor="ctr">
+                  <a:tcPr anchor="ctr">
                     <a:lnL w="6350" cap="flat" cmpd="sng" algn="ctr">
                       <a:solidFill>
                         <a:srgbClr val="2E3250"/>
@@ -24919,7 +26134,7 @@
                     <a:bodyPr/>
                     <a:lstStyle/>
                     <a:p>
-                      <a:pPr algn="l" indent="0" marL="0">
+                      <a:pPr marL="0" indent="0" algn="l">
                         <a:buNone/>
                       </a:pPr>
                       <a:r>
@@ -24940,7 +26155,7 @@
                       </a:endParaRPr>
                     </a:p>
                   </a:txBody>
-                  <a:tcPr marL="91440" marR="91440" marT="45720" marB="45720" anchor="ctr">
+                  <a:tcPr anchor="ctr">
                     <a:lnL w="6350" cap="flat" cmpd="sng" algn="ctr">
                       <a:solidFill>
                         <a:srgbClr val="2E3250"/>
@@ -24987,7 +26202,7 @@
                     <a:bodyPr/>
                     <a:lstStyle/>
                     <a:p>
-                      <a:pPr algn="l" indent="0" marL="0">
+                      <a:pPr marL="0" indent="0" algn="l">
                         <a:buNone/>
                       </a:pPr>
                       <a:r>
@@ -25008,7 +26223,7 @@
                       </a:endParaRPr>
                     </a:p>
                   </a:txBody>
-                  <a:tcPr marL="91440" marR="91440" marT="45720" marB="45720" anchor="ctr">
+                  <a:tcPr anchor="ctr">
                     <a:lnL w="6350" cap="flat" cmpd="sng" algn="ctr">
                       <a:solidFill>
                         <a:srgbClr val="2E3250"/>
@@ -25050,6 +26265,11 @@
                     </a:solidFill>
                   </a:tcPr>
                 </a:tc>
+                <a:extLst>
+                  <a:ext uri="{0D108BD9-81ED-4DB2-BD59-A6C34878D82A}">
+                    <a16:rowId xmlns:a16="http://schemas.microsoft.com/office/drawing/2014/main" val="10001"/>
+                  </a:ext>
+                </a:extLst>
               </a:tr>
               <a:tr h="237744">
                 <a:tc>
@@ -25057,7 +26277,7 @@
                     <a:bodyPr/>
                     <a:lstStyle/>
                     <a:p>
-                      <a:pPr algn="l" indent="0" marL="0">
+                      <a:pPr marL="0" indent="0" algn="l">
                         <a:buNone/>
                       </a:pPr>
                       <a:r>
@@ -25078,7 +26298,7 @@
                       </a:endParaRPr>
                     </a:p>
                   </a:txBody>
-                  <a:tcPr marL="91440" marR="91440" marT="45720" marB="45720" anchor="ctr">
+                  <a:tcPr anchor="ctr">
                     <a:lnL w="6350" cap="flat" cmpd="sng" algn="ctr">
                       <a:solidFill>
                         <a:srgbClr val="2E3250"/>
@@ -25125,7 +26345,7 @@
                     <a:bodyPr/>
                     <a:lstStyle/>
                     <a:p>
-                      <a:pPr algn="l" indent="0" marL="0">
+                      <a:pPr marL="0" indent="0" algn="l">
                         <a:buNone/>
                       </a:pPr>
                       <a:r>
@@ -25146,7 +26366,7 @@
                       </a:endParaRPr>
                     </a:p>
                   </a:txBody>
-                  <a:tcPr marL="91440" marR="91440" marT="45720" marB="45720" anchor="ctr">
+                  <a:tcPr anchor="ctr">
                     <a:lnL w="6350" cap="flat" cmpd="sng" algn="ctr">
                       <a:solidFill>
                         <a:srgbClr val="2E3250"/>
@@ -25193,7 +26413,7 @@
                     <a:bodyPr/>
                     <a:lstStyle/>
                     <a:p>
-                      <a:pPr algn="l" indent="0" marL="0">
+                      <a:pPr marL="0" indent="0" algn="l">
                         <a:buNone/>
                       </a:pPr>
                       <a:r>
@@ -25214,7 +26434,7 @@
                       </a:endParaRPr>
                     </a:p>
                   </a:txBody>
-                  <a:tcPr marL="91440" marR="91440" marT="45720" marB="45720" anchor="ctr">
+                  <a:tcPr anchor="ctr">
                     <a:lnL w="6350" cap="flat" cmpd="sng" algn="ctr">
                       <a:solidFill>
                         <a:srgbClr val="2E3250"/>
@@ -25256,6 +26476,11 @@
                     </a:solidFill>
                   </a:tcPr>
                 </a:tc>
+                <a:extLst>
+                  <a:ext uri="{0D108BD9-81ED-4DB2-BD59-A6C34878D82A}">
+                    <a16:rowId xmlns:a16="http://schemas.microsoft.com/office/drawing/2014/main" val="10002"/>
+                  </a:ext>
+                </a:extLst>
               </a:tr>
               <a:tr h="237744">
                 <a:tc>
@@ -25263,7 +26488,7 @@
                     <a:bodyPr/>
                     <a:lstStyle/>
                     <a:p>
-                      <a:pPr algn="l" indent="0" marL="0">
+                      <a:pPr marL="0" indent="0" algn="l">
                         <a:buNone/>
                       </a:pPr>
                       <a:r>
@@ -25284,7 +26509,7 @@
                       </a:endParaRPr>
                     </a:p>
                   </a:txBody>
-                  <a:tcPr marL="91440" marR="91440" marT="45720" marB="45720" anchor="ctr">
+                  <a:tcPr anchor="ctr">
                     <a:lnL w="6350" cap="flat" cmpd="sng" algn="ctr">
                       <a:solidFill>
                         <a:srgbClr val="2E3250"/>
@@ -25331,7 +26556,7 @@
                     <a:bodyPr/>
                     <a:lstStyle/>
                     <a:p>
-                      <a:pPr algn="l" indent="0" marL="0">
+                      <a:pPr marL="0" indent="0" algn="l">
                         <a:buNone/>
                       </a:pPr>
                       <a:r>
@@ -25352,7 +26577,7 @@
                       </a:endParaRPr>
                     </a:p>
                   </a:txBody>
-                  <a:tcPr marL="91440" marR="91440" marT="45720" marB="45720" anchor="ctr">
+                  <a:tcPr anchor="ctr">
                     <a:lnL w="6350" cap="flat" cmpd="sng" algn="ctr">
                       <a:solidFill>
                         <a:srgbClr val="2E3250"/>
@@ -25399,7 +26624,7 @@
                     <a:bodyPr/>
                     <a:lstStyle/>
                     <a:p>
-                      <a:pPr algn="l" indent="0" marL="0">
+                      <a:pPr marL="0" indent="0" algn="l">
                         <a:buNone/>
                       </a:pPr>
                       <a:r>
@@ -25420,7 +26645,7 @@
                       </a:endParaRPr>
                     </a:p>
                   </a:txBody>
-                  <a:tcPr marL="91440" marR="91440" marT="45720" marB="45720" anchor="ctr">
+                  <a:tcPr anchor="ctr">
                     <a:lnL w="6350" cap="flat" cmpd="sng" algn="ctr">
                       <a:solidFill>
                         <a:srgbClr val="2E3250"/>
@@ -25462,6 +26687,11 @@
                     </a:solidFill>
                   </a:tcPr>
                 </a:tc>
+                <a:extLst>
+                  <a:ext uri="{0D108BD9-81ED-4DB2-BD59-A6C34878D82A}">
+                    <a16:rowId xmlns:a16="http://schemas.microsoft.com/office/drawing/2014/main" val="10003"/>
+                  </a:ext>
+                </a:extLst>
               </a:tr>
             </a:tbl>
           </a:graphicData>
@@ -25483,6 +26713,7 @@
         <a:solidFill>
           <a:srgbClr val="0F1117"/>
         </a:solidFill>
+        <a:effectLst/>
       </p:bgPr>
     </p:bg>
     <p:spTree>
@@ -25523,6 +26754,13 @@
             <a:prstDash val="solid"/>
           </a:ln>
         </p:spPr>
+        <p:txBody>
+          <a:bodyPr/>
+          <a:lstStyle/>
+          <a:p>
+            <a:endParaRPr lang="fr-FR"/>
+          </a:p>
+        </p:txBody>
       </p:sp>
       <p:sp>
         <p:nvSpPr>
@@ -25550,6 +26788,13 @@
             <a:prstDash val="solid"/>
           </a:ln>
         </p:spPr>
+        <p:txBody>
+          <a:bodyPr/>
+          <a:lstStyle/>
+          <a:p>
+            <a:endParaRPr lang="fr-FR"/>
+          </a:p>
+        </p:txBody>
       </p:sp>
       <p:sp>
         <p:nvSpPr>
@@ -25572,7 +26817,7 @@
           <a:bodyPr wrap="square" lIns="0" tIns="0" rIns="0" bIns="0" rtlCol="0" anchor="ctr"/>
           <a:lstStyle/>
           <a:p>
-            <a:pPr algn="ctr" indent="0" marL="0">
+            <a:pPr marL="0" indent="0" algn="ctr">
               <a:buNone/>
             </a:pPr>
             <a:r>
@@ -25608,7 +26853,7 @@
           <a:bodyPr wrap="square" rtlCol="0" anchor="ctr"/>
           <a:lstStyle/>
           <a:p>
-            <a:pPr indent="0" marL="0">
+            <a:pPr marL="0" indent="0">
               <a:buNone/>
             </a:pPr>
             <a:r>
@@ -25652,6 +26897,13 @@
             <a:prstDash val="solid"/>
           </a:ln>
         </p:spPr>
+        <p:txBody>
+          <a:bodyPr/>
+          <a:lstStyle/>
+          <a:p>
+            <a:endParaRPr lang="fr-FR"/>
+          </a:p>
+        </p:txBody>
       </p:sp>
       <p:sp>
         <p:nvSpPr>
@@ -25679,6 +26931,13 @@
             <a:prstDash val="solid"/>
           </a:ln>
         </p:spPr>
+        <p:txBody>
+          <a:bodyPr/>
+          <a:lstStyle/>
+          <a:p>
+            <a:endParaRPr lang="fr-FR"/>
+          </a:p>
+        </p:txBody>
       </p:sp>
       <p:sp>
         <p:nvSpPr>
@@ -25701,7 +26960,7 @@
           <a:bodyPr wrap="square" lIns="0" tIns="0" rIns="0" bIns="0" rtlCol="0" anchor="ctr"/>
           <a:lstStyle/>
           <a:p>
-            <a:pPr algn="ctr" indent="0" marL="0">
+            <a:pPr marL="0" indent="0" algn="ctr">
               <a:buNone/>
             </a:pPr>
             <a:r>
@@ -25740,7 +26999,7 @@
           <a:bodyPr wrap="square" rtlCol="0" anchor="ctr"/>
           <a:lstStyle/>
           <a:p>
-            <a:pPr indent="0" marL="0">
+            <a:pPr marL="0" indent="0">
               <a:buNone/>
             </a:pPr>
             <a:r>
@@ -25779,7 +27038,7 @@
           <a:bodyPr wrap="square" rtlCol="0" anchor="ctr"/>
           <a:lstStyle/>
           <a:p>
-            <a:pPr indent="0" marL="0">
+            <a:pPr marL="0" indent="0">
               <a:buNone/>
             </a:pPr>
             <a:r>
@@ -25823,6 +27082,13 @@
             <a:prstDash val="solid"/>
           </a:ln>
         </p:spPr>
+        <p:txBody>
+          <a:bodyPr/>
+          <a:lstStyle/>
+          <a:p>
+            <a:endParaRPr lang="fr-FR"/>
+          </a:p>
+        </p:txBody>
       </p:sp>
       <p:sp>
         <p:nvSpPr>
@@ -25845,7 +27111,7 @@
           <a:bodyPr wrap="square" rtlCol="0" anchor="t"/>
           <a:lstStyle/>
           <a:p>
-            <a:pPr indent="0" marL="0">
+            <a:pPr marL="0" indent="0">
               <a:buNone/>
             </a:pPr>
             <a:r>
@@ -25862,7 +27128,7 @@
             <a:endParaRPr lang="en-US" sz="850" dirty="0"/>
           </a:p>
           <a:p>
-            <a:pPr indent="0" marL="0">
+            <a:pPr marL="0" indent="0">
               <a:buNone/>
             </a:pPr>
             <a:r>
@@ -25906,6 +27172,13 @@
             <a:prstDash val="solid"/>
           </a:ln>
         </p:spPr>
+        <p:txBody>
+          <a:bodyPr/>
+          <a:lstStyle/>
+          <a:p>
+            <a:endParaRPr lang="fr-FR"/>
+          </a:p>
+        </p:txBody>
       </p:sp>
       <p:sp>
         <p:nvSpPr>
@@ -25933,6 +27206,13 @@
             <a:prstDash val="solid"/>
           </a:ln>
         </p:spPr>
+        <p:txBody>
+          <a:bodyPr/>
+          <a:lstStyle/>
+          <a:p>
+            <a:endParaRPr lang="fr-FR"/>
+          </a:p>
+        </p:txBody>
       </p:sp>
       <p:sp>
         <p:nvSpPr>
@@ -25955,7 +27235,7 @@
           <a:bodyPr wrap="square" lIns="0" tIns="0" rIns="0" bIns="0" rtlCol="0" anchor="ctr"/>
           <a:lstStyle/>
           <a:p>
-            <a:pPr algn="ctr" indent="0" marL="0">
+            <a:pPr marL="0" indent="0" algn="ctr">
               <a:buNone/>
             </a:pPr>
             <a:r>
@@ -25994,7 +27274,7 @@
           <a:bodyPr wrap="square" rtlCol="0" anchor="ctr"/>
           <a:lstStyle/>
           <a:p>
-            <a:pPr indent="0" marL="0">
+            <a:pPr marL="0" indent="0">
               <a:buNone/>
             </a:pPr>
             <a:r>
@@ -26033,7 +27313,7 @@
           <a:bodyPr wrap="square" rtlCol="0" anchor="ctr"/>
           <a:lstStyle/>
           <a:p>
-            <a:pPr indent="0" marL="0">
+            <a:pPr marL="0" indent="0">
               <a:buNone/>
             </a:pPr>
             <a:r>
@@ -26077,6 +27357,13 @@
             <a:prstDash val="solid"/>
           </a:ln>
         </p:spPr>
+        <p:txBody>
+          <a:bodyPr/>
+          <a:lstStyle/>
+          <a:p>
+            <a:endParaRPr lang="fr-FR"/>
+          </a:p>
+        </p:txBody>
       </p:sp>
       <p:sp>
         <p:nvSpPr>
@@ -26099,7 +27386,7 @@
           <a:bodyPr wrap="square" rtlCol="0" anchor="t"/>
           <a:lstStyle/>
           <a:p>
-            <a:pPr indent="0" marL="0">
+            <a:pPr marL="0" indent="0">
               <a:buNone/>
             </a:pPr>
             <a:r>
@@ -26143,6 +27430,13 @@
             <a:prstDash val="solid"/>
           </a:ln>
         </p:spPr>
+        <p:txBody>
+          <a:bodyPr/>
+          <a:lstStyle/>
+          <a:p>
+            <a:endParaRPr lang="fr-FR"/>
+          </a:p>
+        </p:txBody>
       </p:sp>
       <p:sp>
         <p:nvSpPr>
@@ -26170,6 +27464,13 @@
             <a:prstDash val="solid"/>
           </a:ln>
         </p:spPr>
+        <p:txBody>
+          <a:bodyPr/>
+          <a:lstStyle/>
+          <a:p>
+            <a:endParaRPr lang="fr-FR"/>
+          </a:p>
+        </p:txBody>
       </p:sp>
       <p:sp>
         <p:nvSpPr>
@@ -26192,7 +27493,7 @@
           <a:bodyPr wrap="square" lIns="0" tIns="0" rIns="0" bIns="0" rtlCol="0" anchor="ctr"/>
           <a:lstStyle/>
           <a:p>
-            <a:pPr algn="ctr" indent="0" marL="0">
+            <a:pPr marL="0" indent="0" algn="ctr">
               <a:buNone/>
             </a:pPr>
             <a:r>
@@ -26231,7 +27532,7 @@
           <a:bodyPr wrap="square" rtlCol="0" anchor="ctr"/>
           <a:lstStyle/>
           <a:p>
-            <a:pPr indent="0" marL="0">
+            <a:pPr marL="0" indent="0">
               <a:buNone/>
             </a:pPr>
             <a:r>
@@ -26270,7 +27571,7 @@
           <a:bodyPr wrap="square" rtlCol="0" anchor="ctr"/>
           <a:lstStyle/>
           <a:p>
-            <a:pPr indent="0" marL="0">
+            <a:pPr marL="0" indent="0">
               <a:buNone/>
             </a:pPr>
             <a:r>
@@ -26314,6 +27615,13 @@
             <a:prstDash val="solid"/>
           </a:ln>
         </p:spPr>
+        <p:txBody>
+          <a:bodyPr/>
+          <a:lstStyle/>
+          <a:p>
+            <a:endParaRPr lang="fr-FR"/>
+          </a:p>
+        </p:txBody>
       </p:sp>
       <p:sp>
         <p:nvSpPr>
@@ -26336,7 +27644,7 @@
           <a:bodyPr wrap="square" rtlCol="0" anchor="t"/>
           <a:lstStyle/>
           <a:p>
-            <a:pPr indent="0" marL="0">
+            <a:pPr marL="0" indent="0">
               <a:buNone/>
             </a:pPr>
             <a:r>
@@ -26353,7 +27661,7 @@
             <a:endParaRPr lang="en-US" sz="850" dirty="0"/>
           </a:p>
           <a:p>
-            <a:pPr indent="0" marL="0">
+            <a:pPr marL="0" indent="0">
               <a:buNone/>
             </a:pPr>
             <a:r>
@@ -26397,6 +27705,13 @@
             <a:prstDash val="solid"/>
           </a:ln>
         </p:spPr>
+        <p:txBody>
+          <a:bodyPr/>
+          <a:lstStyle/>
+          <a:p>
+            <a:endParaRPr lang="fr-FR"/>
+          </a:p>
+        </p:txBody>
       </p:sp>
       <p:sp>
         <p:nvSpPr>
@@ -26424,6 +27739,13 @@
             <a:prstDash val="solid"/>
           </a:ln>
         </p:spPr>
+        <p:txBody>
+          <a:bodyPr/>
+          <a:lstStyle/>
+          <a:p>
+            <a:endParaRPr lang="fr-FR"/>
+          </a:p>
+        </p:txBody>
       </p:sp>
       <p:sp>
         <p:nvSpPr>
@@ -26446,7 +27768,7 @@
           <a:bodyPr wrap="square" lIns="0" tIns="0" rIns="0" bIns="0" rtlCol="0" anchor="ctr"/>
           <a:lstStyle/>
           <a:p>
-            <a:pPr algn="ctr" indent="0" marL="0">
+            <a:pPr marL="0" indent="0" algn="ctr">
               <a:buNone/>
             </a:pPr>
             <a:r>
@@ -26485,7 +27807,7 @@
           <a:bodyPr wrap="square" rtlCol="0" anchor="ctr"/>
           <a:lstStyle/>
           <a:p>
-            <a:pPr indent="0" marL="0">
+            <a:pPr marL="0" indent="0">
               <a:buNone/>
             </a:pPr>
             <a:r>
@@ -26524,7 +27846,7 @@
           <a:bodyPr wrap="square" rtlCol="0" anchor="ctr"/>
           <a:lstStyle/>
           <a:p>
-            <a:pPr indent="0" marL="0">
+            <a:pPr marL="0" indent="0">
               <a:buNone/>
             </a:pPr>
             <a:r>
@@ -26568,6 +27890,13 @@
             <a:prstDash val="solid"/>
           </a:ln>
         </p:spPr>
+        <p:txBody>
+          <a:bodyPr/>
+          <a:lstStyle/>
+          <a:p>
+            <a:endParaRPr lang="fr-FR"/>
+          </a:p>
+        </p:txBody>
       </p:sp>
       <p:sp>
         <p:nvSpPr>
@@ -26590,7 +27919,7 @@
           <a:bodyPr wrap="square" rtlCol="0" anchor="t"/>
           <a:lstStyle/>
           <a:p>
-            <a:pPr indent="0" marL="0">
+            <a:pPr marL="0" indent="0">
               <a:buNone/>
             </a:pPr>
             <a:r>
@@ -26607,7 +27936,7 @@
             <a:endParaRPr lang="en-US" sz="850" dirty="0"/>
           </a:p>
           <a:p>
-            <a:pPr indent="0" marL="0">
+            <a:pPr marL="0" indent="0">
               <a:buNone/>
             </a:pPr>
             <a:r>
@@ -26651,6 +27980,13 @@
             <a:prstDash val="solid"/>
           </a:ln>
         </p:spPr>
+        <p:txBody>
+          <a:bodyPr/>
+          <a:lstStyle/>
+          <a:p>
+            <a:endParaRPr lang="fr-FR"/>
+          </a:p>
+        </p:txBody>
       </p:sp>
       <p:sp>
         <p:nvSpPr>
@@ -26678,6 +28014,13 @@
             <a:prstDash val="solid"/>
           </a:ln>
         </p:spPr>
+        <p:txBody>
+          <a:bodyPr/>
+          <a:lstStyle/>
+          <a:p>
+            <a:endParaRPr lang="fr-FR"/>
+          </a:p>
+        </p:txBody>
       </p:sp>
       <p:sp>
         <p:nvSpPr>
@@ -26700,7 +28043,7 @@
           <a:bodyPr wrap="square" lIns="0" tIns="0" rIns="0" bIns="0" rtlCol="0" anchor="ctr"/>
           <a:lstStyle/>
           <a:p>
-            <a:pPr algn="ctr" indent="0" marL="0">
+            <a:pPr marL="0" indent="0" algn="ctr">
               <a:buNone/>
             </a:pPr>
             <a:r>
@@ -26739,7 +28082,7 @@
           <a:bodyPr wrap="square" rtlCol="0" anchor="ctr"/>
           <a:lstStyle/>
           <a:p>
-            <a:pPr indent="0" marL="0">
+            <a:pPr marL="0" indent="0">
               <a:buNone/>
             </a:pPr>
             <a:r>
@@ -26778,7 +28121,7 @@
           <a:bodyPr wrap="square" rtlCol="0" anchor="ctr"/>
           <a:lstStyle/>
           <a:p>
-            <a:pPr indent="0" marL="0">
+            <a:pPr marL="0" indent="0">
               <a:buNone/>
             </a:pPr>
             <a:r>
@@ -26822,6 +28165,13 @@
             <a:prstDash val="solid"/>
           </a:ln>
         </p:spPr>
+        <p:txBody>
+          <a:bodyPr/>
+          <a:lstStyle/>
+          <a:p>
+            <a:endParaRPr lang="fr-FR"/>
+          </a:p>
+        </p:txBody>
       </p:sp>
       <p:sp>
         <p:nvSpPr>
@@ -26844,7 +28194,7 @@
           <a:bodyPr wrap="square" rtlCol="0" anchor="t"/>
           <a:lstStyle/>
           <a:p>
-            <a:pPr indent="0" marL="0">
+            <a:pPr marL="0" indent="0">
               <a:buNone/>
             </a:pPr>
             <a:r>
@@ -26861,7 +28211,7 @@
             <a:endParaRPr lang="en-US" sz="850" dirty="0"/>
           </a:p>
           <a:p>
-            <a:pPr indent="0" marL="0">
+            <a:pPr marL="0" indent="0">
               <a:buNone/>
             </a:pPr>
             <a:r>
@@ -27180,4 +28530,319 @@
     </a:ext>
   </a:extLst>
 </a:theme>
+</file>
+
+<file path=ppt/theme/theme2.xml><?xml version="1.0" encoding="utf-8"?>
+<a:theme xmlns:a="http://schemas.openxmlformats.org/drawingml/2006/main" name="Thème Office">
+  <a:themeElements>
+    <a:clrScheme name="Office">
+      <a:dk1>
+        <a:sysClr val="windowText" lastClr="000000"/>
+      </a:dk1>
+      <a:lt1>
+        <a:sysClr val="window" lastClr="FFFFFF"/>
+      </a:lt1>
+      <a:dk2>
+        <a:srgbClr val="0E2841"/>
+      </a:dk2>
+      <a:lt2>
+        <a:srgbClr val="E8E8E8"/>
+      </a:lt2>
+      <a:accent1>
+        <a:srgbClr val="156082"/>
+      </a:accent1>
+      <a:accent2>
+        <a:srgbClr val="E97132"/>
+      </a:accent2>
+      <a:accent3>
+        <a:srgbClr val="196B24"/>
+      </a:accent3>
+      <a:accent4>
+        <a:srgbClr val="0F9ED5"/>
+      </a:accent4>
+      <a:accent5>
+        <a:srgbClr val="A02B93"/>
+      </a:accent5>
+      <a:accent6>
+        <a:srgbClr val="4EA72E"/>
+      </a:accent6>
+      <a:hlink>
+        <a:srgbClr val="467886"/>
+      </a:hlink>
+      <a:folHlink>
+        <a:srgbClr val="96607D"/>
+      </a:folHlink>
+    </a:clrScheme>
+    <a:fontScheme name="Office">
+      <a:majorFont>
+        <a:latin typeface="Aptos Display" panose="02110004020202020204"/>
+        <a:ea typeface=""/>
+        <a:cs typeface=""/>
+        <a:font script="Jpan" typeface="游ゴシック Light"/>
+        <a:font script="Hang" typeface="맑은 고딕"/>
+        <a:font script="Hans" typeface="等线 Light"/>
+        <a:font script="Hant" typeface="新細明體"/>
+        <a:font script="Arab" typeface="Times New Roman"/>
+        <a:font script="Hebr" typeface="Times New Roman"/>
+        <a:font script="Thai" typeface="Angsana New"/>
+        <a:font script="Ethi" typeface="Nyala"/>
+        <a:font script="Beng" typeface="Vrinda"/>
+        <a:font script="Gujr" typeface="Shruti"/>
+        <a:font script="Khmr" typeface="MoolBoran"/>
+        <a:font script="Knda" typeface="Tunga"/>
+        <a:font script="Guru" typeface="Raavi"/>
+        <a:font script="Cans" typeface="Euphemia"/>
+        <a:font script="Cher" typeface="Plantagenet Cherokee"/>
+        <a:font script="Yiii" typeface="Microsoft Yi Baiti"/>
+        <a:font script="Tibt" typeface="Microsoft Himalaya"/>
+        <a:font script="Thaa" typeface="MV Boli"/>
+        <a:font script="Deva" typeface="Mangal"/>
+        <a:font script="Telu" typeface="Gautami"/>
+        <a:font script="Taml" typeface="Latha"/>
+        <a:font script="Syrc" typeface="Estrangelo Edessa"/>
+        <a:font script="Orya" typeface="Kalinga"/>
+        <a:font script="Mlym" typeface="Kartika"/>
+        <a:font script="Laoo" typeface="DokChampa"/>
+        <a:font script="Sinh" typeface="Iskoola Pota"/>
+        <a:font script="Mong" typeface="Mongolian Baiti"/>
+        <a:font script="Viet" typeface="Times New Roman"/>
+        <a:font script="Uigh" typeface="Microsoft Uighur"/>
+        <a:font script="Geor" typeface="Sylfaen"/>
+        <a:font script="Armn" typeface="Arial"/>
+        <a:font script="Bugi" typeface="Leelawadee UI"/>
+        <a:font script="Bopo" typeface="Microsoft JhengHei"/>
+        <a:font script="Java" typeface="Javanese Text"/>
+        <a:font script="Lisu" typeface="Segoe UI"/>
+        <a:font script="Mymr" typeface="Myanmar Text"/>
+        <a:font script="Nkoo" typeface="Ebrima"/>
+        <a:font script="Olck" typeface="Nirmala UI"/>
+        <a:font script="Osma" typeface="Ebrima"/>
+        <a:font script="Phag" typeface="Phagspa"/>
+        <a:font script="Syrn" typeface="Estrangelo Edessa"/>
+        <a:font script="Syrj" typeface="Estrangelo Edessa"/>
+        <a:font script="Syre" typeface="Estrangelo Edessa"/>
+        <a:font script="Sora" typeface="Nirmala UI"/>
+        <a:font script="Tale" typeface="Microsoft Tai Le"/>
+        <a:font script="Talu" typeface="Microsoft New Tai Lue"/>
+        <a:font script="Tfng" typeface="Ebrima"/>
+      </a:majorFont>
+      <a:minorFont>
+        <a:latin typeface="Aptos" panose="02110004020202020204"/>
+        <a:ea typeface=""/>
+        <a:cs typeface=""/>
+        <a:font script="Jpan" typeface="游ゴシック"/>
+        <a:font script="Hang" typeface="맑은 고딕"/>
+        <a:font script="Hans" typeface="等线"/>
+        <a:font script="Hant" typeface="新細明體"/>
+        <a:font script="Arab" typeface="Arial"/>
+        <a:font script="Hebr" typeface="Arial"/>
+        <a:font script="Thai" typeface="Cordia New"/>
+        <a:font script="Ethi" typeface="Nyala"/>
+        <a:font script="Beng" typeface="Vrinda"/>
+        <a:font script="Gujr" typeface="Shruti"/>
+        <a:font script="Khmr" typeface="DaunPenh"/>
+        <a:font script="Knda" typeface="Tunga"/>
+        <a:font script="Guru" typeface="Raavi"/>
+        <a:font script="Cans" typeface="Euphemia"/>
+        <a:font script="Cher" typeface="Plantagenet Cherokee"/>
+        <a:font script="Yiii" typeface="Microsoft Yi Baiti"/>
+        <a:font script="Tibt" typeface="Microsoft Himalaya"/>
+        <a:font script="Thaa" typeface="MV Boli"/>
+        <a:font script="Deva" typeface="Mangal"/>
+        <a:font script="Telu" typeface="Gautami"/>
+        <a:font script="Taml" typeface="Latha"/>
+        <a:font script="Syrc" typeface="Estrangelo Edessa"/>
+        <a:font script="Orya" typeface="Kalinga"/>
+        <a:font script="Mlym" typeface="Kartika"/>
+        <a:font script="Laoo" typeface="DokChampa"/>
+        <a:font script="Sinh" typeface="Iskoola Pota"/>
+        <a:font script="Mong" typeface="Mongolian Baiti"/>
+        <a:font script="Viet" typeface="Arial"/>
+        <a:font script="Uigh" typeface="Microsoft Uighur"/>
+        <a:font script="Geor" typeface="Sylfaen"/>
+        <a:font script="Armn" typeface="Arial"/>
+        <a:font script="Bugi" typeface="Leelawadee UI"/>
+        <a:font script="Bopo" typeface="Microsoft JhengHei"/>
+        <a:font script="Java" typeface="Javanese Text"/>
+        <a:font script="Lisu" typeface="Segoe UI"/>
+        <a:font script="Mymr" typeface="Myanmar Text"/>
+        <a:font script="Nkoo" typeface="Ebrima"/>
+        <a:font script="Olck" typeface="Nirmala UI"/>
+        <a:font script="Osma" typeface="Ebrima"/>
+        <a:font script="Phag" typeface="Phagspa"/>
+        <a:font script="Syrn" typeface="Estrangelo Edessa"/>
+        <a:font script="Syrj" typeface="Estrangelo Edessa"/>
+        <a:font script="Syre" typeface="Estrangelo Edessa"/>
+        <a:font script="Sora" typeface="Nirmala UI"/>
+        <a:font script="Tale" typeface="Microsoft Tai Le"/>
+        <a:font script="Talu" typeface="Microsoft New Tai Lue"/>
+        <a:font script="Tfng" typeface="Ebrima"/>
+      </a:minorFont>
+    </a:fontScheme>
+    <a:fmtScheme name="Office">
+      <a:fillStyleLst>
+        <a:solidFill>
+          <a:schemeClr val="phClr"/>
+        </a:solidFill>
+        <a:gradFill rotWithShape="1">
+          <a:gsLst>
+            <a:gs pos="0">
+              <a:schemeClr val="phClr">
+                <a:lumMod val="110000"/>
+                <a:satMod val="105000"/>
+                <a:tint val="67000"/>
+              </a:schemeClr>
+            </a:gs>
+            <a:gs pos="50000">
+              <a:schemeClr val="phClr">
+                <a:lumMod val="105000"/>
+                <a:satMod val="103000"/>
+                <a:tint val="73000"/>
+              </a:schemeClr>
+            </a:gs>
+            <a:gs pos="100000">
+              <a:schemeClr val="phClr">
+                <a:lumMod val="105000"/>
+                <a:satMod val="109000"/>
+                <a:tint val="81000"/>
+              </a:schemeClr>
+            </a:gs>
+          </a:gsLst>
+          <a:lin ang="5400000" scaled="0"/>
+        </a:gradFill>
+        <a:gradFill rotWithShape="1">
+          <a:gsLst>
+            <a:gs pos="0">
+              <a:schemeClr val="phClr">
+                <a:satMod val="103000"/>
+                <a:lumMod val="102000"/>
+                <a:tint val="94000"/>
+              </a:schemeClr>
+            </a:gs>
+            <a:gs pos="50000">
+              <a:schemeClr val="phClr">
+                <a:satMod val="110000"/>
+                <a:lumMod val="100000"/>
+                <a:shade val="100000"/>
+              </a:schemeClr>
+            </a:gs>
+            <a:gs pos="100000">
+              <a:schemeClr val="phClr">
+                <a:lumMod val="99000"/>
+                <a:satMod val="120000"/>
+                <a:shade val="78000"/>
+              </a:schemeClr>
+            </a:gs>
+          </a:gsLst>
+          <a:lin ang="5400000" scaled="0"/>
+        </a:gradFill>
+      </a:fillStyleLst>
+      <a:lnStyleLst>
+        <a:ln w="12700" cap="flat" cmpd="sng" algn="ctr">
+          <a:solidFill>
+            <a:schemeClr val="phClr"/>
+          </a:solidFill>
+          <a:prstDash val="solid"/>
+          <a:miter lim="800000"/>
+        </a:ln>
+        <a:ln w="19050" cap="flat" cmpd="sng" algn="ctr">
+          <a:solidFill>
+            <a:schemeClr val="phClr"/>
+          </a:solidFill>
+          <a:prstDash val="solid"/>
+          <a:miter lim="800000"/>
+        </a:ln>
+        <a:ln w="25400" cap="flat" cmpd="sng" algn="ctr">
+          <a:solidFill>
+            <a:schemeClr val="phClr"/>
+          </a:solidFill>
+          <a:prstDash val="solid"/>
+          <a:miter lim="800000"/>
+        </a:ln>
+      </a:lnStyleLst>
+      <a:effectStyleLst>
+        <a:effectStyle>
+          <a:effectLst/>
+        </a:effectStyle>
+        <a:effectStyle>
+          <a:effectLst/>
+        </a:effectStyle>
+        <a:effectStyle>
+          <a:effectLst>
+            <a:outerShdw blurRad="57150" dist="19050" dir="5400000" algn="ctr" rotWithShape="0">
+              <a:srgbClr val="000000">
+                <a:alpha val="63000"/>
+              </a:srgbClr>
+            </a:outerShdw>
+          </a:effectLst>
+        </a:effectStyle>
+      </a:effectStyleLst>
+      <a:bgFillStyleLst>
+        <a:solidFill>
+          <a:schemeClr val="phClr"/>
+        </a:solidFill>
+        <a:solidFill>
+          <a:schemeClr val="phClr">
+            <a:tint val="95000"/>
+            <a:satMod val="170000"/>
+          </a:schemeClr>
+        </a:solidFill>
+        <a:gradFill rotWithShape="1">
+          <a:gsLst>
+            <a:gs pos="0">
+              <a:schemeClr val="phClr">
+                <a:tint val="93000"/>
+                <a:satMod val="150000"/>
+                <a:shade val="98000"/>
+                <a:lumMod val="102000"/>
+              </a:schemeClr>
+            </a:gs>
+            <a:gs pos="50000">
+              <a:schemeClr val="phClr">
+                <a:tint val="98000"/>
+                <a:satMod val="130000"/>
+                <a:shade val="90000"/>
+                <a:lumMod val="103000"/>
+              </a:schemeClr>
+            </a:gs>
+            <a:gs pos="100000">
+              <a:schemeClr val="phClr">
+                <a:shade val="63000"/>
+                <a:satMod val="120000"/>
+              </a:schemeClr>
+            </a:gs>
+          </a:gsLst>
+          <a:lin ang="5400000" scaled="0"/>
+        </a:gradFill>
+      </a:bgFillStyleLst>
+    </a:fmtScheme>
+  </a:themeElements>
+  <a:objectDefaults>
+    <a:lnDef>
+      <a:spPr/>
+      <a:bodyPr/>
+      <a:lstStyle/>
+      <a:style>
+        <a:lnRef idx="2">
+          <a:schemeClr val="accent1"/>
+        </a:lnRef>
+        <a:fillRef idx="0">
+          <a:schemeClr val="accent1"/>
+        </a:fillRef>
+        <a:effectRef idx="1">
+          <a:schemeClr val="accent1"/>
+        </a:effectRef>
+        <a:fontRef idx="minor">
+          <a:schemeClr val="tx1"/>
+        </a:fontRef>
+      </a:style>
+    </a:lnDef>
+  </a:objectDefaults>
+  <a:extraClrSchemeLst/>
+  <a:extLst>
+    <a:ext uri="{05A4C25C-085E-4340-85A3-A5531E510DB2}">
+      <thm15:themeFamily xmlns:thm15="http://schemas.microsoft.com/office/thememl/2012/main" name="Office Theme" id="{2E142A2C-CD16-42D6-873A-C26D2A0506FA}" vid="{1BDDFF52-6CD6-40A5-AB3C-68EB2F1E4D0A}"/>
+    </a:ext>
+  </a:extLst>
+</a:theme>
 </file>